--- a/presentation/LLM项目课堂展示.pptx
+++ b/presentation/LLM项目课堂展示.pptx
@@ -12,9 +12,13 @@
     <p:sldId id="260" r:id="rId6"/>
     <p:sldId id="261" r:id="rId7"/>
     <p:sldId id="262" r:id="rId8"/>
+    <p:sldId id="263" r:id="rId9"/>
+    <p:sldId id="264" r:id="rId10"/>
+    <p:sldId id="265" r:id="rId11"/>
+    <p:sldId id="266" r:id="rId12"/>
   </p:sldIdLst>
   <p:notesMasterIdLst>
-    <p:notesMasterId r:id="rId9"/>
+    <p:notesMasterId r:id="rId13"/>
   </p:notesMasterIdLst>
   <p:sldSz cx="12191695" cy="6858000"/>
   <p:notesSz cx="6858000" cy="12191695"/>
@@ -550,6 +554,182 @@
 </p:notes>
 </file>
 
+<file path=ppt/notesSlides/notesSlide10.xml><?xml version="1.0" encoding="utf-8"?>
+<p:notes xmlns:a="http://schemas.openxmlformats.org/drawingml/2006/main" xmlns:r="http://schemas.openxmlformats.org/officeDocument/2006/relationships" xmlns:p="http://schemas.openxmlformats.org/presentationml/2006/main">
+  <p:cSld>
+    <p:spTree>
+      <p:nvGrpSpPr>
+        <p:cNvPr id="1" name=""/>
+        <p:cNvGrpSpPr/>
+        <p:nvPr/>
+      </p:nvGrpSpPr>
+      <p:grpSpPr>
+        <a:xfrm>
+          <a:off x="0" y="0"/>
+          <a:ext cx="0" cy="0"/>
+          <a:chOff x="0" y="0"/>
+          <a:chExt cx="0" cy="0"/>
+        </a:xfrm>
+      </p:grpSpPr>
+      <p:sp>
+        <p:nvSpPr>
+          <p:cNvPr id="2" name="Slide Image Placeholder 1"/>
+          <p:cNvSpPr>
+            <a:spLocks noGrp="1" noRot="1" noChangeAspect="1"/>
+          </p:cNvSpPr>
+          <p:nvPr>
+            <p:ph type="sldImg"/>
+          </p:nvPr>
+        </p:nvSpPr>
+        <p:spPr/>
+      </p:sp>
+      <p:sp>
+        <p:nvSpPr>
+          <p:cNvPr id="3" name="Notes Placeholder 2"/>
+          <p:cNvSpPr>
+            <a:spLocks noGrp="1"/>
+          </p:cNvSpPr>
+          <p:nvPr>
+            <p:ph type="body" idx="1"/>
+          </p:nvPr>
+        </p:nvSpPr>
+        <p:spPr/>
+        <p:txBody>
+          <a:bodyPr/>
+          <a:lstStyle/>
+          <a:p>
+            <a:r>
+              <a:rPr lang="en-US" dirty="0"/>
+              <a:t/>
+            </a:r>
+            <a:endParaRPr lang="en-US" dirty="0"/>
+          </a:p>
+        </p:txBody>
+      </p:sp>
+      <p:sp>
+        <p:nvSpPr>
+          <p:cNvPr id="4" name="Slide Number Placeholder 3"/>
+          <p:cNvSpPr>
+            <a:spLocks noGrp="1"/>
+          </p:cNvSpPr>
+          <p:nvPr>
+            <p:ph type="sldNum" sz="quarter" idx="10"/>
+          </p:nvPr>
+        </p:nvSpPr>
+        <p:spPr/>
+        <p:txBody>
+          <a:bodyPr/>
+          <a:lstStyle/>
+          <a:p>
+            <a:fld id="{F7021451-1387-4CA6-816F-3879F97B5CBC}" type="slidenum">
+              <a:rPr lang="en-US"/>
+              <a:t>10</a:t>
+            </a:fld>
+            <a:endParaRPr lang="en-US"/>
+          </a:p>
+        </p:txBody>
+      </p:sp>
+    </p:spTree>
+    <p:extLst>
+      <p:ext uri="{BB962C8B-B14F-4D97-AF65-F5344CB8AC3E}">
+        <p14:creationId xmlns:p14="http://schemas.microsoft.com/office/powerpoint/2010/main" val="1024086991"/>
+      </p:ext>
+    </p:extLst>
+  </p:cSld>
+  <p:clrMapOvr>
+    <a:masterClrMapping/>
+  </p:clrMapOvr>
+</p:notes>
+</file>
+
+<file path=ppt/notesSlides/notesSlide11.xml><?xml version="1.0" encoding="utf-8"?>
+<p:notes xmlns:a="http://schemas.openxmlformats.org/drawingml/2006/main" xmlns:r="http://schemas.openxmlformats.org/officeDocument/2006/relationships" xmlns:p="http://schemas.openxmlformats.org/presentationml/2006/main">
+  <p:cSld>
+    <p:spTree>
+      <p:nvGrpSpPr>
+        <p:cNvPr id="1" name=""/>
+        <p:cNvGrpSpPr/>
+        <p:nvPr/>
+      </p:nvGrpSpPr>
+      <p:grpSpPr>
+        <a:xfrm>
+          <a:off x="0" y="0"/>
+          <a:ext cx="0" cy="0"/>
+          <a:chOff x="0" y="0"/>
+          <a:chExt cx="0" cy="0"/>
+        </a:xfrm>
+      </p:grpSpPr>
+      <p:sp>
+        <p:nvSpPr>
+          <p:cNvPr id="2" name="Slide Image Placeholder 1"/>
+          <p:cNvSpPr>
+            <a:spLocks noGrp="1" noRot="1" noChangeAspect="1"/>
+          </p:cNvSpPr>
+          <p:nvPr>
+            <p:ph type="sldImg"/>
+          </p:nvPr>
+        </p:nvSpPr>
+        <p:spPr/>
+      </p:sp>
+      <p:sp>
+        <p:nvSpPr>
+          <p:cNvPr id="3" name="Notes Placeholder 2"/>
+          <p:cNvSpPr>
+            <a:spLocks noGrp="1"/>
+          </p:cNvSpPr>
+          <p:nvPr>
+            <p:ph type="body" idx="1"/>
+          </p:nvPr>
+        </p:nvSpPr>
+        <p:spPr/>
+        <p:txBody>
+          <a:bodyPr/>
+          <a:lstStyle/>
+          <a:p>
+            <a:r>
+              <a:rPr lang="en-US" dirty="0"/>
+              <a:t/>
+            </a:r>
+            <a:endParaRPr lang="en-US" dirty="0"/>
+          </a:p>
+        </p:txBody>
+      </p:sp>
+      <p:sp>
+        <p:nvSpPr>
+          <p:cNvPr id="4" name="Slide Number Placeholder 3"/>
+          <p:cNvSpPr>
+            <a:spLocks noGrp="1"/>
+          </p:cNvSpPr>
+          <p:nvPr>
+            <p:ph type="sldNum" sz="quarter" idx="10"/>
+          </p:nvPr>
+        </p:nvSpPr>
+        <p:spPr/>
+        <p:txBody>
+          <a:bodyPr/>
+          <a:lstStyle/>
+          <a:p>
+            <a:fld id="{F7021451-1387-4CA6-816F-3879F97B5CBC}" type="slidenum">
+              <a:rPr lang="en-US"/>
+              <a:t>11</a:t>
+            </a:fld>
+            <a:endParaRPr lang="en-US"/>
+          </a:p>
+        </p:txBody>
+      </p:sp>
+    </p:spTree>
+    <p:extLst>
+      <p:ext uri="{BB962C8B-B14F-4D97-AF65-F5344CB8AC3E}">
+        <p14:creationId xmlns:p14="http://schemas.microsoft.com/office/powerpoint/2010/main" val="1024086991"/>
+      </p:ext>
+    </p:extLst>
+  </p:cSld>
+  <p:clrMapOvr>
+    <a:masterClrMapping/>
+  </p:clrMapOvr>
+</p:notes>
+</file>
+
 <file path=ppt/notesSlides/notesSlide2.xml><?xml version="1.0" encoding="utf-8"?>
 <p:notes xmlns:a="http://schemas.openxmlformats.org/drawingml/2006/main" xmlns:r="http://schemas.openxmlformats.org/officeDocument/2006/relationships" xmlns:p="http://schemas.openxmlformats.org/presentationml/2006/main">
   <p:cSld>
@@ -1060,6 +1240,182 @@
             <a:fld id="{F7021451-1387-4CA6-816F-3879F97B5CBC}" type="slidenum">
               <a:rPr lang="en-US"/>
               <a:t>7</a:t>
+            </a:fld>
+            <a:endParaRPr lang="en-US"/>
+          </a:p>
+        </p:txBody>
+      </p:sp>
+    </p:spTree>
+    <p:extLst>
+      <p:ext uri="{BB962C8B-B14F-4D97-AF65-F5344CB8AC3E}">
+        <p14:creationId xmlns:p14="http://schemas.microsoft.com/office/powerpoint/2010/main" val="1024086991"/>
+      </p:ext>
+    </p:extLst>
+  </p:cSld>
+  <p:clrMapOvr>
+    <a:masterClrMapping/>
+  </p:clrMapOvr>
+</p:notes>
+</file>
+
+<file path=ppt/notesSlides/notesSlide8.xml><?xml version="1.0" encoding="utf-8"?>
+<p:notes xmlns:a="http://schemas.openxmlformats.org/drawingml/2006/main" xmlns:r="http://schemas.openxmlformats.org/officeDocument/2006/relationships" xmlns:p="http://schemas.openxmlformats.org/presentationml/2006/main">
+  <p:cSld>
+    <p:spTree>
+      <p:nvGrpSpPr>
+        <p:cNvPr id="1" name=""/>
+        <p:cNvGrpSpPr/>
+        <p:nvPr/>
+      </p:nvGrpSpPr>
+      <p:grpSpPr>
+        <a:xfrm>
+          <a:off x="0" y="0"/>
+          <a:ext cx="0" cy="0"/>
+          <a:chOff x="0" y="0"/>
+          <a:chExt cx="0" cy="0"/>
+        </a:xfrm>
+      </p:grpSpPr>
+      <p:sp>
+        <p:nvSpPr>
+          <p:cNvPr id="2" name="Slide Image Placeholder 1"/>
+          <p:cNvSpPr>
+            <a:spLocks noGrp="1" noRot="1" noChangeAspect="1"/>
+          </p:cNvSpPr>
+          <p:nvPr>
+            <p:ph type="sldImg"/>
+          </p:nvPr>
+        </p:nvSpPr>
+        <p:spPr/>
+      </p:sp>
+      <p:sp>
+        <p:nvSpPr>
+          <p:cNvPr id="3" name="Notes Placeholder 2"/>
+          <p:cNvSpPr>
+            <a:spLocks noGrp="1"/>
+          </p:cNvSpPr>
+          <p:nvPr>
+            <p:ph type="body" idx="1"/>
+          </p:nvPr>
+        </p:nvSpPr>
+        <p:spPr/>
+        <p:txBody>
+          <a:bodyPr/>
+          <a:lstStyle/>
+          <a:p>
+            <a:r>
+              <a:rPr lang="en-US" dirty="0"/>
+              <a:t/>
+            </a:r>
+            <a:endParaRPr lang="en-US" dirty="0"/>
+          </a:p>
+        </p:txBody>
+      </p:sp>
+      <p:sp>
+        <p:nvSpPr>
+          <p:cNvPr id="4" name="Slide Number Placeholder 3"/>
+          <p:cNvSpPr>
+            <a:spLocks noGrp="1"/>
+          </p:cNvSpPr>
+          <p:nvPr>
+            <p:ph type="sldNum" sz="quarter" idx="10"/>
+          </p:nvPr>
+        </p:nvSpPr>
+        <p:spPr/>
+        <p:txBody>
+          <a:bodyPr/>
+          <a:lstStyle/>
+          <a:p>
+            <a:fld id="{F7021451-1387-4CA6-816F-3879F97B5CBC}" type="slidenum">
+              <a:rPr lang="en-US"/>
+              <a:t>8</a:t>
+            </a:fld>
+            <a:endParaRPr lang="en-US"/>
+          </a:p>
+        </p:txBody>
+      </p:sp>
+    </p:spTree>
+    <p:extLst>
+      <p:ext uri="{BB962C8B-B14F-4D97-AF65-F5344CB8AC3E}">
+        <p14:creationId xmlns:p14="http://schemas.microsoft.com/office/powerpoint/2010/main" val="1024086991"/>
+      </p:ext>
+    </p:extLst>
+  </p:cSld>
+  <p:clrMapOvr>
+    <a:masterClrMapping/>
+  </p:clrMapOvr>
+</p:notes>
+</file>
+
+<file path=ppt/notesSlides/notesSlide9.xml><?xml version="1.0" encoding="utf-8"?>
+<p:notes xmlns:a="http://schemas.openxmlformats.org/drawingml/2006/main" xmlns:r="http://schemas.openxmlformats.org/officeDocument/2006/relationships" xmlns:p="http://schemas.openxmlformats.org/presentationml/2006/main">
+  <p:cSld>
+    <p:spTree>
+      <p:nvGrpSpPr>
+        <p:cNvPr id="1" name=""/>
+        <p:cNvGrpSpPr/>
+        <p:nvPr/>
+      </p:nvGrpSpPr>
+      <p:grpSpPr>
+        <a:xfrm>
+          <a:off x="0" y="0"/>
+          <a:ext cx="0" cy="0"/>
+          <a:chOff x="0" y="0"/>
+          <a:chExt cx="0" cy="0"/>
+        </a:xfrm>
+      </p:grpSpPr>
+      <p:sp>
+        <p:nvSpPr>
+          <p:cNvPr id="2" name="Slide Image Placeholder 1"/>
+          <p:cNvSpPr>
+            <a:spLocks noGrp="1" noRot="1" noChangeAspect="1"/>
+          </p:cNvSpPr>
+          <p:nvPr>
+            <p:ph type="sldImg"/>
+          </p:nvPr>
+        </p:nvSpPr>
+        <p:spPr/>
+      </p:sp>
+      <p:sp>
+        <p:nvSpPr>
+          <p:cNvPr id="3" name="Notes Placeholder 2"/>
+          <p:cNvSpPr>
+            <a:spLocks noGrp="1"/>
+          </p:cNvSpPr>
+          <p:nvPr>
+            <p:ph type="body" idx="1"/>
+          </p:nvPr>
+        </p:nvSpPr>
+        <p:spPr/>
+        <p:txBody>
+          <a:bodyPr/>
+          <a:lstStyle/>
+          <a:p>
+            <a:r>
+              <a:rPr lang="en-US" dirty="0"/>
+              <a:t/>
+            </a:r>
+            <a:endParaRPr lang="en-US" dirty="0"/>
+          </a:p>
+        </p:txBody>
+      </p:sp>
+      <p:sp>
+        <p:nvSpPr>
+          <p:cNvPr id="4" name="Slide Number Placeholder 3"/>
+          <p:cNvSpPr>
+            <a:spLocks noGrp="1"/>
+          </p:cNvSpPr>
+          <p:nvPr>
+            <p:ph type="sldNum" sz="quarter" idx="10"/>
+          </p:nvPr>
+        </p:nvSpPr>
+        <p:spPr/>
+        <p:txBody>
+          <a:bodyPr/>
+          <a:lstStyle/>
+          <a:p>
+            <a:fld id="{F7021451-1387-4CA6-816F-3879F97B5CBC}" type="slidenum">
+              <a:rPr lang="en-US"/>
+              <a:t>9</a:t>
             </a:fld>
             <a:endParaRPr lang="en-US"/>
           </a:p>
@@ -1417,26 +1773,63 @@
         </p:nvSpPr>
         <p:spPr>
           <a:xfrm>
-            <a:off x="685800" y="658368"/>
-            <a:ext cx="7406640" cy="1188720"/>
-          </a:xfrm>
-          <a:prstGeom prst="rect">
-            <a:avLst/>
-          </a:prstGeom>
-          <a:noFill/>
-          <a:ln/>
-        </p:spPr>
-        <p:txBody>
-          <a:bodyPr wrap="square" lIns="0" tIns="0" rIns="0" bIns="0" rtlCol="0" anchor="ctr">
-            <a:normAutofit/>
-          </a:bodyPr>
-          <a:lstStyle/>
-          <a:p>
-            <a:pPr indent="0" marL="0">
-              <a:buNone/>
-            </a:pPr>
-            <a:r>
-              <a:rPr lang="en-US" sz="3400" b="1" dirty="0">
+            <a:off x="658368" y="749808"/>
+            <a:ext cx="7223760" cy="502920"/>
+          </a:xfrm>
+          <a:prstGeom prst="rect">
+            <a:avLst/>
+          </a:prstGeom>
+          <a:noFill/>
+          <a:ln/>
+        </p:spPr>
+        <p:txBody>
+          <a:bodyPr wrap="square" lIns="0" tIns="0" rIns="0" bIns="0" rtlCol="0" anchor="ctr"/>
+          <a:lstStyle/>
+          <a:p>
+            <a:pPr indent="0" marL="0">
+              <a:buNone/>
+            </a:pPr>
+            <a:r>
+              <a:rPr lang="en-US" sz="2500" b="1" dirty="0">
+                <a:solidFill>
+                  <a:srgbClr val="0F766E"/>
+                </a:solidFill>
+                <a:latin typeface="Noto Sans SC" pitchFamily="34" charset="0"/>
+                <a:ea typeface="Noto Sans SC" pitchFamily="34" charset="-122"/>
+                <a:cs typeface="Noto Sans SC" pitchFamily="34" charset="-120"/>
+              </a:rPr>
+              <a:t>2024-2026 主流大语言模型</a:t>
+            </a:r>
+            <a:endParaRPr lang="en-US" sz="2500" dirty="0"/>
+          </a:p>
+        </p:txBody>
+      </p:sp>
+      <p:sp>
+        <p:nvSpPr>
+          <p:cNvPr id="3" name="Text 1"/>
+          <p:cNvSpPr/>
+          <p:nvPr/>
+        </p:nvSpPr>
+        <p:spPr>
+          <a:xfrm>
+            <a:off x="658368" y="1298448"/>
+            <a:ext cx="7863840" cy="822960"/>
+          </a:xfrm>
+          <a:prstGeom prst="rect">
+            <a:avLst/>
+          </a:prstGeom>
+          <a:noFill/>
+          <a:ln/>
+        </p:spPr>
+        <p:txBody>
+          <a:bodyPr wrap="square" lIns="0" tIns="0" rIns="0" bIns="0" rtlCol="0" anchor="ctr"/>
+          <a:lstStyle/>
+          <a:p>
+            <a:pPr indent="0" marL="0">
+              <a:buNone/>
+            </a:pPr>
+            <a:r>
+              <a:rPr lang="en-US" sz="3700" b="1" dirty="0">
                 <a:solidFill>
                   <a:srgbClr val="232B38"/>
                 </a:solidFill>
@@ -1444,22 +1837,22 @@
                 <a:ea typeface="Noto Sans SC" pitchFamily="34" charset="-122"/>
                 <a:cs typeface="Noto Sans SC" pitchFamily="34" charset="-120"/>
               </a:rPr>
-              <a:t>开源大语言模型性能演进与架构特征分析</a:t>
-            </a:r>
-            <a:endParaRPr lang="en-US" sz="3400" dirty="0"/>
-          </a:p>
-        </p:txBody>
-      </p:sp>
-      <p:sp>
-        <p:nvSpPr>
-          <p:cNvPr id="3" name="Text 1"/>
-          <p:cNvSpPr/>
-          <p:nvPr/>
-        </p:nvSpPr>
-        <p:spPr>
-          <a:xfrm>
-            <a:off x="713232" y="1965960"/>
-            <a:ext cx="6949440" cy="347472"/>
+              <a:t>数据处理与可视化分析</a:t>
+            </a:r>
+            <a:endParaRPr lang="en-US" sz="3700" dirty="0"/>
+          </a:p>
+        </p:txBody>
+      </p:sp>
+      <p:sp>
+        <p:nvSpPr>
+          <p:cNvPr id="4" name="Text 2"/>
+          <p:cNvSpPr/>
+          <p:nvPr/>
+        </p:nvSpPr>
+        <p:spPr>
+          <a:xfrm>
+            <a:off x="685800" y="2395728"/>
+            <a:ext cx="7680960" cy="438912"/>
           </a:xfrm>
           <a:prstGeom prst="rect">
             <a:avLst/>
@@ -1477,13 +1870,13 @@
             <a:r>
               <a:rPr lang="en-US" sz="1600" dirty="0">
                 <a:solidFill>
-                  <a:srgbClr val="667085"/>
-                </a:solidFill>
-                <a:latin typeface="Noto Sans SC" pitchFamily="34" charset="0"/>
-                <a:ea typeface="Noto Sans SC" pitchFamily="34" charset="-122"/>
-                <a:cs typeface="Noto Sans SC" pitchFamily="34" charset="-120"/>
-              </a:rPr>
-              <a:t>本地数据处理 · KNN 插补 · 归一化 · 五类可视化证据</a:t>
+                  <a:srgbClr val="64748B"/>
+                </a:solidFill>
+                <a:latin typeface="Noto Sans SC" pitchFamily="34" charset="0"/>
+                <a:ea typeface="Noto Sans SC" pitchFamily="34" charset="-122"/>
+                <a:cs typeface="Noto Sans SC" pitchFamily="34" charset="-120"/>
+              </a:rPr>
+              <a:t>横向比较不同模型，纵向观察同一系列进步；用图表把复杂表格数据变成可解释结论。</a:t>
             </a:r>
             <a:endParaRPr lang="en-US" sz="1600" dirty="0"/>
           </a:p>
@@ -1491,20 +1884,20 @@
       </p:sp>
       <p:sp>
         <p:nvSpPr>
-          <p:cNvPr id="4" name="Shape 2"/>
-          <p:cNvSpPr/>
-          <p:nvPr/>
-        </p:nvSpPr>
-        <p:spPr>
-          <a:xfrm>
-            <a:off x="8366760" y="713232"/>
-            <a:ext cx="2606040" cy="5120640"/>
+          <p:cNvPr id="5" name="Shape 3"/>
+          <p:cNvSpPr/>
+          <p:nvPr/>
+        </p:nvSpPr>
+        <p:spPr>
+          <a:xfrm>
+            <a:off x="8549640" y="868680"/>
+            <a:ext cx="2514600" cy="960120"/>
           </a:xfrm>
           <a:prstGeom prst="rect">
             <a:avLst/>
           </a:prstGeom>
           <a:solidFill>
-            <a:srgbClr val="FFFFFF"/>
+            <a:srgbClr val="F8FAFC"/>
           </a:solidFill>
           <a:ln w="12700">
             <a:solidFill>
@@ -1516,14 +1909,14 @@
       </p:sp>
       <p:sp>
         <p:nvSpPr>
-          <p:cNvPr id="5" name="Text 3"/>
-          <p:cNvSpPr/>
-          <p:nvPr/>
-        </p:nvSpPr>
-        <p:spPr>
-          <a:xfrm>
-            <a:off x="8641080" y="1078992"/>
-            <a:ext cx="2011680" cy="237744"/>
+          <p:cNvPr id="6" name="Text 4"/>
+          <p:cNvSpPr/>
+          <p:nvPr/>
+        </p:nvSpPr>
+        <p:spPr>
+          <a:xfrm>
+            <a:off x="8750808" y="1051560"/>
+            <a:ext cx="2112264" cy="237744"/>
           </a:xfrm>
           <a:prstGeom prst="rect">
             <a:avLst/>
@@ -1539,7 +1932,7 @@
               <a:buNone/>
             </a:pPr>
             <a:r>
-              <a:rPr lang="en-US" sz="1200" b="1" dirty="0">
+              <a:rPr lang="en-US" sz="1300" b="1" dirty="0">
                 <a:solidFill>
                   <a:srgbClr val="0F766E"/>
                 </a:solidFill>
@@ -1547,22 +1940,22 @@
                 <a:ea typeface="Noto Sans SC" pitchFamily="34" charset="-122"/>
                 <a:cs typeface="Noto Sans SC" pitchFamily="34" charset="-120"/>
               </a:rPr>
-              <a:t>数据对象</a:t>
-            </a:r>
-            <a:endParaRPr lang="en-US" sz="1200" dirty="0"/>
-          </a:p>
-        </p:txBody>
-      </p:sp>
-      <p:sp>
-        <p:nvSpPr>
-          <p:cNvPr id="6" name="Text 4"/>
-          <p:cNvSpPr/>
-          <p:nvPr/>
-        </p:nvSpPr>
-        <p:spPr>
-          <a:xfrm>
-            <a:off x="8641080" y="1417320"/>
-            <a:ext cx="2011680" cy="566928"/>
+              <a:t>课程目标</a:t>
+            </a:r>
+            <a:endParaRPr lang="en-US" sz="1300" dirty="0"/>
+          </a:p>
+        </p:txBody>
+      </p:sp>
+      <p:sp>
+        <p:nvSpPr>
+          <p:cNvPr id="7" name="Text 5"/>
+          <p:cNvSpPr/>
+          <p:nvPr/>
+        </p:nvSpPr>
+        <p:spPr>
+          <a:xfrm>
+            <a:off x="8750808" y="1380744"/>
+            <a:ext cx="2112264" cy="301752"/>
           </a:xfrm>
           <a:prstGeom prst="rect">
             <a:avLst/>
@@ -1580,7 +1973,7 @@
               <a:buNone/>
             </a:pPr>
             <a:r>
-              <a:rPr lang="en-US" sz="1500" dirty="0">
+              <a:rPr lang="en-US" sz="1350" dirty="0">
                 <a:solidFill>
                   <a:srgbClr val="232B38"/>
                 </a:solidFill>
@@ -1588,22 +1981,47 @@
                 <a:ea typeface="Noto Sans SC" pitchFamily="34" charset="-122"/>
                 <a:cs typeface="Noto Sans SC" pitchFamily="34" charset="-120"/>
               </a:rPr>
-              <a:t>2024-2026 LLM 基准、Elo、架构与硬件延迟</a:t>
-            </a:r>
-            <a:endParaRPr lang="en-US" sz="1500" dirty="0"/>
-          </a:p>
-        </p:txBody>
-      </p:sp>
-      <p:sp>
-        <p:nvSpPr>
-          <p:cNvPr id="7" name="Text 5"/>
-          <p:cNvSpPr/>
-          <p:nvPr/>
-        </p:nvSpPr>
-        <p:spPr>
-          <a:xfrm>
-            <a:off x="8641080" y="2496312"/>
-            <a:ext cx="2011680" cy="237744"/>
+              <a:t>数据收集、清洗、特征工程、可视化表达</a:t>
+            </a:r>
+            <a:endParaRPr lang="en-US" sz="1350" dirty="0"/>
+          </a:p>
+        </p:txBody>
+      </p:sp>
+      <p:sp>
+        <p:nvSpPr>
+          <p:cNvPr id="8" name="Shape 6"/>
+          <p:cNvSpPr/>
+          <p:nvPr/>
+        </p:nvSpPr>
+        <p:spPr>
+          <a:xfrm>
+            <a:off x="8549640" y="2286000"/>
+            <a:ext cx="2514600" cy="960120"/>
+          </a:xfrm>
+          <a:prstGeom prst="rect">
+            <a:avLst/>
+          </a:prstGeom>
+          <a:solidFill>
+            <a:srgbClr val="F8FAFC"/>
+          </a:solidFill>
+          <a:ln w="12700">
+            <a:solidFill>
+              <a:srgbClr val="D8E0EA"/>
+            </a:solidFill>
+            <a:prstDash val="solid"/>
+          </a:ln>
+        </p:spPr>
+      </p:sp>
+      <p:sp>
+        <p:nvSpPr>
+          <p:cNvPr id="9" name="Text 7"/>
+          <p:cNvSpPr/>
+          <p:nvPr/>
+        </p:nvSpPr>
+        <p:spPr>
+          <a:xfrm>
+            <a:off x="8750808" y="2468880"/>
+            <a:ext cx="2112264" cy="237744"/>
           </a:xfrm>
           <a:prstGeom prst="rect">
             <a:avLst/>
@@ -1619,30 +2037,30 @@
               <a:buNone/>
             </a:pPr>
             <a:r>
-              <a:rPr lang="en-US" sz="1200" b="1" dirty="0">
-                <a:solidFill>
-                  <a:srgbClr val="0F766E"/>
-                </a:solidFill>
-                <a:latin typeface="Noto Sans SC" pitchFamily="34" charset="0"/>
-                <a:ea typeface="Noto Sans SC" pitchFamily="34" charset="-122"/>
-                <a:cs typeface="Noto Sans SC" pitchFamily="34" charset="-120"/>
-              </a:rPr>
-              <a:t>处理重点</a:t>
-            </a:r>
-            <a:endParaRPr lang="en-US" sz="1200" dirty="0"/>
-          </a:p>
-        </p:txBody>
-      </p:sp>
-      <p:sp>
-        <p:nvSpPr>
-          <p:cNvPr id="8" name="Text 6"/>
-          <p:cNvSpPr/>
-          <p:nvPr/>
-        </p:nvSpPr>
-        <p:spPr>
-          <a:xfrm>
-            <a:off x="8641080" y="2834640"/>
-            <a:ext cx="2011680" cy="566928"/>
+              <a:rPr lang="en-US" sz="1300" b="1" dirty="0">
+                <a:solidFill>
+                  <a:srgbClr val="2563EB"/>
+                </a:solidFill>
+                <a:latin typeface="Noto Sans SC" pitchFamily="34" charset="0"/>
+                <a:ea typeface="Noto Sans SC" pitchFamily="34" charset="-122"/>
+                <a:cs typeface="Noto Sans SC" pitchFamily="34" charset="-120"/>
+              </a:rPr>
+              <a:t>数据范围</a:t>
+            </a:r>
+            <a:endParaRPr lang="en-US" sz="1300" dirty="0"/>
+          </a:p>
+        </p:txBody>
+      </p:sp>
+      <p:sp>
+        <p:nvSpPr>
+          <p:cNvPr id="10" name="Text 8"/>
+          <p:cNvSpPr/>
+          <p:nvPr/>
+        </p:nvSpPr>
+        <p:spPr>
+          <a:xfrm>
+            <a:off x="8750808" y="2798064"/>
+            <a:ext cx="2112264" cy="301752"/>
           </a:xfrm>
           <a:prstGeom prst="rect">
             <a:avLst/>
@@ -1660,7 +2078,7 @@
               <a:buNone/>
             </a:pPr>
             <a:r>
-              <a:rPr lang="en-US" sz="1500" dirty="0">
+              <a:rPr lang="en-US" sz="1350" dirty="0">
                 <a:solidFill>
                   <a:srgbClr val="232B38"/>
                 </a:solidFill>
@@ -1668,22 +2086,47 @@
                 <a:ea typeface="Noto Sans SC" pitchFamily="34" charset="-122"/>
                 <a:cs typeface="Noto Sans SC" pitchFamily="34" charset="-120"/>
               </a:rPr>
-              <a:t>参数修正、Elo 插补、Min-Max 归一化</a:t>
-            </a:r>
-            <a:endParaRPr lang="en-US" sz="1500" dirty="0"/>
-          </a:p>
-        </p:txBody>
-      </p:sp>
-      <p:sp>
-        <p:nvSpPr>
-          <p:cNvPr id="9" name="Text 7"/>
-          <p:cNvSpPr/>
-          <p:nvPr/>
-        </p:nvSpPr>
-        <p:spPr>
-          <a:xfrm>
-            <a:off x="8641080" y="3913632"/>
-            <a:ext cx="2011680" cy="237744"/>
+              <a:t>68 个代表模型 · 17 个系列 · 截止 2026-06-05</a:t>
+            </a:r>
+            <a:endParaRPr lang="en-US" sz="1350" dirty="0"/>
+          </a:p>
+        </p:txBody>
+      </p:sp>
+      <p:sp>
+        <p:nvSpPr>
+          <p:cNvPr id="11" name="Shape 9"/>
+          <p:cNvSpPr/>
+          <p:nvPr/>
+        </p:nvSpPr>
+        <p:spPr>
+          <a:xfrm>
+            <a:off x="8549640" y="3703320"/>
+            <a:ext cx="2514600" cy="960120"/>
+          </a:xfrm>
+          <a:prstGeom prst="rect">
+            <a:avLst/>
+          </a:prstGeom>
+          <a:solidFill>
+            <a:srgbClr val="F8FAFC"/>
+          </a:solidFill>
+          <a:ln w="12700">
+            <a:solidFill>
+              <a:srgbClr val="D8E0EA"/>
+            </a:solidFill>
+            <a:prstDash val="solid"/>
+          </a:ln>
+        </p:spPr>
+      </p:sp>
+      <p:sp>
+        <p:nvSpPr>
+          <p:cNvPr id="12" name="Text 10"/>
+          <p:cNvSpPr/>
+          <p:nvPr/>
+        </p:nvSpPr>
+        <p:spPr>
+          <a:xfrm>
+            <a:off x="8750808" y="3886200"/>
+            <a:ext cx="2112264" cy="237744"/>
           </a:xfrm>
           <a:prstGeom prst="rect">
             <a:avLst/>
@@ -1699,30 +2142,30 @@
               <a:buNone/>
             </a:pPr>
             <a:r>
-              <a:rPr lang="en-US" sz="1200" b="1" dirty="0">
-                <a:solidFill>
-                  <a:srgbClr val="0F766E"/>
-                </a:solidFill>
-                <a:latin typeface="Noto Sans SC" pitchFamily="34" charset="0"/>
-                <a:ea typeface="Noto Sans SC" pitchFamily="34" charset="-122"/>
-                <a:cs typeface="Noto Sans SC" pitchFamily="34" charset="-120"/>
-              </a:rPr>
-              <a:t>展示方式</a:t>
-            </a:r>
-            <a:endParaRPr lang="en-US" sz="1200" dirty="0"/>
-          </a:p>
-        </p:txBody>
-      </p:sp>
-      <p:sp>
-        <p:nvSpPr>
-          <p:cNvPr id="10" name="Text 8"/>
-          <p:cNvSpPr/>
-          <p:nvPr/>
-        </p:nvSpPr>
-        <p:spPr>
-          <a:xfrm>
-            <a:off x="8641080" y="4251960"/>
-            <a:ext cx="2011680" cy="566928"/>
+              <a:rPr lang="en-US" sz="1300" b="1" dirty="0">
+                <a:solidFill>
+                  <a:srgbClr val="EA580C"/>
+                </a:solidFill>
+                <a:latin typeface="Noto Sans SC" pitchFamily="34" charset="0"/>
+                <a:ea typeface="Noto Sans SC" pitchFamily="34" charset="-122"/>
+                <a:cs typeface="Noto Sans SC" pitchFamily="34" charset="-120"/>
+              </a:rPr>
+              <a:t>展示重点</a:t>
+            </a:r>
+            <a:endParaRPr lang="en-US" sz="1300" dirty="0"/>
+          </a:p>
+        </p:txBody>
+      </p:sp>
+      <p:sp>
+        <p:nvSpPr>
+          <p:cNvPr id="13" name="Text 11"/>
+          <p:cNvSpPr/>
+          <p:nvPr/>
+        </p:nvSpPr>
+        <p:spPr>
+          <a:xfrm>
+            <a:off x="8750808" y="4215384"/>
+            <a:ext cx="2112264" cy="301752"/>
           </a:xfrm>
           <a:prstGeom prst="rect">
             <a:avLst/>
@@ -1740,7 +2183,7 @@
               <a:buNone/>
             </a:pPr>
             <a:r>
-              <a:rPr lang="en-US" sz="1500" dirty="0">
+              <a:rPr lang="en-US" sz="1350" dirty="0">
                 <a:solidFill>
                   <a:srgbClr val="232B38"/>
                 </a:solidFill>
@@ -1748,22 +2191,22 @@
                 <a:ea typeface="Noto Sans SC" pitchFamily="34" charset="-122"/>
                 <a:cs typeface="Noto Sans SC" pitchFamily="34" charset="-120"/>
               </a:rPr>
-              <a:t>本地网页 + 中文 PPT + PNG 图表</a:t>
-            </a:r>
-            <a:endParaRPr lang="en-US" sz="1500" dirty="0"/>
-          </a:p>
-        </p:txBody>
-      </p:sp>
-      <p:sp>
-        <p:nvSpPr>
-          <p:cNvPr id="11" name="Text 9"/>
-          <p:cNvSpPr/>
-          <p:nvPr/>
-        </p:nvSpPr>
-        <p:spPr>
-          <a:xfrm>
-            <a:off x="502920" y="6528816"/>
-            <a:ext cx="10972800" cy="164592"/>
+              <a:t>横向对比、纵向趋势、相关性、帕累托权衡</a:t>
+            </a:r>
+            <a:endParaRPr lang="en-US" sz="1350" dirty="0"/>
+          </a:p>
+        </p:txBody>
+      </p:sp>
+      <p:sp>
+        <p:nvSpPr>
+          <p:cNvPr id="14" name="Text 12"/>
+          <p:cNvSpPr/>
+          <p:nvPr/>
+        </p:nvSpPr>
+        <p:spPr>
+          <a:xfrm>
+            <a:off x="502920" y="6519672"/>
+            <a:ext cx="10972800" cy="146304"/>
           </a:xfrm>
           <a:prstGeom prst="rect">
             <a:avLst/>
@@ -1787,7 +2230,7 @@
                 <a:ea typeface="Noto Sans SC" pitchFamily="34" charset="-122"/>
                 <a:cs typeface="Noto Sans SC" pitchFamily="34" charset="-120"/>
               </a:rPr>
-              <a:t>开源大模型性能演进可视化分析 · 1</a:t>
+              <a:t>主流大模型数据可视化分析 · 1</a:t>
             </a:r>
             <a:endParaRPr lang="en-US" sz="850" dirty="0"/>
           </a:p>
@@ -1801,16 +2244,9 @@
 </p:sld>
 </file>
 
-<file path=ppt/slides/slide2.xml><?xml version="1.0" encoding="utf-8"?>
+<file path=ppt/slides/slide10.xml><?xml version="1.0" encoding="utf-8"?>
 <p:sld xmlns:a="http://schemas.openxmlformats.org/drawingml/2006/main" xmlns:r="http://schemas.openxmlformats.org/officeDocument/2006/relationships" xmlns:p="http://schemas.openxmlformats.org/presentationml/2006/main">
-  <p:cSld name="Slide 2">
-    <p:bg>
-      <p:bgPr>
-        <a:solidFill>
-          <a:srgbClr val="FFFFFF"/>
-        </a:solidFill>
-      </p:bgPr>
-    </p:bg>
+  <p:cSld name="Slide 10">
     <p:spTree>
       <p:nvGrpSpPr>
         <p:cNvPr id="1" name=""/>
@@ -1833,8 +2269,8 @@
         </p:nvSpPr>
         <p:spPr>
           <a:xfrm>
-            <a:off x="502920" y="292608"/>
-            <a:ext cx="10972800" cy="256032"/>
+            <a:off x="502920" y="256032"/>
+            <a:ext cx="10972800" cy="228600"/>
           </a:xfrm>
           <a:prstGeom prst="rect">
             <a:avLst/>
@@ -1850,7 +2286,7 @@
               <a:buNone/>
             </a:pPr>
             <a:r>
-              <a:rPr lang="en-US" sz="1100" b="1" dirty="0">
+              <a:rPr lang="en-US" sz="1050" b="1" dirty="0">
                 <a:solidFill>
                   <a:srgbClr val="0F766E"/>
                 </a:solidFill>
@@ -1860,7 +2296,7 @@
               </a:rPr>
               <a:t>数据处理与可视化课程项目</a:t>
             </a:r>
-            <a:endParaRPr lang="en-US" sz="1100" dirty="0"/>
+            <a:endParaRPr lang="en-US" sz="1050" dirty="0"/>
           </a:p>
         </p:txBody>
       </p:sp>
@@ -1872,8 +2308,8 @@
         </p:nvSpPr>
         <p:spPr>
           <a:xfrm>
-            <a:off x="502920" y="621792"/>
-            <a:ext cx="10972800" cy="512064"/>
+            <a:off x="502920" y="576072"/>
+            <a:ext cx="10972800" cy="502920"/>
           </a:xfrm>
           <a:prstGeom prst="rect">
             <a:avLst/>
@@ -1891,7 +2327,7 @@
               <a:buNone/>
             </a:pPr>
             <a:r>
-              <a:rPr lang="en-US" sz="2400" b="1" dirty="0">
+              <a:rPr lang="en-US" sz="2300" b="1" dirty="0">
                 <a:solidFill>
                   <a:srgbClr val="232B38"/>
                 </a:solidFill>
@@ -1899,9 +2335,9 @@
                 <a:ea typeface="Noto Sans SC" pitchFamily="34" charset="-122"/>
                 <a:cs typeface="Noto Sans SC" pitchFamily="34" charset="-120"/>
               </a:rPr>
-              <a:t>数据处理流程与特征工程</a:t>
-            </a:r>
-            <a:endParaRPr lang="en-US" sz="2400" dirty="0"/>
+              <a:t>权衡分析：本地部署帕累托图</a:t>
+            </a:r>
+            <a:endParaRPr lang="en-US" sz="2300" dirty="0"/>
           </a:p>
         </p:txBody>
       </p:sp>
@@ -1913,7 +2349,7 @@
         </p:nvSpPr>
         <p:spPr>
           <a:xfrm>
-            <a:off x="502920" y="1225296"/>
+            <a:off x="502920" y="1161288"/>
             <a:ext cx="11155680" cy="0"/>
           </a:xfrm>
           <a:prstGeom prst="line">
@@ -1928,22 +2364,46 @@
           </a:ln>
         </p:spPr>
       </p:sp>
-      <p:sp>
-        <p:nvSpPr>
-          <p:cNvPr id="5" name="Shape 3"/>
-          <p:cNvSpPr/>
-          <p:nvPr/>
-        </p:nvSpPr>
-        <p:spPr>
-          <a:xfrm>
-            <a:off x="713232" y="1993392"/>
-            <a:ext cx="2331720" cy="2240280"/>
+      <p:pic>
+        <p:nvPicPr>
+          <p:cNvPr id="5" name="Image 0" descr="C:\Users\HBZuo\Desktop\wrokmean\数据可视化\dashboard\assets\figures\06_hardware_pareto.png">    </p:cNvPr>
+          <p:cNvPicPr>
+            <a:picLocks noChangeAspect="1"/>
+          </p:cNvPicPr>
+          <p:nvPr/>
+        </p:nvPicPr>
+        <p:blipFill>
+          <a:blip r:embed="rId1"/>
+          <a:stretch>
+            <a:fillRect/>
+          </a:stretch>
+        </p:blipFill>
+        <p:spPr>
+          <a:xfrm>
+            <a:off x="502920" y="1417320"/>
+            <a:ext cx="7040880" cy="4407408"/>
+          </a:xfrm>
+          <a:prstGeom prst="rect">
+            <a:avLst/>
+          </a:prstGeom>
+        </p:spPr>
+      </p:pic>
+      <p:sp>
+        <p:nvSpPr>
+          <p:cNvPr id="6" name="Shape 3"/>
+          <p:cNvSpPr/>
+          <p:nvPr/>
+        </p:nvSpPr>
+        <p:spPr>
+          <a:xfrm>
+            <a:off x="7882128" y="1417320"/>
+            <a:ext cx="3291840" cy="1243584"/>
           </a:xfrm>
           <a:prstGeom prst="rect">
             <a:avLst/>
           </a:prstGeom>
           <a:solidFill>
-            <a:srgbClr val="ECFDF5"/>
+            <a:srgbClr val="F8FAFC"/>
           </a:solidFill>
           <a:ln w="12700">
             <a:solidFill>
@@ -1955,94 +2415,53 @@
       </p:sp>
       <p:sp>
         <p:nvSpPr>
-          <p:cNvPr id="6" name="Text 4"/>
-          <p:cNvSpPr/>
-          <p:nvPr/>
-        </p:nvSpPr>
-        <p:spPr>
-          <a:xfrm>
-            <a:off x="896112" y="2212848"/>
-            <a:ext cx="411480" cy="411480"/>
-          </a:xfrm>
-          <a:prstGeom prst="rect">
-            <a:avLst/>
-          </a:prstGeom>
-          <a:solidFill>
-            <a:srgbClr val="0F766E"/>
-          </a:solidFill>
+          <p:cNvPr id="7" name="Text 4"/>
+          <p:cNvSpPr/>
+          <p:nvPr/>
+        </p:nvSpPr>
+        <p:spPr>
+          <a:xfrm>
+            <a:off x="8083296" y="1600200"/>
+            <a:ext cx="2889504" cy="237744"/>
+          </a:xfrm>
+          <a:prstGeom prst="rect">
+            <a:avLst/>
+          </a:prstGeom>
+          <a:noFill/>
           <a:ln/>
         </p:spPr>
         <p:txBody>
           <a:bodyPr wrap="square" lIns="0" tIns="0" rIns="0" bIns="0" rtlCol="0" anchor="ctr"/>
           <a:lstStyle/>
           <a:p>
-            <a:pPr algn="ctr" indent="0" marL="0">
-              <a:buNone/>
-            </a:pPr>
-            <a:r>
-              <a:rPr lang="en-US" sz="1800" b="1" dirty="0">
-                <a:solidFill>
-                  <a:srgbClr val="FFFFFF"/>
-                </a:solidFill>
-                <a:latin typeface="Noto Sans SC" pitchFamily="34" charset="0"/>
-                <a:ea typeface="Noto Sans SC" pitchFamily="34" charset="-122"/>
-                <a:cs typeface="Noto Sans SC" pitchFamily="34" charset="-120"/>
-              </a:rPr>
-              <a:t>1</a:t>
-            </a:r>
-            <a:endParaRPr lang="en-US" sz="1800" dirty="0"/>
-          </a:p>
-        </p:txBody>
-      </p:sp>
-      <p:sp>
-        <p:nvSpPr>
-          <p:cNvPr id="7" name="Text 5"/>
-          <p:cNvSpPr/>
-          <p:nvPr/>
-        </p:nvSpPr>
-        <p:spPr>
-          <a:xfrm>
-            <a:off x="969264" y="2761488"/>
-            <a:ext cx="1828800" cy="310896"/>
-          </a:xfrm>
-          <a:prstGeom prst="rect">
-            <a:avLst/>
-          </a:prstGeom>
-          <a:noFill/>
-          <a:ln/>
-        </p:spPr>
-        <p:txBody>
-          <a:bodyPr wrap="square" lIns="0" tIns="0" rIns="0" bIns="0" rtlCol="0" anchor="ctr"/>
-          <a:lstStyle/>
-          <a:p>
-            <a:pPr indent="0" marL="0">
-              <a:buNone/>
-            </a:pPr>
-            <a:r>
-              <a:rPr lang="en-US" sz="1800" b="1" dirty="0">
-                <a:solidFill>
-                  <a:srgbClr val="232B38"/>
-                </a:solidFill>
-                <a:latin typeface="Noto Sans SC" pitchFamily="34" charset="0"/>
-                <a:ea typeface="Noto Sans SC" pitchFamily="34" charset="-122"/>
-                <a:cs typeface="Noto Sans SC" pitchFamily="34" charset="-120"/>
-              </a:rPr>
-              <a:t>异常识别</a:t>
-            </a:r>
-            <a:endParaRPr lang="en-US" sz="1800" dirty="0"/>
-          </a:p>
-        </p:txBody>
-      </p:sp>
-      <p:sp>
-        <p:nvSpPr>
-          <p:cNvPr id="8" name="Text 6"/>
-          <p:cNvSpPr/>
-          <p:nvPr/>
-        </p:nvSpPr>
-        <p:spPr>
-          <a:xfrm>
-            <a:off x="969264" y="3246120"/>
-            <a:ext cx="1828800" cy="676656"/>
+            <a:pPr indent="0" marL="0">
+              <a:buNone/>
+            </a:pPr>
+            <a:r>
+              <a:rPr lang="en-US" sz="1300" b="1" dirty="0">
+                <a:solidFill>
+                  <a:srgbClr val="2563EB"/>
+                </a:solidFill>
+                <a:latin typeface="Noto Sans SC" pitchFamily="34" charset="0"/>
+                <a:ea typeface="Noto Sans SC" pitchFamily="34" charset="-122"/>
+                <a:cs typeface="Noto Sans SC" pitchFamily="34" charset="-120"/>
+              </a:rPr>
+              <a:t>图中看到了什么</a:t>
+            </a:r>
+            <a:endParaRPr lang="en-US" sz="1300" dirty="0"/>
+          </a:p>
+        </p:txBody>
+      </p:sp>
+      <p:sp>
+        <p:nvSpPr>
+          <p:cNvPr id="8" name="Text 5"/>
+          <p:cNvSpPr/>
+          <p:nvPr/>
+        </p:nvSpPr>
+        <p:spPr>
+          <a:xfrm>
+            <a:off x="8083296" y="1929384"/>
+            <a:ext cx="2889504" cy="585216"/>
           </a:xfrm>
           <a:prstGeom prst="rect">
             <a:avLst/>
@@ -2062,13 +2481,13 @@
             <a:r>
               <a:rPr lang="en-US" sz="1350" dirty="0">
                 <a:solidFill>
-                  <a:srgbClr val="667085"/>
-                </a:solidFill>
-                <a:latin typeface="Noto Sans SC" pitchFamily="34" charset="0"/>
-                <a:ea typeface="Noto Sans SC" pitchFamily="34" charset="-122"/>
-                <a:cs typeface="Noto Sans SC" pitchFamily="34" charset="-120"/>
-              </a:rPr>
-              <a:t>参数量 -1/空值 → 从模型名提取 7B/72B 等信息</a:t>
+                  <a:srgbClr val="232B38"/>
+                </a:solidFill>
+                <a:latin typeface="Noto Sans SC" pitchFamily="34" charset="0"/>
+                <a:ea typeface="Noto Sans SC" pitchFamily="34" charset="-122"/>
+                <a:cs typeface="Noto Sans SC" pitchFamily="34" charset="-120"/>
+              </a:rPr>
+              <a:t>散点展示模型吞吐、首字延迟和能力之间的权衡，红线表示较优前沿。</a:t>
             </a:r>
             <a:endParaRPr lang="en-US" sz="1350" dirty="0"/>
           </a:p>
@@ -2076,45 +2495,20 @@
       </p:sp>
       <p:sp>
         <p:nvSpPr>
-          <p:cNvPr id="9" name="Shape 7"/>
-          <p:cNvSpPr/>
-          <p:nvPr/>
-        </p:nvSpPr>
-        <p:spPr>
-          <a:xfrm>
-            <a:off x="3118104" y="2926080"/>
-            <a:ext cx="384048" cy="384048"/>
-          </a:xfrm>
-          <a:prstGeom prst="chevron">
+          <p:cNvPr id="9" name="Shape 6"/>
+          <p:cNvSpPr/>
+          <p:nvPr/>
+        </p:nvSpPr>
+        <p:spPr>
+          <a:xfrm>
+            <a:off x="7882128" y="2834640"/>
+            <a:ext cx="3291840" cy="1417320"/>
+          </a:xfrm>
+          <a:prstGeom prst="rect">
             <a:avLst/>
           </a:prstGeom>
           <a:solidFill>
-            <a:srgbClr val="EA580C"/>
-          </a:solidFill>
-          <a:ln w="12700">
-            <a:solidFill>
-              <a:srgbClr val="EA580C"/>
-            </a:solidFill>
-            <a:prstDash val="solid"/>
-          </a:ln>
-        </p:spPr>
-      </p:sp>
-      <p:sp>
-        <p:nvSpPr>
-          <p:cNvPr id="10" name="Shape 8"/>
-          <p:cNvSpPr/>
-          <p:nvPr/>
-        </p:nvSpPr>
-        <p:spPr>
-          <a:xfrm>
-            <a:off x="3502152" y="1993392"/>
-            <a:ext cx="2331720" cy="2240280"/>
-          </a:xfrm>
-          <a:prstGeom prst="rect">
-            <a:avLst/>
-          </a:prstGeom>
-          <a:solidFill>
-            <a:srgbClr val="F1F5F9"/>
+            <a:srgbClr val="F8FAFC"/>
           </a:solidFill>
           <a:ln w="12700">
             <a:solidFill>
@@ -2126,94 +2520,53 @@
       </p:sp>
       <p:sp>
         <p:nvSpPr>
-          <p:cNvPr id="11" name="Text 9"/>
-          <p:cNvSpPr/>
-          <p:nvPr/>
-        </p:nvSpPr>
-        <p:spPr>
-          <a:xfrm>
-            <a:off x="3685032" y="2212848"/>
-            <a:ext cx="411480" cy="411480"/>
-          </a:xfrm>
-          <a:prstGeom prst="rect">
-            <a:avLst/>
-          </a:prstGeom>
-          <a:solidFill>
-            <a:srgbClr val="2563EB"/>
-          </a:solidFill>
+          <p:cNvPr id="10" name="Text 7"/>
+          <p:cNvSpPr/>
+          <p:nvPr/>
+        </p:nvSpPr>
+        <p:spPr>
+          <a:xfrm>
+            <a:off x="8083296" y="3017520"/>
+            <a:ext cx="2889504" cy="237744"/>
+          </a:xfrm>
+          <a:prstGeom prst="rect">
+            <a:avLst/>
+          </a:prstGeom>
+          <a:noFill/>
           <a:ln/>
         </p:spPr>
         <p:txBody>
           <a:bodyPr wrap="square" lIns="0" tIns="0" rIns="0" bIns="0" rtlCol="0" anchor="ctr"/>
           <a:lstStyle/>
           <a:p>
-            <a:pPr algn="ctr" indent="0" marL="0">
-              <a:buNone/>
-            </a:pPr>
-            <a:r>
-              <a:rPr lang="en-US" sz="1800" b="1" dirty="0">
-                <a:solidFill>
-                  <a:srgbClr val="FFFFFF"/>
-                </a:solidFill>
-                <a:latin typeface="Noto Sans SC" pitchFamily="34" charset="0"/>
-                <a:ea typeface="Noto Sans SC" pitchFamily="34" charset="-122"/>
-                <a:cs typeface="Noto Sans SC" pitchFamily="34" charset="-120"/>
-              </a:rPr>
-              <a:t>2</a:t>
-            </a:r>
-            <a:endParaRPr lang="en-US" sz="1800" dirty="0"/>
-          </a:p>
-        </p:txBody>
-      </p:sp>
-      <p:sp>
-        <p:nvSpPr>
-          <p:cNvPr id="12" name="Text 10"/>
-          <p:cNvSpPr/>
-          <p:nvPr/>
-        </p:nvSpPr>
-        <p:spPr>
-          <a:xfrm>
-            <a:off x="3758184" y="2761488"/>
-            <a:ext cx="1828800" cy="310896"/>
-          </a:xfrm>
-          <a:prstGeom prst="rect">
-            <a:avLst/>
-          </a:prstGeom>
-          <a:noFill/>
-          <a:ln/>
-        </p:spPr>
-        <p:txBody>
-          <a:bodyPr wrap="square" lIns="0" tIns="0" rIns="0" bIns="0" rtlCol="0" anchor="ctr"/>
-          <a:lstStyle/>
-          <a:p>
-            <a:pPr indent="0" marL="0">
-              <a:buNone/>
-            </a:pPr>
-            <a:r>
-              <a:rPr lang="en-US" sz="1800" b="1" dirty="0">
-                <a:solidFill>
-                  <a:srgbClr val="232B38"/>
-                </a:solidFill>
-                <a:latin typeface="Noto Sans SC" pitchFamily="34" charset="0"/>
-                <a:ea typeface="Noto Sans SC" pitchFamily="34" charset="-122"/>
-                <a:cs typeface="Noto Sans SC" pitchFamily="34" charset="-120"/>
-              </a:rPr>
-              <a:t>KNN 插补</a:t>
-            </a:r>
-            <a:endParaRPr lang="en-US" sz="1800" dirty="0"/>
-          </a:p>
-        </p:txBody>
-      </p:sp>
-      <p:sp>
-        <p:nvSpPr>
-          <p:cNvPr id="13" name="Text 11"/>
-          <p:cNvSpPr/>
-          <p:nvPr/>
-        </p:nvSpPr>
-        <p:spPr>
-          <a:xfrm>
-            <a:off x="3758184" y="3246120"/>
-            <a:ext cx="1828800" cy="676656"/>
+            <a:pPr indent="0" marL="0">
+              <a:buNone/>
+            </a:pPr>
+            <a:r>
+              <a:rPr lang="en-US" sz="1300" b="1" dirty="0">
+                <a:solidFill>
+                  <a:srgbClr val="0F766E"/>
+                </a:solidFill>
+                <a:latin typeface="Noto Sans SC" pitchFamily="34" charset="0"/>
+                <a:ea typeface="Noto Sans SC" pitchFamily="34" charset="-122"/>
+                <a:cs typeface="Noto Sans SC" pitchFamily="34" charset="-120"/>
+              </a:rPr>
+              <a:t>专业上说明什么</a:t>
+            </a:r>
+            <a:endParaRPr lang="en-US" sz="1300" dirty="0"/>
+          </a:p>
+        </p:txBody>
+      </p:sp>
+      <p:sp>
+        <p:nvSpPr>
+          <p:cNvPr id="11" name="Text 8"/>
+          <p:cNvSpPr/>
+          <p:nvPr/>
+        </p:nvSpPr>
+        <p:spPr>
+          <a:xfrm>
+            <a:off x="8083296" y="3346704"/>
+            <a:ext cx="2889504" cy="758952"/>
           </a:xfrm>
           <a:prstGeom prst="rect">
             <a:avLst/>
@@ -2233,13 +2586,13 @@
             <a:r>
               <a:rPr lang="en-US" sz="1350" dirty="0">
                 <a:solidFill>
-                  <a:srgbClr val="667085"/>
-                </a:solidFill>
-                <a:latin typeface="Noto Sans SC" pitchFamily="34" charset="0"/>
-                <a:ea typeface="Noto Sans SC" pitchFamily="34" charset="-122"/>
-                <a:cs typeface="Noto Sans SC" pitchFamily="34" charset="-120"/>
-              </a:rPr>
-              <a:t>用六类客观基准估算缺失的 Chatbot Arena Elo</a:t>
+                  <a:srgbClr val="232B38"/>
+                </a:solidFill>
+                <a:latin typeface="Noto Sans SC" pitchFamily="34" charset="0"/>
+                <a:ea typeface="Noto Sans SC" pitchFamily="34" charset="-122"/>
+                <a:cs typeface="Noto Sans SC" pitchFamily="34" charset="-120"/>
+              </a:rPr>
+              <a:t>这是多目标权衡图，适合寻找高能力、低延迟、高吞吐的候选模型。</a:t>
             </a:r>
             <a:endParaRPr lang="en-US" sz="1350" dirty="0"/>
           </a:p>
@@ -2247,45 +2600,20 @@
       </p:sp>
       <p:sp>
         <p:nvSpPr>
-          <p:cNvPr id="14" name="Shape 12"/>
-          <p:cNvSpPr/>
-          <p:nvPr/>
-        </p:nvSpPr>
-        <p:spPr>
-          <a:xfrm>
-            <a:off x="5907024" y="2926080"/>
-            <a:ext cx="384048" cy="384048"/>
-          </a:xfrm>
-          <a:prstGeom prst="chevron">
+          <p:cNvPr id="12" name="Shape 9"/>
+          <p:cNvSpPr/>
+          <p:nvPr/>
+        </p:nvSpPr>
+        <p:spPr>
+          <a:xfrm>
+            <a:off x="7882128" y="4434840"/>
+            <a:ext cx="3291840" cy="1234440"/>
+          </a:xfrm>
+          <a:prstGeom prst="rect">
             <a:avLst/>
           </a:prstGeom>
           <a:solidFill>
-            <a:srgbClr val="EA580C"/>
-          </a:solidFill>
-          <a:ln w="12700">
-            <a:solidFill>
-              <a:srgbClr val="EA580C"/>
-            </a:solidFill>
-            <a:prstDash val="solid"/>
-          </a:ln>
-        </p:spPr>
-      </p:sp>
-      <p:sp>
-        <p:nvSpPr>
-          <p:cNvPr id="15" name="Shape 13"/>
-          <p:cNvSpPr/>
-          <p:nvPr/>
-        </p:nvSpPr>
-        <p:spPr>
-          <a:xfrm>
-            <a:off x="6291072" y="1993392"/>
-            <a:ext cx="2331720" cy="2240280"/>
-          </a:xfrm>
-          <a:prstGeom prst="rect">
-            <a:avLst/>
-          </a:prstGeom>
-          <a:solidFill>
-            <a:srgbClr val="ECFDF5"/>
+            <a:srgbClr val="F8FAFC"/>
           </a:solidFill>
           <a:ln w="12700">
             <a:solidFill>
@@ -2297,94 +2625,53 @@
       </p:sp>
       <p:sp>
         <p:nvSpPr>
-          <p:cNvPr id="16" name="Text 14"/>
-          <p:cNvSpPr/>
-          <p:nvPr/>
-        </p:nvSpPr>
-        <p:spPr>
-          <a:xfrm>
-            <a:off x="6473952" y="2212848"/>
-            <a:ext cx="411480" cy="411480"/>
-          </a:xfrm>
-          <a:prstGeom prst="rect">
-            <a:avLst/>
-          </a:prstGeom>
-          <a:solidFill>
-            <a:srgbClr val="0F766E"/>
-          </a:solidFill>
+          <p:cNvPr id="13" name="Text 10"/>
+          <p:cNvSpPr/>
+          <p:nvPr/>
+        </p:nvSpPr>
+        <p:spPr>
+          <a:xfrm>
+            <a:off x="8083296" y="4617720"/>
+            <a:ext cx="2889504" cy="237744"/>
+          </a:xfrm>
+          <a:prstGeom prst="rect">
+            <a:avLst/>
+          </a:prstGeom>
+          <a:noFill/>
           <a:ln/>
         </p:spPr>
         <p:txBody>
           <a:bodyPr wrap="square" lIns="0" tIns="0" rIns="0" bIns="0" rtlCol="0" anchor="ctr"/>
           <a:lstStyle/>
           <a:p>
-            <a:pPr algn="ctr" indent="0" marL="0">
-              <a:buNone/>
-            </a:pPr>
-            <a:r>
-              <a:rPr lang="en-US" sz="1800" b="1" dirty="0">
-                <a:solidFill>
-                  <a:srgbClr val="FFFFFF"/>
-                </a:solidFill>
-                <a:latin typeface="Noto Sans SC" pitchFamily="34" charset="0"/>
-                <a:ea typeface="Noto Sans SC" pitchFamily="34" charset="-122"/>
-                <a:cs typeface="Noto Sans SC" pitchFamily="34" charset="-120"/>
-              </a:rPr>
-              <a:t>3</a:t>
-            </a:r>
-            <a:endParaRPr lang="en-US" sz="1800" dirty="0"/>
-          </a:p>
-        </p:txBody>
-      </p:sp>
-      <p:sp>
-        <p:nvSpPr>
-          <p:cNvPr id="17" name="Text 15"/>
-          <p:cNvSpPr/>
-          <p:nvPr/>
-        </p:nvSpPr>
-        <p:spPr>
-          <a:xfrm>
-            <a:off x="6547104" y="2761488"/>
-            <a:ext cx="1828800" cy="310896"/>
-          </a:xfrm>
-          <a:prstGeom prst="rect">
-            <a:avLst/>
-          </a:prstGeom>
-          <a:noFill/>
-          <a:ln/>
-        </p:spPr>
-        <p:txBody>
-          <a:bodyPr wrap="square" lIns="0" tIns="0" rIns="0" bIns="0" rtlCol="0" anchor="ctr"/>
-          <a:lstStyle/>
-          <a:p>
-            <a:pPr indent="0" marL="0">
-              <a:buNone/>
-            </a:pPr>
-            <a:r>
-              <a:rPr lang="en-US" sz="1800" b="1" dirty="0">
-                <a:solidFill>
-                  <a:srgbClr val="232B38"/>
-                </a:solidFill>
-                <a:latin typeface="Noto Sans SC" pitchFamily="34" charset="0"/>
-                <a:ea typeface="Noto Sans SC" pitchFamily="34" charset="-122"/>
-                <a:cs typeface="Noto Sans SC" pitchFamily="34" charset="-120"/>
-              </a:rPr>
-              <a:t>归一化</a:t>
-            </a:r>
-            <a:endParaRPr lang="en-US" sz="1800" dirty="0"/>
-          </a:p>
-        </p:txBody>
-      </p:sp>
-      <p:sp>
-        <p:nvSpPr>
-          <p:cNvPr id="18" name="Text 16"/>
-          <p:cNvSpPr/>
-          <p:nvPr/>
-        </p:nvSpPr>
-        <p:spPr>
-          <a:xfrm>
-            <a:off x="6547104" y="3246120"/>
-            <a:ext cx="1828800" cy="676656"/>
+            <a:pPr indent="0" marL="0">
+              <a:buNone/>
+            </a:pPr>
+            <a:r>
+              <a:rPr lang="en-US" sz="1300" b="1" dirty="0">
+                <a:solidFill>
+                  <a:srgbClr val="EA580C"/>
+                </a:solidFill>
+                <a:latin typeface="Noto Sans SC" pitchFamily="34" charset="0"/>
+                <a:ea typeface="Noto Sans SC" pitchFamily="34" charset="-122"/>
+                <a:cs typeface="Noto Sans SC" pitchFamily="34" charset="-120"/>
+              </a:rPr>
+              <a:t>生活中意味着什么</a:t>
+            </a:r>
+            <a:endParaRPr lang="en-US" sz="1300" dirty="0"/>
+          </a:p>
+        </p:txBody>
+      </p:sp>
+      <p:sp>
+        <p:nvSpPr>
+          <p:cNvPr id="14" name="Text 11"/>
+          <p:cNvSpPr/>
+          <p:nvPr/>
+        </p:nvSpPr>
+        <p:spPr>
+          <a:xfrm>
+            <a:off x="8083296" y="4946904"/>
+            <a:ext cx="2889504" cy="576072"/>
           </a:xfrm>
           <a:prstGeom prst="rect">
             <a:avLst/>
@@ -2404,13 +2691,13 @@
             <a:r>
               <a:rPr lang="en-US" sz="1350" dirty="0">
                 <a:solidFill>
-                  <a:srgbClr val="667085"/>
-                </a:solidFill>
-                <a:latin typeface="Noto Sans SC" pitchFamily="34" charset="0"/>
-                <a:ea typeface="Noto Sans SC" pitchFamily="34" charset="-122"/>
-                <a:cs typeface="Noto Sans SC" pitchFamily="34" charset="-120"/>
-              </a:rPr>
-              <a:t>将 GPQA、IFEval、MATH 等投射到统一尺度</a:t>
+                  <a:srgbClr val="232B38"/>
+                </a:solidFill>
+                <a:latin typeface="Noto Sans SC" pitchFamily="34" charset="0"/>
+                <a:ea typeface="Noto Sans SC" pitchFamily="34" charset="-122"/>
+                <a:cs typeface="Noto Sans SC" pitchFamily="34" charset="-120"/>
+              </a:rPr>
+              <a:t>等待时间越短，长文总结、代码生成和资料整理越像连续协作。</a:t>
             </a:r>
             <a:endParaRPr lang="en-US" sz="1350" dirty="0"/>
           </a:p>
@@ -2418,235 +2705,25 @@
       </p:sp>
       <p:sp>
         <p:nvSpPr>
-          <p:cNvPr id="19" name="Shape 17"/>
-          <p:cNvSpPr/>
-          <p:nvPr/>
-        </p:nvSpPr>
-        <p:spPr>
-          <a:xfrm>
-            <a:off x="8695944" y="2926080"/>
-            <a:ext cx="384048" cy="384048"/>
-          </a:xfrm>
-          <a:prstGeom prst="chevron">
-            <a:avLst/>
-          </a:prstGeom>
-          <a:solidFill>
-            <a:srgbClr val="EA580C"/>
-          </a:solidFill>
-          <a:ln w="12700">
-            <a:solidFill>
-              <a:srgbClr val="EA580C"/>
-            </a:solidFill>
-            <a:prstDash val="solid"/>
-          </a:ln>
-        </p:spPr>
-      </p:sp>
-      <p:sp>
-        <p:nvSpPr>
-          <p:cNvPr id="20" name="Shape 18"/>
-          <p:cNvSpPr/>
-          <p:nvPr/>
-        </p:nvSpPr>
-        <p:spPr>
-          <a:xfrm>
-            <a:off x="9079992" y="1993392"/>
-            <a:ext cx="2331720" cy="2240280"/>
-          </a:xfrm>
-          <a:prstGeom prst="rect">
-            <a:avLst/>
-          </a:prstGeom>
-          <a:solidFill>
-            <a:srgbClr val="F1F5F9"/>
-          </a:solidFill>
-          <a:ln w="12700">
-            <a:solidFill>
-              <a:srgbClr val="D8E0EA"/>
-            </a:solidFill>
-            <a:prstDash val="solid"/>
-          </a:ln>
-        </p:spPr>
-      </p:sp>
-      <p:sp>
-        <p:nvSpPr>
-          <p:cNvPr id="21" name="Text 19"/>
-          <p:cNvSpPr/>
-          <p:nvPr/>
-        </p:nvSpPr>
-        <p:spPr>
-          <a:xfrm>
-            <a:off x="9262872" y="2212848"/>
-            <a:ext cx="411480" cy="411480"/>
-          </a:xfrm>
-          <a:prstGeom prst="rect">
-            <a:avLst/>
-          </a:prstGeom>
-          <a:solidFill>
-            <a:srgbClr val="2563EB"/>
-          </a:solidFill>
+          <p:cNvPr id="15" name="Text 12"/>
+          <p:cNvSpPr/>
+          <p:nvPr/>
+        </p:nvSpPr>
+        <p:spPr>
+          <a:xfrm>
+            <a:off x="502920" y="6519672"/>
+            <a:ext cx="10972800" cy="146304"/>
+          </a:xfrm>
+          <a:prstGeom prst="rect">
+            <a:avLst/>
+          </a:prstGeom>
+          <a:noFill/>
           <a:ln/>
         </p:spPr>
         <p:txBody>
           <a:bodyPr wrap="square" lIns="0" tIns="0" rIns="0" bIns="0" rtlCol="0" anchor="ctr"/>
           <a:lstStyle/>
           <a:p>
-            <a:pPr algn="ctr" indent="0" marL="0">
-              <a:buNone/>
-            </a:pPr>
-            <a:r>
-              <a:rPr lang="en-US" sz="1800" b="1" dirty="0">
-                <a:solidFill>
-                  <a:srgbClr val="FFFFFF"/>
-                </a:solidFill>
-                <a:latin typeface="Noto Sans SC" pitchFamily="34" charset="0"/>
-                <a:ea typeface="Noto Sans SC" pitchFamily="34" charset="-122"/>
-                <a:cs typeface="Noto Sans SC" pitchFamily="34" charset="-120"/>
-              </a:rPr>
-              <a:t>4</a:t>
-            </a:r>
-            <a:endParaRPr lang="en-US" sz="1800" dirty="0"/>
-          </a:p>
-        </p:txBody>
-      </p:sp>
-      <p:sp>
-        <p:nvSpPr>
-          <p:cNvPr id="22" name="Text 20"/>
-          <p:cNvSpPr/>
-          <p:nvPr/>
-        </p:nvSpPr>
-        <p:spPr>
-          <a:xfrm>
-            <a:off x="9336024" y="2761488"/>
-            <a:ext cx="1828800" cy="310896"/>
-          </a:xfrm>
-          <a:prstGeom prst="rect">
-            <a:avLst/>
-          </a:prstGeom>
-          <a:noFill/>
-          <a:ln/>
-        </p:spPr>
-        <p:txBody>
-          <a:bodyPr wrap="square" lIns="0" tIns="0" rIns="0" bIns="0" rtlCol="0" anchor="ctr"/>
-          <a:lstStyle/>
-          <a:p>
-            <a:pPr indent="0" marL="0">
-              <a:buNone/>
-            </a:pPr>
-            <a:r>
-              <a:rPr lang="en-US" sz="1800" b="1" dirty="0">
-                <a:solidFill>
-                  <a:srgbClr val="232B38"/>
-                </a:solidFill>
-                <a:latin typeface="Noto Sans SC" pitchFamily="34" charset="0"/>
-                <a:ea typeface="Noto Sans SC" pitchFamily="34" charset="-122"/>
-                <a:cs typeface="Noto Sans SC" pitchFamily="34" charset="-120"/>
-              </a:rPr>
-              <a:t>复合指标</a:t>
-            </a:r>
-            <a:endParaRPr lang="en-US" sz="1800" dirty="0"/>
-          </a:p>
-        </p:txBody>
-      </p:sp>
-      <p:sp>
-        <p:nvSpPr>
-          <p:cNvPr id="23" name="Text 21"/>
-          <p:cNvSpPr/>
-          <p:nvPr/>
-        </p:nvSpPr>
-        <p:spPr>
-          <a:xfrm>
-            <a:off x="9336024" y="3246120"/>
-            <a:ext cx="1828800" cy="676656"/>
-          </a:xfrm>
-          <a:prstGeom prst="rect">
-            <a:avLst/>
-          </a:prstGeom>
-          <a:noFill/>
-          <a:ln/>
-        </p:spPr>
-        <p:txBody>
-          <a:bodyPr wrap="square" lIns="0" tIns="0" rIns="0" bIns="0" rtlCol="0" anchor="ctr">
-            <a:normAutofit/>
-          </a:bodyPr>
-          <a:lstStyle/>
-          <a:p>
-            <a:pPr indent="0" marL="0">
-              <a:buNone/>
-            </a:pPr>
-            <a:r>
-              <a:rPr lang="en-US" sz="1350" dirty="0">
-                <a:solidFill>
-                  <a:srgbClr val="667085"/>
-                </a:solidFill>
-                <a:latin typeface="Noto Sans SC" pitchFamily="34" charset="0"/>
-                <a:ea typeface="Noto Sans SC" pitchFamily="34" charset="-122"/>
-                <a:cs typeface="Noto Sans SC" pitchFamily="34" charset="-120"/>
-              </a:rPr>
-              <a:t>构造参数效率与 Hardware Pareto Index</a:t>
-            </a:r>
-            <a:endParaRPr lang="en-US" sz="1350" dirty="0"/>
-          </a:p>
-        </p:txBody>
-      </p:sp>
-      <p:sp>
-        <p:nvSpPr>
-          <p:cNvPr id="24" name="Text 22"/>
-          <p:cNvSpPr/>
-          <p:nvPr/>
-        </p:nvSpPr>
-        <p:spPr>
-          <a:xfrm>
-            <a:off x="1051560" y="5074920"/>
-            <a:ext cx="9875520" cy="384048"/>
-          </a:xfrm>
-          <a:prstGeom prst="rect">
-            <a:avLst/>
-          </a:prstGeom>
-          <a:noFill/>
-          <a:ln/>
-        </p:spPr>
-        <p:txBody>
-          <a:bodyPr wrap="square" lIns="0" tIns="0" rIns="0" bIns="0" rtlCol="0" anchor="ctr"/>
-          <a:lstStyle/>
-          <a:p>
-            <a:pPr algn="ctr" indent="0" marL="0">
-              <a:buNone/>
-            </a:pPr>
-            <a:r>
-              <a:rPr lang="en-US" sz="1700" b="1" dirty="0">
-                <a:solidFill>
-                  <a:srgbClr val="0F766E"/>
-                </a:solidFill>
-                <a:latin typeface="Noto Sans SC" pitchFamily="34" charset="0"/>
-                <a:ea typeface="Noto Sans SC" pitchFamily="34" charset="-122"/>
-                <a:cs typeface="Noto Sans SC" pitchFamily="34" charset="-120"/>
-              </a:rPr>
-              <a:t>输出物：清洗后 CSV、5 张中文 PNG 可视化图片、本地网页与课堂展示 PPT。</a:t>
-            </a:r>
-            <a:endParaRPr lang="en-US" sz="1700" dirty="0"/>
-          </a:p>
-        </p:txBody>
-      </p:sp>
-      <p:sp>
-        <p:nvSpPr>
-          <p:cNvPr id="25" name="Text 23"/>
-          <p:cNvSpPr/>
-          <p:nvPr/>
-        </p:nvSpPr>
-        <p:spPr>
-          <a:xfrm>
-            <a:off x="502920" y="6528816"/>
-            <a:ext cx="10972800" cy="164592"/>
-          </a:xfrm>
-          <a:prstGeom prst="rect">
-            <a:avLst/>
-          </a:prstGeom>
-          <a:noFill/>
-          <a:ln/>
-        </p:spPr>
-        <p:txBody>
-          <a:bodyPr wrap="square" lIns="0" tIns="0" rIns="0" bIns="0" rtlCol="0" anchor="ctr"/>
-          <a:lstStyle/>
-          <a:p>
             <a:pPr indent="0" marL="0">
               <a:buNone/>
             </a:pPr>
@@ -2659,7 +2736,7 @@
                 <a:ea typeface="Noto Sans SC" pitchFamily="34" charset="-122"/>
                 <a:cs typeface="Noto Sans SC" pitchFamily="34" charset="-120"/>
               </a:rPr>
-              <a:t>开源大模型性能演进可视化分析 · 2</a:t>
+              <a:t>主流大模型数据可视化分析 · 10</a:t>
             </a:r>
             <a:endParaRPr lang="en-US" sz="850" dirty="0"/>
           </a:p>
@@ -2673,16 +2750,9 @@
 </p:sld>
 </file>
 
-<file path=ppt/slides/slide3.xml><?xml version="1.0" encoding="utf-8"?>
+<file path=ppt/slides/slide11.xml><?xml version="1.0" encoding="utf-8"?>
 <p:sld xmlns:a="http://schemas.openxmlformats.org/drawingml/2006/main" xmlns:r="http://schemas.openxmlformats.org/officeDocument/2006/relationships" xmlns:p="http://schemas.openxmlformats.org/presentationml/2006/main">
-  <p:cSld name="Slide 3">
-    <p:bg>
-      <p:bgPr>
-        <a:solidFill>
-          <a:srgbClr val="FFFFFF"/>
-        </a:solidFill>
-      </p:bgPr>
-    </p:bg>
+  <p:cSld name="Slide 11">
     <p:spTree>
       <p:nvGrpSpPr>
         <p:cNvPr id="1" name=""/>
@@ -2705,8 +2775,8 @@
         </p:nvSpPr>
         <p:spPr>
           <a:xfrm>
-            <a:off x="502920" y="292608"/>
-            <a:ext cx="10972800" cy="256032"/>
+            <a:off x="502920" y="256032"/>
+            <a:ext cx="10972800" cy="228600"/>
           </a:xfrm>
           <a:prstGeom prst="rect">
             <a:avLst/>
@@ -2722,7 +2792,7 @@
               <a:buNone/>
             </a:pPr>
             <a:r>
-              <a:rPr lang="en-US" sz="1100" b="1" dirty="0">
+              <a:rPr lang="en-US" sz="1050" b="1" dirty="0">
                 <a:solidFill>
                   <a:srgbClr val="0F766E"/>
                 </a:solidFill>
@@ -2732,7 +2802,7 @@
               </a:rPr>
               <a:t>数据处理与可视化课程项目</a:t>
             </a:r>
-            <a:endParaRPr lang="en-US" sz="1100" dirty="0"/>
+            <a:endParaRPr lang="en-US" sz="1050" dirty="0"/>
           </a:p>
         </p:txBody>
       </p:sp>
@@ -2744,8 +2814,8 @@
         </p:nvSpPr>
         <p:spPr>
           <a:xfrm>
-            <a:off x="502920" y="621792"/>
-            <a:ext cx="10972800" cy="512064"/>
+            <a:off x="502920" y="576072"/>
+            <a:ext cx="10972800" cy="502920"/>
           </a:xfrm>
           <a:prstGeom prst="rect">
             <a:avLst/>
@@ -2763,7 +2833,7 @@
               <a:buNone/>
             </a:pPr>
             <a:r>
-              <a:rPr lang="en-US" sz="2400" b="1" dirty="0">
+              <a:rPr lang="en-US" sz="2300" b="1" dirty="0">
                 <a:solidFill>
                   <a:srgbClr val="232B38"/>
                 </a:solidFill>
@@ -2771,9 +2841,9 @@
                 <a:ea typeface="Noto Sans SC" pitchFamily="34" charset="-122"/>
                 <a:cs typeface="Noto Sans SC" pitchFamily="34" charset="-120"/>
               </a:rPr>
-              <a:t>证据 1：缩放定律与参数效率</a:t>
-            </a:r>
-            <a:endParaRPr lang="en-US" sz="2400" dirty="0"/>
+              <a:t>项目结论：可视化让模型数据从“复杂”变成“可解释”</a:t>
+            </a:r>
+            <a:endParaRPr lang="en-US" sz="2300" dirty="0"/>
           </a:p>
         </p:txBody>
       </p:sp>
@@ -2785,7 +2855,7 @@
         </p:nvSpPr>
         <p:spPr>
           <a:xfrm>
-            <a:off x="502920" y="1225296"/>
+            <a:off x="502920" y="1161288"/>
             <a:ext cx="11155680" cy="0"/>
           </a:xfrm>
           <a:prstGeom prst="line">
@@ -2800,46 +2870,22 @@
           </a:ln>
         </p:spPr>
       </p:sp>
-      <p:pic>
-        <p:nvPicPr>
-          <p:cNvPr id="5" name="Image 0" descr="C:\Users\HBZuo\Desktop\wrokmean\数据可视化\dashboard\assets\figures\01_scaling_bubble.png">    </p:cNvPr>
-          <p:cNvPicPr>
-            <a:picLocks noChangeAspect="1"/>
-          </p:cNvPicPr>
-          <p:nvPr/>
-        </p:nvPicPr>
-        <p:blipFill>
-          <a:blip r:embed="rId1"/>
-          <a:stretch>
-            <a:fillRect/>
-          </a:stretch>
-        </p:blipFill>
-        <p:spPr>
-          <a:xfrm>
-            <a:off x="530352" y="1417320"/>
-            <a:ext cx="7635240" cy="4526280"/>
-          </a:xfrm>
-          <a:prstGeom prst="rect">
-            <a:avLst/>
-          </a:prstGeom>
-        </p:spPr>
-      </p:pic>
-      <p:sp>
-        <p:nvSpPr>
-          <p:cNvPr id="6" name="Shape 3"/>
-          <p:cNvSpPr/>
-          <p:nvPr/>
-        </p:nvSpPr>
-        <p:spPr>
-          <a:xfrm>
-            <a:off x="8458200" y="1417320"/>
-            <a:ext cx="2880360" cy="4526280"/>
+      <p:sp>
+        <p:nvSpPr>
+          <p:cNvPr id="5" name="Shape 3"/>
+          <p:cNvSpPr/>
+          <p:nvPr/>
+        </p:nvSpPr>
+        <p:spPr>
+          <a:xfrm>
+            <a:off x="731520" y="1508760"/>
+            <a:ext cx="3429000" cy="3429000"/>
           </a:xfrm>
           <a:prstGeom prst="rect">
             <a:avLst/>
           </a:prstGeom>
           <a:solidFill>
-            <a:srgbClr val="F7FAFC"/>
+            <a:srgbClr val="F8FAFC"/>
           </a:solidFill>
           <a:ln w="12700">
             <a:solidFill>
@@ -2851,14 +2897,14 @@
       </p:sp>
       <p:sp>
         <p:nvSpPr>
-          <p:cNvPr id="7" name="Text 4"/>
-          <p:cNvSpPr/>
-          <p:nvPr/>
-        </p:nvSpPr>
-        <p:spPr>
-          <a:xfrm>
-            <a:off x="8732520" y="1737360"/>
-            <a:ext cx="2331720" cy="292608"/>
+          <p:cNvPr id="6" name="Text 4"/>
+          <p:cNvSpPr/>
+          <p:nvPr/>
+        </p:nvSpPr>
+        <p:spPr>
+          <a:xfrm>
+            <a:off x="932688" y="1691640"/>
+            <a:ext cx="3026664" cy="237744"/>
           </a:xfrm>
           <a:prstGeom prst="rect">
             <a:avLst/>
@@ -2874,7 +2920,48 @@
               <a:buNone/>
             </a:pPr>
             <a:r>
-              <a:rPr lang="en-US" sz="1700" b="1" dirty="0">
+              <a:rPr lang="en-US" sz="1300" b="1" dirty="0">
+                <a:solidFill>
+                  <a:srgbClr val="0F766E"/>
+                </a:solidFill>
+                <a:latin typeface="Noto Sans SC" pitchFamily="34" charset="0"/>
+                <a:ea typeface="Noto Sans SC" pitchFamily="34" charset="-122"/>
+                <a:cs typeface="Noto Sans SC" pitchFamily="34" charset="-120"/>
+              </a:rPr>
+              <a:t>课程层面的收获</a:t>
+            </a:r>
+            <a:endParaRPr lang="en-US" sz="1300" dirty="0"/>
+          </a:p>
+        </p:txBody>
+      </p:sp>
+      <p:sp>
+        <p:nvSpPr>
+          <p:cNvPr id="7" name="Text 5"/>
+          <p:cNvSpPr/>
+          <p:nvPr/>
+        </p:nvSpPr>
+        <p:spPr>
+          <a:xfrm>
+            <a:off x="932688" y="2020824"/>
+            <a:ext cx="3026664" cy="2770632"/>
+          </a:xfrm>
+          <a:prstGeom prst="rect">
+            <a:avLst/>
+          </a:prstGeom>
+          <a:noFill/>
+          <a:ln/>
+        </p:spPr>
+        <p:txBody>
+          <a:bodyPr wrap="square" lIns="0" tIns="0" rIns="0" bIns="0" rtlCol="0" anchor="ctr">
+            <a:normAutofit/>
+          </a:bodyPr>
+          <a:lstStyle/>
+          <a:p>
+            <a:pPr indent="0" marL="0">
+              <a:buNone/>
+            </a:pPr>
+            <a:r>
+              <a:rPr lang="en-US" sz="1350" dirty="0">
                 <a:solidFill>
                   <a:srgbClr val="232B38"/>
                 </a:solidFill>
@@ -2882,32 +2969,32 @@
                 <a:ea typeface="Noto Sans SC" pitchFamily="34" charset="-122"/>
                 <a:cs typeface="Noto Sans SC" pitchFamily="34" charset="-120"/>
               </a:rPr>
-              <a:t>课堂讲解要点</a:t>
-            </a:r>
-            <a:endParaRPr lang="en-US" sz="1700" dirty="0"/>
-          </a:p>
-        </p:txBody>
-      </p:sp>
-      <p:sp>
-        <p:nvSpPr>
-          <p:cNvPr id="8" name="Shape 5"/>
-          <p:cNvSpPr/>
-          <p:nvPr/>
-        </p:nvSpPr>
-        <p:spPr>
-          <a:xfrm>
-            <a:off x="8732520" y="2313432"/>
-            <a:ext cx="118872" cy="118872"/>
-          </a:xfrm>
-          <a:prstGeom prst="ellipse">
+              <a:t>通过同一项目串起数据收集、缺失处理、归一化、特征工程、视觉编码和图表解读，完整覆盖数据可视化课程的核心要求。</a:t>
+            </a:r>
+            <a:endParaRPr lang="en-US" sz="1350" dirty="0"/>
+          </a:p>
+        </p:txBody>
+      </p:sp>
+      <p:sp>
+        <p:nvSpPr>
+          <p:cNvPr id="8" name="Shape 6"/>
+          <p:cNvSpPr/>
+          <p:nvPr/>
+        </p:nvSpPr>
+        <p:spPr>
+          <a:xfrm>
+            <a:off x="4343400" y="1508760"/>
+            <a:ext cx="3429000" cy="3429000"/>
+          </a:xfrm>
+          <a:prstGeom prst="rect">
             <a:avLst/>
           </a:prstGeom>
           <a:solidFill>
-            <a:srgbClr val="0F766E"/>
+            <a:srgbClr val="F8FAFC"/>
           </a:solidFill>
           <a:ln w="12700">
             <a:solidFill>
-              <a:srgbClr val="0F766E"/>
+              <a:srgbClr val="D8E0EA"/>
             </a:solidFill>
             <a:prstDash val="solid"/>
           </a:ln>
@@ -2915,14 +3002,53 @@
       </p:sp>
       <p:sp>
         <p:nvSpPr>
-          <p:cNvPr id="9" name="Text 6"/>
-          <p:cNvSpPr/>
-          <p:nvPr/>
-        </p:nvSpPr>
-        <p:spPr>
-          <a:xfrm>
-            <a:off x="8951976" y="2240280"/>
-            <a:ext cx="2286000" cy="310896"/>
+          <p:cNvPr id="9" name="Text 7"/>
+          <p:cNvSpPr/>
+          <p:nvPr/>
+        </p:nvSpPr>
+        <p:spPr>
+          <a:xfrm>
+            <a:off x="4544568" y="1691640"/>
+            <a:ext cx="3026664" cy="237744"/>
+          </a:xfrm>
+          <a:prstGeom prst="rect">
+            <a:avLst/>
+          </a:prstGeom>
+          <a:noFill/>
+          <a:ln/>
+        </p:spPr>
+        <p:txBody>
+          <a:bodyPr wrap="square" lIns="0" tIns="0" rIns="0" bIns="0" rtlCol="0" anchor="ctr"/>
+          <a:lstStyle/>
+          <a:p>
+            <a:pPr indent="0" marL="0">
+              <a:buNone/>
+            </a:pPr>
+            <a:r>
+              <a:rPr lang="en-US" sz="1300" b="1" dirty="0">
+                <a:solidFill>
+                  <a:srgbClr val="2563EB"/>
+                </a:solidFill>
+                <a:latin typeface="Noto Sans SC" pitchFamily="34" charset="0"/>
+                <a:ea typeface="Noto Sans SC" pitchFamily="34" charset="-122"/>
+                <a:cs typeface="Noto Sans SC" pitchFamily="34" charset="-120"/>
+              </a:rPr>
+              <a:t>数据分析层面的发现</a:t>
+            </a:r>
+            <a:endParaRPr lang="en-US" sz="1300" dirty="0"/>
+          </a:p>
+        </p:txBody>
+      </p:sp>
+      <p:sp>
+        <p:nvSpPr>
+          <p:cNvPr id="10" name="Text 8"/>
+          <p:cNvSpPr/>
+          <p:nvPr/>
+        </p:nvSpPr>
+        <p:spPr>
+          <a:xfrm>
+            <a:off x="4544568" y="2020824"/>
+            <a:ext cx="3026664" cy="2770632"/>
           </a:xfrm>
           <a:prstGeom prst="rect">
             <a:avLst/>
@@ -2940,7 +3066,7 @@
               <a:buNone/>
             </a:pPr>
             <a:r>
-              <a:rPr lang="en-US" sz="1500" dirty="0">
+              <a:rPr lang="en-US" sz="1350" dirty="0">
                 <a:solidFill>
                   <a:srgbClr val="232B38"/>
                 </a:solidFill>
@@ -2948,32 +3074,32 @@
                 <a:ea typeface="Noto Sans SC" pitchFamily="34" charset="-122"/>
                 <a:cs typeface="Noto Sans SC" pitchFamily="34" charset="-120"/>
               </a:rPr>
-              <a:t>log 参数轴处理长尾分布</a:t>
-            </a:r>
-            <a:endParaRPr lang="en-US" sz="1500" dirty="0"/>
-          </a:p>
-        </p:txBody>
-      </p:sp>
-      <p:sp>
-        <p:nvSpPr>
-          <p:cNvPr id="10" name="Shape 7"/>
-          <p:cNvSpPr/>
-          <p:nvPr/>
-        </p:nvSpPr>
-        <p:spPr>
-          <a:xfrm>
-            <a:off x="8732520" y="2843784"/>
-            <a:ext cx="118872" cy="118872"/>
-          </a:xfrm>
-          <a:prstGeom prst="ellipse">
+              <a:t>主流模型能力持续上升，开放权重模型追赶很快；但参数量、考试分数、Elo 和部署体验并不是同一个维度。</a:t>
+            </a:r>
+            <a:endParaRPr lang="en-US" sz="1350" dirty="0"/>
+          </a:p>
+        </p:txBody>
+      </p:sp>
+      <p:sp>
+        <p:nvSpPr>
+          <p:cNvPr id="11" name="Shape 9"/>
+          <p:cNvSpPr/>
+          <p:nvPr/>
+        </p:nvSpPr>
+        <p:spPr>
+          <a:xfrm>
+            <a:off x="7955280" y="1508760"/>
+            <a:ext cx="3429000" cy="3429000"/>
+          </a:xfrm>
+          <a:prstGeom prst="rect">
             <a:avLst/>
           </a:prstGeom>
           <a:solidFill>
-            <a:srgbClr val="0F766E"/>
+            <a:srgbClr val="F8FAFC"/>
           </a:solidFill>
           <a:ln w="12700">
             <a:solidFill>
-              <a:srgbClr val="0F766E"/>
+              <a:srgbClr val="D8E0EA"/>
             </a:solidFill>
             <a:prstDash val="solid"/>
           </a:ln>
@@ -2981,14 +3107,53 @@
       </p:sp>
       <p:sp>
         <p:nvSpPr>
-          <p:cNvPr id="11" name="Text 8"/>
-          <p:cNvSpPr/>
-          <p:nvPr/>
-        </p:nvSpPr>
-        <p:spPr>
-          <a:xfrm>
-            <a:off x="8951976" y="2770632"/>
-            <a:ext cx="2286000" cy="310896"/>
+          <p:cNvPr id="12" name="Text 10"/>
+          <p:cNvSpPr/>
+          <p:nvPr/>
+        </p:nvSpPr>
+        <p:spPr>
+          <a:xfrm>
+            <a:off x="8156448" y="1691640"/>
+            <a:ext cx="3026664" cy="237744"/>
+          </a:xfrm>
+          <a:prstGeom prst="rect">
+            <a:avLst/>
+          </a:prstGeom>
+          <a:noFill/>
+          <a:ln/>
+        </p:spPr>
+        <p:txBody>
+          <a:bodyPr wrap="square" lIns="0" tIns="0" rIns="0" bIns="0" rtlCol="0" anchor="ctr"/>
+          <a:lstStyle/>
+          <a:p>
+            <a:pPr indent="0" marL="0">
+              <a:buNone/>
+            </a:pPr>
+            <a:r>
+              <a:rPr lang="en-US" sz="1300" b="1" dirty="0">
+                <a:solidFill>
+                  <a:srgbClr val="EA580C"/>
+                </a:solidFill>
+                <a:latin typeface="Noto Sans SC" pitchFamily="34" charset="0"/>
+                <a:ea typeface="Noto Sans SC" pitchFamily="34" charset="-122"/>
+                <a:cs typeface="Noto Sans SC" pitchFamily="34" charset="-120"/>
+              </a:rPr>
+              <a:t>直觉层面的理解</a:t>
+            </a:r>
+            <a:endParaRPr lang="en-US" sz="1300" dirty="0"/>
+          </a:p>
+        </p:txBody>
+      </p:sp>
+      <p:sp>
+        <p:nvSpPr>
+          <p:cNvPr id="13" name="Text 11"/>
+          <p:cNvSpPr/>
+          <p:nvPr/>
+        </p:nvSpPr>
+        <p:spPr>
+          <a:xfrm>
+            <a:off x="8156448" y="2020824"/>
+            <a:ext cx="3026664" cy="2770632"/>
           </a:xfrm>
           <a:prstGeom prst="rect">
             <a:avLst/>
@@ -3006,7 +3171,7 @@
               <a:buNone/>
             </a:pPr>
             <a:r>
-              <a:rPr lang="en-US" sz="1500" dirty="0">
+              <a:rPr lang="en-US" sz="1350" dirty="0">
                 <a:solidFill>
                   <a:srgbClr val="232B38"/>
                 </a:solidFill>
@@ -3014,88 +3179,22 @@
                 <a:ea typeface="Noto Sans SC" pitchFamily="34" charset="-122"/>
                 <a:cs typeface="Noto Sans SC" pitchFamily="34" charset="-120"/>
               </a:rPr>
-              <a:t>趋势线显示边际收益趋缓</a:t>
-            </a:r>
-            <a:endParaRPr lang="en-US" sz="1500" dirty="0"/>
-          </a:p>
-        </p:txBody>
-      </p:sp>
-      <p:sp>
-        <p:nvSpPr>
-          <p:cNvPr id="12" name="Shape 9"/>
-          <p:cNvSpPr/>
-          <p:nvPr/>
-        </p:nvSpPr>
-        <p:spPr>
-          <a:xfrm>
-            <a:off x="8732520" y="3374136"/>
-            <a:ext cx="118872" cy="118872"/>
-          </a:xfrm>
-          <a:prstGeom prst="ellipse">
-            <a:avLst/>
-          </a:prstGeom>
-          <a:solidFill>
-            <a:srgbClr val="0F766E"/>
-          </a:solidFill>
-          <a:ln w="12700">
-            <a:solidFill>
-              <a:srgbClr val="0F766E"/>
-            </a:solidFill>
-            <a:prstDash val="solid"/>
-          </a:ln>
-        </p:spPr>
-      </p:sp>
-      <p:sp>
-        <p:nvSpPr>
-          <p:cNvPr id="13" name="Text 10"/>
-          <p:cNvSpPr/>
-          <p:nvPr/>
-        </p:nvSpPr>
-        <p:spPr>
-          <a:xfrm>
-            <a:off x="8951976" y="3300984"/>
-            <a:ext cx="2286000" cy="310896"/>
-          </a:xfrm>
-          <a:prstGeom prst="rect">
-            <a:avLst/>
-          </a:prstGeom>
-          <a:noFill/>
-          <a:ln/>
-        </p:spPr>
-        <p:txBody>
-          <a:bodyPr wrap="square" lIns="0" tIns="0" rIns="0" bIns="0" rtlCol="0" anchor="ctr">
-            <a:normAutofit/>
-          </a:bodyPr>
-          <a:lstStyle/>
-          <a:p>
-            <a:pPr indent="0" marL="0">
-              <a:buNone/>
-            </a:pPr>
-            <a:r>
-              <a:rPr lang="en-US" sz="1500" dirty="0">
-                <a:solidFill>
-                  <a:srgbClr val="232B38"/>
-                </a:solidFill>
-                <a:latin typeface="Noto Sans SC" pitchFamily="34" charset="0"/>
-                <a:ea typeface="Noto Sans SC" pitchFamily="34" charset="-122"/>
-                <a:cs typeface="Noto Sans SC" pitchFamily="34" charset="-120"/>
-              </a:rPr>
-              <a:t>小模型通过微调获得高能力密度</a:t>
-            </a:r>
-            <a:endParaRPr lang="en-US" sz="1500" dirty="0"/>
-          </a:p>
-        </p:txBody>
-      </p:sp>
-      <p:sp>
-        <p:nvSpPr>
-          <p:cNvPr id="14" name="Text 11"/>
-          <p:cNvSpPr/>
-          <p:nvPr/>
-        </p:nvSpPr>
-        <p:spPr>
-          <a:xfrm>
-            <a:off x="502920" y="6528816"/>
-            <a:ext cx="10972800" cy="164592"/>
+              <a:t>好的图表能把抽象指标翻译成真实感受：等多久、写得顺不顺、能否本地运行、成本是否可接受。</a:t>
+            </a:r>
+            <a:endParaRPr lang="en-US" sz="1350" dirty="0"/>
+          </a:p>
+        </p:txBody>
+      </p:sp>
+      <p:sp>
+        <p:nvSpPr>
+          <p:cNvPr id="14" name="Text 12"/>
+          <p:cNvSpPr/>
+          <p:nvPr/>
+        </p:nvSpPr>
+        <p:spPr>
+          <a:xfrm>
+            <a:off x="914400" y="5532120"/>
+            <a:ext cx="10424160" cy="457200"/>
           </a:xfrm>
           <a:prstGeom prst="rect">
             <a:avLst/>
@@ -3107,6 +3206,45 @@
           <a:bodyPr wrap="square" lIns="0" tIns="0" rIns="0" bIns="0" rtlCol="0" anchor="ctr"/>
           <a:lstStyle/>
           <a:p>
+            <a:pPr algn="ctr" indent="0" marL="0">
+              <a:buNone/>
+            </a:pPr>
+            <a:r>
+              <a:rPr lang="en-US" sz="1650" b="1" dirty="0">
+                <a:solidFill>
+                  <a:srgbClr val="0F766E"/>
+                </a:solidFill>
+                <a:latin typeface="Noto Sans SC" pitchFamily="34" charset="0"/>
+                <a:ea typeface="Noto Sans SC" pitchFamily="34" charset="-122"/>
+                <a:cs typeface="Noto Sans SC" pitchFamily="34" charset="-120"/>
+              </a:rPr>
+              <a:t>最终意义：这个项目的重点不是展示模型有多强，而是展示如何用数据可视化方法把多维数据整理成可比较、可解释、可讨论的结论。</a:t>
+            </a:r>
+            <a:endParaRPr lang="en-US" sz="1650" dirty="0"/>
+          </a:p>
+        </p:txBody>
+      </p:sp>
+      <p:sp>
+        <p:nvSpPr>
+          <p:cNvPr id="15" name="Text 13"/>
+          <p:cNvSpPr/>
+          <p:nvPr/>
+        </p:nvSpPr>
+        <p:spPr>
+          <a:xfrm>
+            <a:off x="502920" y="6519672"/>
+            <a:ext cx="10972800" cy="146304"/>
+          </a:xfrm>
+          <a:prstGeom prst="rect">
+            <a:avLst/>
+          </a:prstGeom>
+          <a:noFill/>
+          <a:ln/>
+        </p:spPr>
+        <p:txBody>
+          <a:bodyPr wrap="square" lIns="0" tIns="0" rIns="0" bIns="0" rtlCol="0" anchor="ctr"/>
+          <a:lstStyle/>
+          <a:p>
             <a:pPr indent="0" marL="0">
               <a:buNone/>
             </a:pPr>
@@ -3119,7 +3257,7 @@
                 <a:ea typeface="Noto Sans SC" pitchFamily="34" charset="-122"/>
                 <a:cs typeface="Noto Sans SC" pitchFamily="34" charset="-120"/>
               </a:rPr>
-              <a:t>开源大模型性能演进可视化分析 · 3</a:t>
+              <a:t>主流大模型数据可视化分析 · 11</a:t>
             </a:r>
             <a:endParaRPr lang="en-US" sz="850" dirty="0"/>
           </a:p>
@@ -3133,16 +3271,9 @@
 </p:sld>
 </file>
 
-<file path=ppt/slides/slide4.xml><?xml version="1.0" encoding="utf-8"?>
+<file path=ppt/slides/slide2.xml><?xml version="1.0" encoding="utf-8"?>
 <p:sld xmlns:a="http://schemas.openxmlformats.org/drawingml/2006/main" xmlns:r="http://schemas.openxmlformats.org/officeDocument/2006/relationships" xmlns:p="http://schemas.openxmlformats.org/presentationml/2006/main">
-  <p:cSld name="Slide 4">
-    <p:bg>
-      <p:bgPr>
-        <a:solidFill>
-          <a:srgbClr val="FFFFFF"/>
-        </a:solidFill>
-      </p:bgPr>
-    </p:bg>
+  <p:cSld name="Slide 2">
     <p:spTree>
       <p:nvGrpSpPr>
         <p:cNvPr id="1" name=""/>
@@ -3165,8 +3296,8 @@
         </p:nvSpPr>
         <p:spPr>
           <a:xfrm>
-            <a:off x="502920" y="292608"/>
-            <a:ext cx="10972800" cy="256032"/>
+            <a:off x="502920" y="256032"/>
+            <a:ext cx="10972800" cy="228600"/>
           </a:xfrm>
           <a:prstGeom prst="rect">
             <a:avLst/>
@@ -3182,7 +3313,7 @@
               <a:buNone/>
             </a:pPr>
             <a:r>
-              <a:rPr lang="en-US" sz="1100" b="1" dirty="0">
+              <a:rPr lang="en-US" sz="1050" b="1" dirty="0">
                 <a:solidFill>
                   <a:srgbClr val="0F766E"/>
                 </a:solidFill>
@@ -3192,7 +3323,7 @@
               </a:rPr>
               <a:t>数据处理与可视化课程项目</a:t>
             </a:r>
-            <a:endParaRPr lang="en-US" sz="1100" dirty="0"/>
+            <a:endParaRPr lang="en-US" sz="1050" dirty="0"/>
           </a:p>
         </p:txBody>
       </p:sp>
@@ -3204,8 +3335,8 @@
         </p:nvSpPr>
         <p:spPr>
           <a:xfrm>
-            <a:off x="502920" y="621792"/>
-            <a:ext cx="10972800" cy="512064"/>
+            <a:off x="502920" y="576072"/>
+            <a:ext cx="10972800" cy="502920"/>
           </a:xfrm>
           <a:prstGeom prst="rect">
             <a:avLst/>
@@ -3223,7 +3354,7 @@
               <a:buNone/>
             </a:pPr>
             <a:r>
-              <a:rPr lang="en-US" sz="2400" b="1" dirty="0">
+              <a:rPr lang="en-US" sz="2300" b="1" dirty="0">
                 <a:solidFill>
                   <a:srgbClr val="232B38"/>
                 </a:solidFill>
@@ -3231,9 +3362,9 @@
                 <a:ea typeface="Noto Sans SC" pitchFamily="34" charset="-122"/>
                 <a:cs typeface="Noto Sans SC" pitchFamily="34" charset="-120"/>
               </a:rPr>
-              <a:t>证据 2：能力轮廓与偏科检测</a:t>
-            </a:r>
-            <a:endParaRPr lang="en-US" sz="2400" dirty="0"/>
+              <a:t>为什么选择这个项目：复杂模型数据适合做可视化</a:t>
+            </a:r>
+            <a:endParaRPr lang="en-US" sz="2300" dirty="0"/>
           </a:p>
         </p:txBody>
       </p:sp>
@@ -3245,7 +3376,7 @@
         </p:nvSpPr>
         <p:spPr>
           <a:xfrm>
-            <a:off x="502920" y="1225296"/>
+            <a:off x="502920" y="1161288"/>
             <a:ext cx="11155680" cy="0"/>
           </a:xfrm>
           <a:prstGeom prst="line">
@@ -3260,46 +3391,22 @@
           </a:ln>
         </p:spPr>
       </p:sp>
-      <p:pic>
-        <p:nvPicPr>
-          <p:cNvPr id="5" name="Image 0" descr="C:\Users\HBZuo\Desktop\wrokmean\数据可视化\dashboard\assets\figures\02_radar_profile.png">    </p:cNvPr>
-          <p:cNvPicPr>
-            <a:picLocks noChangeAspect="1"/>
-          </p:cNvPicPr>
-          <p:nvPr/>
-        </p:nvPicPr>
-        <p:blipFill>
-          <a:blip r:embed="rId1"/>
-          <a:stretch>
-            <a:fillRect/>
-          </a:stretch>
-        </p:blipFill>
-        <p:spPr>
-          <a:xfrm>
-            <a:off x="530352" y="1417320"/>
-            <a:ext cx="7635240" cy="4526280"/>
-          </a:xfrm>
-          <a:prstGeom prst="rect">
-            <a:avLst/>
-          </a:prstGeom>
-        </p:spPr>
-      </p:pic>
-      <p:sp>
-        <p:nvSpPr>
-          <p:cNvPr id="6" name="Shape 3"/>
-          <p:cNvSpPr/>
-          <p:nvPr/>
-        </p:nvSpPr>
-        <p:spPr>
-          <a:xfrm>
-            <a:off x="8458200" y="1417320"/>
-            <a:ext cx="2880360" cy="4526280"/>
+      <p:sp>
+        <p:nvSpPr>
+          <p:cNvPr id="5" name="Shape 3"/>
+          <p:cNvSpPr/>
+          <p:nvPr/>
+        </p:nvSpPr>
+        <p:spPr>
+          <a:xfrm>
+            <a:off x="777240" y="1691640"/>
+            <a:ext cx="3429000" cy="3474720"/>
           </a:xfrm>
           <a:prstGeom prst="rect">
             <a:avLst/>
           </a:prstGeom>
           <a:solidFill>
-            <a:srgbClr val="F7FAFC"/>
+            <a:srgbClr val="F8FAFC"/>
           </a:solidFill>
           <a:ln w="12700">
             <a:solidFill>
@@ -3311,14 +3418,14 @@
       </p:sp>
       <p:sp>
         <p:nvSpPr>
-          <p:cNvPr id="7" name="Text 4"/>
-          <p:cNvSpPr/>
-          <p:nvPr/>
-        </p:nvSpPr>
-        <p:spPr>
-          <a:xfrm>
-            <a:off x="8732520" y="1737360"/>
-            <a:ext cx="2331720" cy="292608"/>
+          <p:cNvPr id="6" name="Text 4"/>
+          <p:cNvSpPr/>
+          <p:nvPr/>
+        </p:nvSpPr>
+        <p:spPr>
+          <a:xfrm>
+            <a:off x="978408" y="1874520"/>
+            <a:ext cx="3026664" cy="237744"/>
           </a:xfrm>
           <a:prstGeom prst="rect">
             <a:avLst/>
@@ -3334,7 +3441,48 @@
               <a:buNone/>
             </a:pPr>
             <a:r>
-              <a:rPr lang="en-US" sz="1700" b="1" dirty="0">
+              <a:rPr lang="en-US" sz="1300" b="1" dirty="0">
+                <a:solidFill>
+                  <a:srgbClr val="2563EB"/>
+                </a:solidFill>
+                <a:latin typeface="Noto Sans SC" pitchFamily="34" charset="0"/>
+                <a:ea typeface="Noto Sans SC" pitchFamily="34" charset="-122"/>
+                <a:cs typeface="Noto Sans SC" pitchFamily="34" charset="-120"/>
+              </a:rPr>
+              <a:t>数据问题</a:t>
+            </a:r>
+            <a:endParaRPr lang="en-US" sz="1300" dirty="0"/>
+          </a:p>
+        </p:txBody>
+      </p:sp>
+      <p:sp>
+        <p:nvSpPr>
+          <p:cNvPr id="7" name="Text 5"/>
+          <p:cNvSpPr/>
+          <p:nvPr/>
+        </p:nvSpPr>
+        <p:spPr>
+          <a:xfrm>
+            <a:off x="978408" y="2203704"/>
+            <a:ext cx="3026664" cy="2816352"/>
+          </a:xfrm>
+          <a:prstGeom prst="rect">
+            <a:avLst/>
+          </a:prstGeom>
+          <a:noFill/>
+          <a:ln/>
+        </p:spPr>
+        <p:txBody>
+          <a:bodyPr wrap="square" lIns="0" tIns="0" rIns="0" bIns="0" rtlCol="0" anchor="ctr">
+            <a:normAutofit/>
+          </a:bodyPr>
+          <a:lstStyle/>
+          <a:p>
+            <a:pPr indent="0" marL="0">
+              <a:buNone/>
+            </a:pPr>
+            <a:r>
+              <a:rPr lang="en-US" sz="1350" dirty="0">
                 <a:solidFill>
                   <a:srgbClr val="232B38"/>
                 </a:solidFill>
@@ -3342,32 +3490,32 @@
                 <a:ea typeface="Noto Sans SC" pitchFamily="34" charset="-122"/>
                 <a:cs typeface="Noto Sans SC" pitchFamily="34" charset="-120"/>
               </a:rPr>
-              <a:t>课堂讲解要点</a:t>
-            </a:r>
-            <a:endParaRPr lang="en-US" sz="1700" dirty="0"/>
-          </a:p>
-        </p:txBody>
-      </p:sp>
-      <p:sp>
-        <p:nvSpPr>
-          <p:cNvPr id="8" name="Shape 5"/>
-          <p:cNvSpPr/>
-          <p:nvPr/>
-        </p:nvSpPr>
-        <p:spPr>
-          <a:xfrm>
-            <a:off x="8732520" y="2313432"/>
-            <a:ext cx="118872" cy="118872"/>
-          </a:xfrm>
-          <a:prstGeom prst="ellipse">
+              <a:t>主流模型数量快速增加，参数量、发布时间、基准分、Elo、速度和延迟分散在不同来源，单看表格很难比较。</a:t>
+            </a:r>
+            <a:endParaRPr lang="en-US" sz="1350" dirty="0"/>
+          </a:p>
+        </p:txBody>
+      </p:sp>
+      <p:sp>
+        <p:nvSpPr>
+          <p:cNvPr id="8" name="Shape 6"/>
+          <p:cNvSpPr/>
+          <p:nvPr/>
+        </p:nvSpPr>
+        <p:spPr>
+          <a:xfrm>
+            <a:off x="4434840" y="1691640"/>
+            <a:ext cx="3429000" cy="3474720"/>
+          </a:xfrm>
+          <a:prstGeom prst="rect">
             <a:avLst/>
           </a:prstGeom>
           <a:solidFill>
-            <a:srgbClr val="0F766E"/>
+            <a:srgbClr val="F8FAFC"/>
           </a:solidFill>
           <a:ln w="12700">
             <a:solidFill>
-              <a:srgbClr val="0F766E"/>
+              <a:srgbClr val="D8E0EA"/>
             </a:solidFill>
             <a:prstDash val="solid"/>
           </a:ln>
@@ -3375,14 +3523,53 @@
       </p:sp>
       <p:sp>
         <p:nvSpPr>
-          <p:cNvPr id="9" name="Text 6"/>
-          <p:cNvSpPr/>
-          <p:nvPr/>
-        </p:nvSpPr>
-        <p:spPr>
-          <a:xfrm>
-            <a:off x="8951976" y="2240280"/>
-            <a:ext cx="2286000" cy="310896"/>
+          <p:cNvPr id="9" name="Text 7"/>
+          <p:cNvSpPr/>
+          <p:nvPr/>
+        </p:nvSpPr>
+        <p:spPr>
+          <a:xfrm>
+            <a:off x="4636008" y="1874520"/>
+            <a:ext cx="3026664" cy="237744"/>
+          </a:xfrm>
+          <a:prstGeom prst="rect">
+            <a:avLst/>
+          </a:prstGeom>
+          <a:noFill/>
+          <a:ln/>
+        </p:spPr>
+        <p:txBody>
+          <a:bodyPr wrap="square" lIns="0" tIns="0" rIns="0" bIns="0" rtlCol="0" anchor="ctr"/>
+          <a:lstStyle/>
+          <a:p>
+            <a:pPr indent="0" marL="0">
+              <a:buNone/>
+            </a:pPr>
+            <a:r>
+              <a:rPr lang="en-US" sz="1300" b="1" dirty="0">
+                <a:solidFill>
+                  <a:srgbClr val="0F766E"/>
+                </a:solidFill>
+                <a:latin typeface="Noto Sans SC" pitchFamily="34" charset="0"/>
+                <a:ea typeface="Noto Sans SC" pitchFamily="34" charset="-122"/>
+                <a:cs typeface="Noto Sans SC" pitchFamily="34" charset="-120"/>
+              </a:rPr>
+              <a:t>课程价值</a:t>
+            </a:r>
+            <a:endParaRPr lang="en-US" sz="1300" dirty="0"/>
+          </a:p>
+        </p:txBody>
+      </p:sp>
+      <p:sp>
+        <p:nvSpPr>
+          <p:cNvPr id="10" name="Text 8"/>
+          <p:cNvSpPr/>
+          <p:nvPr/>
+        </p:nvSpPr>
+        <p:spPr>
+          <a:xfrm>
+            <a:off x="4636008" y="2203704"/>
+            <a:ext cx="3026664" cy="2816352"/>
           </a:xfrm>
           <a:prstGeom prst="rect">
             <a:avLst/>
@@ -3400,7 +3587,7 @@
               <a:buNone/>
             </a:pPr>
             <a:r>
-              <a:rPr lang="en-US" sz="1500" dirty="0">
+              <a:rPr lang="en-US" sz="1350" dirty="0">
                 <a:solidFill>
                   <a:srgbClr val="232B38"/>
                 </a:solidFill>
@@ -3408,32 +3595,32 @@
                 <a:ea typeface="Noto Sans SC" pitchFamily="34" charset="-122"/>
                 <a:cs typeface="Noto Sans SC" pitchFamily="34" charset="-120"/>
               </a:rPr>
-              <a:t>7B-9B 模型横向比较</a:t>
-            </a:r>
-            <a:endParaRPr lang="en-US" sz="1500" dirty="0"/>
-          </a:p>
-        </p:txBody>
-      </p:sp>
-      <p:sp>
-        <p:nvSpPr>
-          <p:cNvPr id="10" name="Shape 7"/>
-          <p:cNvSpPr/>
-          <p:nvPr/>
-        </p:nvSpPr>
-        <p:spPr>
-          <a:xfrm>
-            <a:off x="8732520" y="2843784"/>
-            <a:ext cx="118872" cy="118872"/>
-          </a:xfrm>
-          <a:prstGeom prst="ellipse">
+              <a:t>这个主题天然包含分类变量、连续变量、时间变量和缺失值，适合展示清洗、归一化、插补、横纵向对比等课程方法。</a:t>
+            </a:r>
+            <a:endParaRPr lang="en-US" sz="1350" dirty="0"/>
+          </a:p>
+        </p:txBody>
+      </p:sp>
+      <p:sp>
+        <p:nvSpPr>
+          <p:cNvPr id="11" name="Shape 9"/>
+          <p:cNvSpPr/>
+          <p:nvPr/>
+        </p:nvSpPr>
+        <p:spPr>
+          <a:xfrm>
+            <a:off x="8092440" y="1691640"/>
+            <a:ext cx="3429000" cy="3474720"/>
+          </a:xfrm>
+          <a:prstGeom prst="rect">
             <a:avLst/>
           </a:prstGeom>
           <a:solidFill>
-            <a:srgbClr val="0F766E"/>
+            <a:srgbClr val="F8FAFC"/>
           </a:solidFill>
           <a:ln w="12700">
             <a:solidFill>
-              <a:srgbClr val="0F766E"/>
+              <a:srgbClr val="D8E0EA"/>
             </a:solidFill>
             <a:prstDash val="solid"/>
           </a:ln>
@@ -3441,14 +3628,53 @@
       </p:sp>
       <p:sp>
         <p:nvSpPr>
-          <p:cNvPr id="11" name="Text 8"/>
-          <p:cNvSpPr/>
-          <p:nvPr/>
-        </p:nvSpPr>
-        <p:spPr>
-          <a:xfrm>
-            <a:off x="8951976" y="2770632"/>
-            <a:ext cx="2286000" cy="310896"/>
+          <p:cNvPr id="12" name="Text 10"/>
+          <p:cNvSpPr/>
+          <p:nvPr/>
+        </p:nvSpPr>
+        <p:spPr>
+          <a:xfrm>
+            <a:off x="8293608" y="1874520"/>
+            <a:ext cx="3026664" cy="237744"/>
+          </a:xfrm>
+          <a:prstGeom prst="rect">
+            <a:avLst/>
+          </a:prstGeom>
+          <a:noFill/>
+          <a:ln/>
+        </p:spPr>
+        <p:txBody>
+          <a:bodyPr wrap="square" lIns="0" tIns="0" rIns="0" bIns="0" rtlCol="0" anchor="ctr"/>
+          <a:lstStyle/>
+          <a:p>
+            <a:pPr indent="0" marL="0">
+              <a:buNone/>
+            </a:pPr>
+            <a:r>
+              <a:rPr lang="en-US" sz="1300" b="1" dirty="0">
+                <a:solidFill>
+                  <a:srgbClr val="EA580C"/>
+                </a:solidFill>
+                <a:latin typeface="Noto Sans SC" pitchFamily="34" charset="0"/>
+                <a:ea typeface="Noto Sans SC" pitchFamily="34" charset="-122"/>
+                <a:cs typeface="Noto Sans SC" pitchFamily="34" charset="-120"/>
+              </a:rPr>
+              <a:t>展示目标</a:t>
+            </a:r>
+            <a:endParaRPr lang="en-US" sz="1300" dirty="0"/>
+          </a:p>
+        </p:txBody>
+      </p:sp>
+      <p:sp>
+        <p:nvSpPr>
+          <p:cNvPr id="13" name="Text 11"/>
+          <p:cNvSpPr/>
+          <p:nvPr/>
+        </p:nvSpPr>
+        <p:spPr>
+          <a:xfrm>
+            <a:off x="8293608" y="2203704"/>
+            <a:ext cx="3026664" cy="2816352"/>
           </a:xfrm>
           <a:prstGeom prst="rect">
             <a:avLst/>
@@ -3466,7 +3692,7 @@
               <a:buNone/>
             </a:pPr>
             <a:r>
-              <a:rPr lang="en-US" sz="1500" dirty="0">
+              <a:rPr lang="en-US" sz="1350" dirty="0">
                 <a:solidFill>
                   <a:srgbClr val="232B38"/>
                 </a:solidFill>
@@ -3474,88 +3700,22 @@
                 <a:ea typeface="Noto Sans SC" pitchFamily="34" charset="-122"/>
                 <a:cs typeface="Noto Sans SC" pitchFamily="34" charset="-120"/>
               </a:rPr>
-              <a:t>GPQA/MATH 放大真实差距</a:t>
-            </a:r>
-            <a:endParaRPr lang="en-US" sz="1500" dirty="0"/>
-          </a:p>
-        </p:txBody>
-      </p:sp>
-      <p:sp>
-        <p:nvSpPr>
-          <p:cNvPr id="12" name="Shape 9"/>
-          <p:cNvSpPr/>
-          <p:nvPr/>
-        </p:nvSpPr>
-        <p:spPr>
-          <a:xfrm>
-            <a:off x="8732520" y="3374136"/>
-            <a:ext cx="118872" cy="118872"/>
-          </a:xfrm>
-          <a:prstGeom prst="ellipse">
-            <a:avLst/>
-          </a:prstGeom>
-          <a:solidFill>
-            <a:srgbClr val="0F766E"/>
-          </a:solidFill>
-          <a:ln w="12700">
-            <a:solidFill>
-              <a:srgbClr val="0F766E"/>
-            </a:solidFill>
-            <a:prstDash val="solid"/>
-          </a:ln>
-        </p:spPr>
-      </p:sp>
-      <p:sp>
-        <p:nvSpPr>
-          <p:cNvPr id="13" name="Text 10"/>
-          <p:cNvSpPr/>
-          <p:nvPr/>
-        </p:nvSpPr>
-        <p:spPr>
-          <a:xfrm>
-            <a:off x="8951976" y="3300984"/>
-            <a:ext cx="2286000" cy="310896"/>
-          </a:xfrm>
-          <a:prstGeom prst="rect">
-            <a:avLst/>
-          </a:prstGeom>
-          <a:noFill/>
-          <a:ln/>
-        </p:spPr>
-        <p:txBody>
-          <a:bodyPr wrap="square" lIns="0" tIns="0" rIns="0" bIns="0" rtlCol="0" anchor="ctr">
-            <a:normAutofit/>
-          </a:bodyPr>
-          <a:lstStyle/>
-          <a:p>
-            <a:pPr indent="0" marL="0">
-              <a:buNone/>
-            </a:pPr>
-            <a:r>
-              <a:rPr lang="en-US" sz="1500" dirty="0">
-                <a:solidFill>
-                  <a:srgbClr val="232B38"/>
-                </a:solidFill>
-                <a:latin typeface="Noto Sans SC" pitchFamily="34" charset="0"/>
-                <a:ea typeface="Noto Sans SC" pitchFamily="34" charset="-122"/>
-                <a:cs typeface="Noto Sans SC" pitchFamily="34" charset="-120"/>
-              </a:rPr>
-              <a:t>均值线提供课堂解读参照</a:t>
-            </a:r>
-            <a:endParaRPr lang="en-US" sz="1500" dirty="0"/>
-          </a:p>
-        </p:txBody>
-      </p:sp>
-      <p:sp>
-        <p:nvSpPr>
-          <p:cNvPr id="14" name="Text 11"/>
-          <p:cNvSpPr/>
-          <p:nvPr/>
-        </p:nvSpPr>
-        <p:spPr>
-          <a:xfrm>
-            <a:off x="502920" y="6528816"/>
-            <a:ext cx="10972800" cy="164592"/>
+              <a:t>不是简单罗列模型，而是通过图表回答：谁更强、进步有多快、哪些指标更接近体验、哪些模型更适合部署。</a:t>
+            </a:r>
+            <a:endParaRPr lang="en-US" sz="1350" dirty="0"/>
+          </a:p>
+        </p:txBody>
+      </p:sp>
+      <p:sp>
+        <p:nvSpPr>
+          <p:cNvPr id="14" name="Text 12"/>
+          <p:cNvSpPr/>
+          <p:nvPr/>
+        </p:nvSpPr>
+        <p:spPr>
+          <a:xfrm>
+            <a:off x="914400" y="5632704"/>
+            <a:ext cx="10424160" cy="384048"/>
           </a:xfrm>
           <a:prstGeom prst="rect">
             <a:avLst/>
@@ -3567,6 +3727,45 @@
           <a:bodyPr wrap="square" lIns="0" tIns="0" rIns="0" bIns="0" rtlCol="0" anchor="ctr"/>
           <a:lstStyle/>
           <a:p>
+            <a:pPr algn="ctr" indent="0" marL="0">
+              <a:buNone/>
+            </a:pPr>
+            <a:r>
+              <a:rPr lang="en-US" sz="1650" b="1" dirty="0">
+                <a:solidFill>
+                  <a:srgbClr val="0F766E"/>
+                </a:solidFill>
+                <a:latin typeface="Noto Sans SC" pitchFamily="34" charset="0"/>
+                <a:ea typeface="Noto Sans SC" pitchFamily="34" charset="-122"/>
+                <a:cs typeface="Noto Sans SC" pitchFamily="34" charset="-120"/>
+              </a:rPr>
+              <a:t>这页的重点：项目选题服务于数据可视化课程本身，因为它有足够复杂的数据结构，也能产出清楚的图表结论。</a:t>
+            </a:r>
+            <a:endParaRPr lang="en-US" sz="1650" dirty="0"/>
+          </a:p>
+        </p:txBody>
+      </p:sp>
+      <p:sp>
+        <p:nvSpPr>
+          <p:cNvPr id="15" name="Text 13"/>
+          <p:cNvSpPr/>
+          <p:nvPr/>
+        </p:nvSpPr>
+        <p:spPr>
+          <a:xfrm>
+            <a:off x="502920" y="6519672"/>
+            <a:ext cx="10972800" cy="146304"/>
+          </a:xfrm>
+          <a:prstGeom prst="rect">
+            <a:avLst/>
+          </a:prstGeom>
+          <a:noFill/>
+          <a:ln/>
+        </p:spPr>
+        <p:txBody>
+          <a:bodyPr wrap="square" lIns="0" tIns="0" rIns="0" bIns="0" rtlCol="0" anchor="ctr"/>
+          <a:lstStyle/>
+          <a:p>
             <a:pPr indent="0" marL="0">
               <a:buNone/>
             </a:pPr>
@@ -3579,7 +3778,7 @@
                 <a:ea typeface="Noto Sans SC" pitchFamily="34" charset="-122"/>
                 <a:cs typeface="Noto Sans SC" pitchFamily="34" charset="-120"/>
               </a:rPr>
-              <a:t>开源大模型性能演进可视化分析 · 4</a:t>
+              <a:t>主流大模型数据可视化分析 · 2</a:t>
             </a:r>
             <a:endParaRPr lang="en-US" sz="850" dirty="0"/>
           </a:p>
@@ -3593,16 +3792,9 @@
 </p:sld>
 </file>
 
-<file path=ppt/slides/slide5.xml><?xml version="1.0" encoding="utf-8"?>
+<file path=ppt/slides/slide3.xml><?xml version="1.0" encoding="utf-8"?>
 <p:sld xmlns:a="http://schemas.openxmlformats.org/drawingml/2006/main" xmlns:r="http://schemas.openxmlformats.org/officeDocument/2006/relationships" xmlns:p="http://schemas.openxmlformats.org/presentationml/2006/main">
-  <p:cSld name="Slide 5">
-    <p:bg>
-      <p:bgPr>
-        <a:solidFill>
-          <a:srgbClr val="FFFFFF"/>
-        </a:solidFill>
-      </p:bgPr>
-    </p:bg>
+  <p:cSld name="Slide 3">
     <p:spTree>
       <p:nvGrpSpPr>
         <p:cNvPr id="1" name=""/>
@@ -3625,8 +3817,8 @@
         </p:nvSpPr>
         <p:spPr>
           <a:xfrm>
-            <a:off x="502920" y="292608"/>
-            <a:ext cx="10972800" cy="256032"/>
+            <a:off x="502920" y="256032"/>
+            <a:ext cx="10972800" cy="228600"/>
           </a:xfrm>
           <a:prstGeom prst="rect">
             <a:avLst/>
@@ -3642,7 +3834,7 @@
               <a:buNone/>
             </a:pPr>
             <a:r>
-              <a:rPr lang="en-US" sz="1100" b="1" dirty="0">
+              <a:rPr lang="en-US" sz="1050" b="1" dirty="0">
                 <a:solidFill>
                   <a:srgbClr val="0F766E"/>
                 </a:solidFill>
@@ -3652,7 +3844,7 @@
               </a:rPr>
               <a:t>数据处理与可视化课程项目</a:t>
             </a:r>
-            <a:endParaRPr lang="en-US" sz="1100" dirty="0"/>
+            <a:endParaRPr lang="en-US" sz="1050" dirty="0"/>
           </a:p>
         </p:txBody>
       </p:sp>
@@ -3664,8 +3856,8 @@
         </p:nvSpPr>
         <p:spPr>
           <a:xfrm>
-            <a:off x="502920" y="621792"/>
-            <a:ext cx="10972800" cy="512064"/>
+            <a:off x="502920" y="576072"/>
+            <a:ext cx="10972800" cy="502920"/>
           </a:xfrm>
           <a:prstGeom prst="rect">
             <a:avLst/>
@@ -3683,7 +3875,7 @@
               <a:buNone/>
             </a:pPr>
             <a:r>
-              <a:rPr lang="en-US" sz="2400" b="1" dirty="0">
+              <a:rPr lang="en-US" sz="2300" b="1" dirty="0">
                 <a:solidFill>
                   <a:srgbClr val="232B38"/>
                 </a:solidFill>
@@ -3691,9 +3883,9 @@
                 <a:ea typeface="Noto Sans SC" pitchFamily="34" charset="-122"/>
                 <a:cs typeface="Noto Sans SC" pitchFamily="34" charset="-120"/>
               </a:rPr>
-              <a:t>证据 3：架构生态与训练范式</a:t>
-            </a:r>
-            <a:endParaRPr lang="en-US" sz="2400" dirty="0"/>
+              <a:t>数据范围与字段设计</a:t>
+            </a:r>
+            <a:endParaRPr lang="en-US" sz="2300" dirty="0"/>
           </a:p>
         </p:txBody>
       </p:sp>
@@ -3705,7 +3897,7 @@
         </p:nvSpPr>
         <p:spPr>
           <a:xfrm>
-            <a:off x="502920" y="1225296"/>
+            <a:off x="502920" y="1161288"/>
             <a:ext cx="11155680" cy="0"/>
           </a:xfrm>
           <a:prstGeom prst="line">
@@ -3720,104 +3912,16 @@
           </a:ln>
         </p:spPr>
       </p:sp>
-      <p:pic>
-        <p:nvPicPr>
-          <p:cNvPr id="5" name="Image 0" descr="C:\Users\HBZuo\Desktop\wrokmean\数据可视化\dashboard\assets\figures\03_architecture_heatmap.png">    </p:cNvPr>
-          <p:cNvPicPr>
-            <a:picLocks noChangeAspect="1"/>
-          </p:cNvPicPr>
-          <p:nvPr/>
-        </p:nvPicPr>
-        <p:blipFill>
-          <a:blip r:embed="rId1"/>
-          <a:stretch>
-            <a:fillRect/>
-          </a:stretch>
-        </p:blipFill>
-        <p:spPr>
-          <a:xfrm>
-            <a:off x="530352" y="1417320"/>
-            <a:ext cx="7635240" cy="4526280"/>
-          </a:xfrm>
-          <a:prstGeom prst="rect">
-            <a:avLst/>
-          </a:prstGeom>
-        </p:spPr>
-      </p:pic>
-      <p:sp>
-        <p:nvSpPr>
-          <p:cNvPr id="6" name="Shape 3"/>
-          <p:cNvSpPr/>
-          <p:nvPr/>
-        </p:nvSpPr>
-        <p:spPr>
-          <a:xfrm>
-            <a:off x="8458200" y="1417320"/>
-            <a:ext cx="2880360" cy="4526280"/>
-          </a:xfrm>
-          <a:prstGeom prst="rect">
-            <a:avLst/>
-          </a:prstGeom>
-          <a:solidFill>
-            <a:srgbClr val="F7FAFC"/>
-          </a:solidFill>
-          <a:ln w="12700">
-            <a:solidFill>
-              <a:srgbClr val="D8E0EA"/>
-            </a:solidFill>
-            <a:prstDash val="solid"/>
-          </a:ln>
-        </p:spPr>
-      </p:sp>
-      <p:sp>
-        <p:nvSpPr>
-          <p:cNvPr id="7" name="Text 4"/>
-          <p:cNvSpPr/>
-          <p:nvPr/>
-        </p:nvSpPr>
-        <p:spPr>
-          <a:xfrm>
-            <a:off x="8732520" y="1737360"/>
-            <a:ext cx="2331720" cy="292608"/>
-          </a:xfrm>
-          <a:prstGeom prst="rect">
-            <a:avLst/>
-          </a:prstGeom>
-          <a:noFill/>
-          <a:ln/>
-        </p:spPr>
-        <p:txBody>
-          <a:bodyPr wrap="square" lIns="0" tIns="0" rIns="0" bIns="0" rtlCol="0" anchor="ctr"/>
-          <a:lstStyle/>
-          <a:p>
-            <a:pPr indent="0" marL="0">
-              <a:buNone/>
-            </a:pPr>
-            <a:r>
-              <a:rPr lang="en-US" sz="1700" b="1" dirty="0">
-                <a:solidFill>
-                  <a:srgbClr val="232B38"/>
-                </a:solidFill>
-                <a:latin typeface="Noto Sans SC" pitchFamily="34" charset="0"/>
-                <a:ea typeface="Noto Sans SC" pitchFamily="34" charset="-122"/>
-                <a:cs typeface="Noto Sans SC" pitchFamily="34" charset="-120"/>
-              </a:rPr>
-              <a:t>课堂讲解要点</a:t>
-            </a:r>
-            <a:endParaRPr lang="en-US" sz="1700" dirty="0"/>
-          </a:p>
-        </p:txBody>
-      </p:sp>
-      <p:sp>
-        <p:nvSpPr>
-          <p:cNvPr id="8" name="Shape 5"/>
-          <p:cNvSpPr/>
-          <p:nvPr/>
-        </p:nvSpPr>
-        <p:spPr>
-          <a:xfrm>
-            <a:off x="8732520" y="2313432"/>
-            <a:ext cx="118872" cy="118872"/>
+      <p:sp>
+        <p:nvSpPr>
+          <p:cNvPr id="5" name="Shape 3"/>
+          <p:cNvSpPr/>
+          <p:nvPr/>
+        </p:nvSpPr>
+        <p:spPr>
+          <a:xfrm>
+            <a:off x="868680" y="1691640"/>
+            <a:ext cx="100584" cy="100584"/>
           </a:xfrm>
           <a:prstGeom prst="ellipse">
             <a:avLst/>
@@ -3835,14 +3939,14 @@
       </p:sp>
       <p:sp>
         <p:nvSpPr>
-          <p:cNvPr id="9" name="Text 6"/>
-          <p:cNvSpPr/>
-          <p:nvPr/>
-        </p:nvSpPr>
-        <p:spPr>
-          <a:xfrm>
-            <a:off x="8951976" y="2240280"/>
-            <a:ext cx="2286000" cy="310896"/>
+          <p:cNvPr id="6" name="Text 4"/>
+          <p:cNvSpPr/>
+          <p:nvPr/>
+        </p:nvSpPr>
+        <p:spPr>
+          <a:xfrm>
+            <a:off x="1069848" y="1627632"/>
+            <a:ext cx="10332720" cy="310896"/>
           </a:xfrm>
           <a:prstGeom prst="rect">
             <a:avLst/>
@@ -3860,7 +3964,7 @@
               <a:buNone/>
             </a:pPr>
             <a:r>
-              <a:rPr lang="en-US" sz="1500" dirty="0">
+              <a:rPr lang="en-US" sz="1600" dirty="0">
                 <a:solidFill>
                   <a:srgbClr val="232B38"/>
                 </a:solidFill>
@@ -3868,22 +3972,22 @@
                 <a:ea typeface="Noto Sans SC" pitchFamily="34" charset="-122"/>
                 <a:cs typeface="Noto Sans SC" pitchFamily="34" charset="-120"/>
               </a:rPr>
-              <a:t>底层架构呈现收敛</a:t>
-            </a:r>
-            <a:endParaRPr lang="en-US" sz="1500" dirty="0"/>
-          </a:p>
-        </p:txBody>
-      </p:sp>
-      <p:sp>
-        <p:nvSpPr>
-          <p:cNvPr id="10" name="Shape 7"/>
-          <p:cNvSpPr/>
-          <p:nvPr/>
-        </p:nvSpPr>
-        <p:spPr>
-          <a:xfrm>
-            <a:off x="8732520" y="2843784"/>
-            <a:ext cx="118872" cy="118872"/>
+              <a:t>时间范围：2024-01-01 至 2026-06-05，按发布日期和采集截止日组织。</a:t>
+            </a:r>
+            <a:endParaRPr lang="en-US" sz="1600" dirty="0"/>
+          </a:p>
+        </p:txBody>
+      </p:sp>
+      <p:sp>
+        <p:nvSpPr>
+          <p:cNvPr id="7" name="Shape 5"/>
+          <p:cNvSpPr/>
+          <p:nvPr/>
+        </p:nvSpPr>
+        <p:spPr>
+          <a:xfrm>
+            <a:off x="868680" y="2313432"/>
+            <a:ext cx="100584" cy="100584"/>
           </a:xfrm>
           <a:prstGeom prst="ellipse">
             <a:avLst/>
@@ -3901,14 +4005,14 @@
       </p:sp>
       <p:sp>
         <p:nvSpPr>
-          <p:cNvPr id="11" name="Text 8"/>
-          <p:cNvSpPr/>
-          <p:nvPr/>
-        </p:nvSpPr>
-        <p:spPr>
-          <a:xfrm>
-            <a:off x="8951976" y="2770632"/>
-            <a:ext cx="2286000" cy="310896"/>
+          <p:cNvPr id="8" name="Text 6"/>
+          <p:cNvSpPr/>
+          <p:nvPr/>
+        </p:nvSpPr>
+        <p:spPr>
+          <a:xfrm>
+            <a:off x="1069848" y="2249424"/>
+            <a:ext cx="10332720" cy="310896"/>
           </a:xfrm>
           <a:prstGeom prst="rect">
             <a:avLst/>
@@ -3926,7 +4030,7 @@
               <a:buNone/>
             </a:pPr>
             <a:r>
-              <a:rPr lang="en-US" sz="1500" dirty="0">
+              <a:rPr lang="en-US" sz="1600" dirty="0">
                 <a:solidFill>
                   <a:srgbClr val="232B38"/>
                 </a:solidFill>
@@ -3934,22 +4038,22 @@
                 <a:ea typeface="Noto Sans SC" pitchFamily="34" charset="-122"/>
                 <a:cs typeface="Noto Sans SC" pitchFamily="34" charset="-120"/>
               </a:rPr>
-              <a:t>微调、蒸馏和 MoE 推动二次开发</a:t>
-            </a:r>
-            <a:endParaRPr lang="en-US" sz="1500" dirty="0"/>
-          </a:p>
-        </p:txBody>
-      </p:sp>
-      <p:sp>
-        <p:nvSpPr>
-          <p:cNvPr id="12" name="Shape 9"/>
-          <p:cNvSpPr/>
-          <p:nvPr/>
-        </p:nvSpPr>
-        <p:spPr>
-          <a:xfrm>
-            <a:off x="8732520" y="3374136"/>
-            <a:ext cx="118872" cy="118872"/>
+              <a:t>模型范围：17 个主流系列，每个系列保留多个代表版本，支持纵向趋势分析。</a:t>
+            </a:r>
+            <a:endParaRPr lang="en-US" sz="1600" dirty="0"/>
+          </a:p>
+        </p:txBody>
+      </p:sp>
+      <p:sp>
+        <p:nvSpPr>
+          <p:cNvPr id="9" name="Shape 7"/>
+          <p:cNvSpPr/>
+          <p:nvPr/>
+        </p:nvSpPr>
+        <p:spPr>
+          <a:xfrm>
+            <a:off x="868680" y="2935224"/>
+            <a:ext cx="100584" cy="100584"/>
           </a:xfrm>
           <a:prstGeom prst="ellipse">
             <a:avLst/>
@@ -3967,14 +4071,14 @@
       </p:sp>
       <p:sp>
         <p:nvSpPr>
-          <p:cNvPr id="13" name="Text 10"/>
-          <p:cNvSpPr/>
-          <p:nvPr/>
-        </p:nvSpPr>
-        <p:spPr>
-          <a:xfrm>
-            <a:off x="8951976" y="3300984"/>
-            <a:ext cx="2286000" cy="310896"/>
+          <p:cNvPr id="10" name="Text 8"/>
+          <p:cNvSpPr/>
+          <p:nvPr/>
+        </p:nvSpPr>
+        <p:spPr>
+          <a:xfrm>
+            <a:off x="1069848" y="2871216"/>
+            <a:ext cx="10332720" cy="310896"/>
           </a:xfrm>
           <a:prstGeom prst="rect">
             <a:avLst/>
@@ -3992,7 +4096,7 @@
               <a:buNone/>
             </a:pPr>
             <a:r>
-              <a:rPr lang="en-US" sz="1500" dirty="0">
+              <a:rPr lang="en-US" sz="1600" dirty="0">
                 <a:solidFill>
                   <a:srgbClr val="232B38"/>
                 </a:solidFill>
@@ -4000,7 +4104,137 @@
                 <a:ea typeface="Noto Sans SC" pitchFamily="34" charset="-122"/>
                 <a:cs typeface="Noto Sans SC" pitchFamily="34" charset="-120"/>
               </a:rPr>
-              <a:t>热力矩阵同时表达类别与强度</a:t>
+              <a:t>核心字段：模型名、公司、系列、架构、训练范式、参数量、发布时间、基准分、Elo、吞吐、首字延迟。</a:t>
+            </a:r>
+            <a:endParaRPr lang="en-US" sz="1600" dirty="0"/>
+          </a:p>
+        </p:txBody>
+      </p:sp>
+      <p:sp>
+        <p:nvSpPr>
+          <p:cNvPr id="11" name="Shape 9"/>
+          <p:cNvSpPr/>
+          <p:nvPr/>
+        </p:nvSpPr>
+        <p:spPr>
+          <a:xfrm>
+            <a:off x="868680" y="3557016"/>
+            <a:ext cx="100584" cy="100584"/>
+          </a:xfrm>
+          <a:prstGeom prst="ellipse">
+            <a:avLst/>
+          </a:prstGeom>
+          <a:solidFill>
+            <a:srgbClr val="0F766E"/>
+          </a:solidFill>
+          <a:ln w="12700">
+            <a:solidFill>
+              <a:srgbClr val="0F766E"/>
+            </a:solidFill>
+            <a:prstDash val="solid"/>
+          </a:ln>
+        </p:spPr>
+      </p:sp>
+      <p:sp>
+        <p:nvSpPr>
+          <p:cNvPr id="12" name="Text 10"/>
+          <p:cNvSpPr/>
+          <p:nvPr/>
+        </p:nvSpPr>
+        <p:spPr>
+          <a:xfrm>
+            <a:off x="1069848" y="3493008"/>
+            <a:ext cx="10332720" cy="310896"/>
+          </a:xfrm>
+          <a:prstGeom prst="rect">
+            <a:avLst/>
+          </a:prstGeom>
+          <a:noFill/>
+          <a:ln/>
+        </p:spPr>
+        <p:txBody>
+          <a:bodyPr wrap="square" lIns="0" tIns="0" rIns="0" bIns="0" rtlCol="0" anchor="ctr">
+            <a:normAutofit/>
+          </a:bodyPr>
+          <a:lstStyle/>
+          <a:p>
+            <a:pPr indent="0" marL="0">
+              <a:buNone/>
+            </a:pPr>
+            <a:r>
+              <a:rPr lang="en-US" sz="1600" dirty="0">
+                <a:solidFill>
+                  <a:srgbClr val="232B38"/>
+                </a:solidFill>
+                <a:latin typeface="Noto Sans SC" pitchFamily="34" charset="0"/>
+                <a:ea typeface="Noto Sans SC" pitchFamily="34" charset="-122"/>
+                <a:cs typeface="Noto Sans SC" pitchFamily="34" charset="-120"/>
+              </a:rPr>
+              <a:t>质量标记：保留 benchmark_observed、arena_observed、hardware_observed，区分实测与插补。</a:t>
+            </a:r>
+            <a:endParaRPr lang="en-US" sz="1600" dirty="0"/>
+          </a:p>
+        </p:txBody>
+      </p:sp>
+      <p:sp>
+        <p:nvSpPr>
+          <p:cNvPr id="13" name="Shape 11"/>
+          <p:cNvSpPr/>
+          <p:nvPr/>
+        </p:nvSpPr>
+        <p:spPr>
+          <a:xfrm>
+            <a:off x="868680" y="4389120"/>
+            <a:ext cx="10469880" cy="1234440"/>
+          </a:xfrm>
+          <a:prstGeom prst="rect">
+            <a:avLst/>
+          </a:prstGeom>
+          <a:solidFill>
+            <a:srgbClr val="F8FAFC"/>
+          </a:solidFill>
+          <a:ln w="12700">
+            <a:solidFill>
+              <a:srgbClr val="D8E0EA"/>
+            </a:solidFill>
+            <a:prstDash val="solid"/>
+          </a:ln>
+        </p:spPr>
+      </p:sp>
+      <p:sp>
+        <p:nvSpPr>
+          <p:cNvPr id="14" name="Text 12"/>
+          <p:cNvSpPr/>
+          <p:nvPr/>
+        </p:nvSpPr>
+        <p:spPr>
+          <a:xfrm>
+            <a:off x="1143000" y="4645152"/>
+            <a:ext cx="2560320" cy="256032"/>
+          </a:xfrm>
+          <a:prstGeom prst="rect">
+            <a:avLst/>
+          </a:prstGeom>
+          <a:noFill/>
+          <a:ln/>
+        </p:spPr>
+        <p:txBody>
+          <a:bodyPr wrap="square" lIns="0" tIns="0" rIns="0" bIns="0" rtlCol="0" anchor="ctr"/>
+          <a:lstStyle/>
+          <a:p>
+            <a:pPr indent="0" marL="0">
+              <a:buNone/>
+            </a:pPr>
+            <a:r>
+              <a:rPr lang="en-US" sz="1500" b="1" dirty="0">
+                <a:solidFill>
+                  <a:srgbClr val="2563EB"/>
+                </a:solidFill>
+                <a:latin typeface="Noto Sans SC" pitchFamily="34" charset="0"/>
+                <a:ea typeface="Noto Sans SC" pitchFamily="34" charset="-122"/>
+                <a:cs typeface="Noto Sans SC" pitchFamily="34" charset="-120"/>
+              </a:rPr>
+              <a:t>数据可视化课程对应点</a:t>
             </a:r>
             <a:endParaRPr lang="en-US" sz="1500" dirty="0"/>
           </a:p>
@@ -4008,14 +4242,14 @@
       </p:sp>
       <p:sp>
         <p:nvSpPr>
-          <p:cNvPr id="14" name="Text 11"/>
-          <p:cNvSpPr/>
-          <p:nvPr/>
-        </p:nvSpPr>
-        <p:spPr>
-          <a:xfrm>
-            <a:off x="502920" y="6528816"/>
-            <a:ext cx="10972800" cy="164592"/>
+          <p:cNvPr id="15" name="Text 13"/>
+          <p:cNvSpPr/>
+          <p:nvPr/>
+        </p:nvSpPr>
+        <p:spPr>
+          <a:xfrm>
+            <a:off x="1143000" y="4983480"/>
+            <a:ext cx="9692640" cy="310896"/>
           </a:xfrm>
           <a:prstGeom prst="rect">
             <a:avLst/>
@@ -4031,6 +4265,45 @@
               <a:buNone/>
             </a:pPr>
             <a:r>
+              <a:rPr lang="en-US" sz="1550" dirty="0">
+                <a:solidFill>
+                  <a:srgbClr val="232B38"/>
+                </a:solidFill>
+                <a:latin typeface="Noto Sans SC" pitchFamily="34" charset="0"/>
+                <a:ea typeface="Noto Sans SC" pitchFamily="34" charset="-122"/>
+                <a:cs typeface="Noto Sans SC" pitchFamily="34" charset="-120"/>
+              </a:rPr>
+              <a:t>本项目不是追求爬取长尾全集，而是构造可比较、可解释、可展示的代表性数据表；字段设计直接服务于后续图表编码。</a:t>
+            </a:r>
+            <a:endParaRPr lang="en-US" sz="1550" dirty="0"/>
+          </a:p>
+        </p:txBody>
+      </p:sp>
+      <p:sp>
+        <p:nvSpPr>
+          <p:cNvPr id="16" name="Text 14"/>
+          <p:cNvSpPr/>
+          <p:nvPr/>
+        </p:nvSpPr>
+        <p:spPr>
+          <a:xfrm>
+            <a:off x="502920" y="6519672"/>
+            <a:ext cx="10972800" cy="146304"/>
+          </a:xfrm>
+          <a:prstGeom prst="rect">
+            <a:avLst/>
+          </a:prstGeom>
+          <a:noFill/>
+          <a:ln/>
+        </p:spPr>
+        <p:txBody>
+          <a:bodyPr wrap="square" lIns="0" tIns="0" rIns="0" bIns="0" rtlCol="0" anchor="ctr"/>
+          <a:lstStyle/>
+          <a:p>
+            <a:pPr indent="0" marL="0">
+              <a:buNone/>
+            </a:pPr>
+            <a:r>
               <a:rPr lang="en-US" sz="850" dirty="0">
                 <a:solidFill>
                   <a:srgbClr val="8A97A8"/>
@@ -4039,7 +4312,7 @@
                 <a:ea typeface="Noto Sans SC" pitchFamily="34" charset="-122"/>
                 <a:cs typeface="Noto Sans SC" pitchFamily="34" charset="-120"/>
               </a:rPr>
-              <a:t>开源大模型性能演进可视化分析 · 5</a:t>
+              <a:t>主流大模型数据可视化分析 · 3</a:t>
             </a:r>
             <a:endParaRPr lang="en-US" sz="850" dirty="0"/>
           </a:p>
@@ -4053,16 +4326,9 @@
 </p:sld>
 </file>
 
-<file path=ppt/slides/slide6.xml><?xml version="1.0" encoding="utf-8"?>
+<file path=ppt/slides/slide4.xml><?xml version="1.0" encoding="utf-8"?>
 <p:sld xmlns:a="http://schemas.openxmlformats.org/drawingml/2006/main" xmlns:r="http://schemas.openxmlformats.org/officeDocument/2006/relationships" xmlns:p="http://schemas.openxmlformats.org/presentationml/2006/main">
-  <p:cSld name="Slide 6">
-    <p:bg>
-      <p:bgPr>
-        <a:solidFill>
-          <a:srgbClr val="FFFFFF"/>
-        </a:solidFill>
-      </p:bgPr>
-    </p:bg>
+  <p:cSld name="Slide 4">
     <p:spTree>
       <p:nvGrpSpPr>
         <p:cNvPr id="1" name=""/>
@@ -4085,8 +4351,8 @@
         </p:nvSpPr>
         <p:spPr>
           <a:xfrm>
-            <a:off x="502920" y="292608"/>
-            <a:ext cx="10972800" cy="256032"/>
+            <a:off x="502920" y="256032"/>
+            <a:ext cx="10972800" cy="228600"/>
           </a:xfrm>
           <a:prstGeom prst="rect">
             <a:avLst/>
@@ -4102,7 +4368,7 @@
               <a:buNone/>
             </a:pPr>
             <a:r>
-              <a:rPr lang="en-US" sz="1100" b="1" dirty="0">
+              <a:rPr lang="en-US" sz="1050" b="1" dirty="0">
                 <a:solidFill>
                   <a:srgbClr val="0F766E"/>
                 </a:solidFill>
@@ -4112,7 +4378,7 @@
               </a:rPr>
               <a:t>数据处理与可视化课程项目</a:t>
             </a:r>
-            <a:endParaRPr lang="en-US" sz="1100" dirty="0"/>
+            <a:endParaRPr lang="en-US" sz="1050" dirty="0"/>
           </a:p>
         </p:txBody>
       </p:sp>
@@ -4124,8 +4390,8 @@
         </p:nvSpPr>
         <p:spPr>
           <a:xfrm>
-            <a:off x="502920" y="621792"/>
-            <a:ext cx="10972800" cy="512064"/>
+            <a:off x="502920" y="576072"/>
+            <a:ext cx="10972800" cy="502920"/>
           </a:xfrm>
           <a:prstGeom prst="rect">
             <a:avLst/>
@@ -4143,7 +4409,7 @@
               <a:buNone/>
             </a:pPr>
             <a:r>
-              <a:rPr lang="en-US" sz="2400" b="1" dirty="0">
+              <a:rPr lang="en-US" sz="2300" b="1" dirty="0">
                 <a:solidFill>
                   <a:srgbClr val="232B38"/>
                 </a:solidFill>
@@ -4151,9 +4417,9 @@
                 <a:ea typeface="Noto Sans SC" pitchFamily="34" charset="-122"/>
                 <a:cs typeface="Noto Sans SC" pitchFamily="34" charset="-120"/>
               </a:rPr>
-              <a:t>证据 4：偏好相关性与硬件帕累托</a:t>
-            </a:r>
-            <a:endParaRPr lang="en-US" sz="2400" dirty="0"/>
+              <a:t>数据处理过程：从原始字段到可视化指标</a:t>
+            </a:r>
+            <a:endParaRPr lang="en-US" sz="2300" dirty="0"/>
           </a:p>
         </p:txBody>
       </p:sp>
@@ -4165,7 +4431,7 @@
         </p:nvSpPr>
         <p:spPr>
           <a:xfrm>
-            <a:off x="502920" y="1225296"/>
+            <a:off x="502920" y="1161288"/>
             <a:ext cx="11155680" cy="0"/>
           </a:xfrm>
           <a:prstGeom prst="line">
@@ -4180,46 +4446,22 @@
           </a:ln>
         </p:spPr>
       </p:sp>
-      <p:pic>
-        <p:nvPicPr>
-          <p:cNvPr id="5" name="Image 0" descr="C:\Users\HBZuo\Desktop\wrokmean\数据可视化\dashboard\assets\figures\04_correlation_matrix.png">    </p:cNvPr>
-          <p:cNvPicPr>
-            <a:picLocks noChangeAspect="1"/>
-          </p:cNvPicPr>
-          <p:nvPr/>
-        </p:nvPicPr>
-        <p:blipFill>
-          <a:blip r:embed="rId1"/>
-          <a:stretch>
-            <a:fillRect/>
-          </a:stretch>
-        </p:blipFill>
-        <p:spPr>
-          <a:xfrm>
-            <a:off x="530352" y="1417320"/>
-            <a:ext cx="7635240" cy="4526280"/>
-          </a:xfrm>
-          <a:prstGeom prst="rect">
-            <a:avLst/>
-          </a:prstGeom>
-        </p:spPr>
-      </p:pic>
-      <p:sp>
-        <p:nvSpPr>
-          <p:cNvPr id="6" name="Shape 3"/>
-          <p:cNvSpPr/>
-          <p:nvPr/>
-        </p:nvSpPr>
-        <p:spPr>
-          <a:xfrm>
-            <a:off x="8458200" y="1417320"/>
-            <a:ext cx="2880360" cy="4526280"/>
+      <p:sp>
+        <p:nvSpPr>
+          <p:cNvPr id="5" name="Shape 3"/>
+          <p:cNvSpPr/>
+          <p:nvPr/>
+        </p:nvSpPr>
+        <p:spPr>
+          <a:xfrm>
+            <a:off x="658368" y="1874520"/>
+            <a:ext cx="2450592" cy="2651760"/>
           </a:xfrm>
           <a:prstGeom prst="rect">
             <a:avLst/>
           </a:prstGeom>
           <a:solidFill>
-            <a:srgbClr val="F7FAFC"/>
+            <a:srgbClr val="ECFDF5"/>
           </a:solidFill>
           <a:ln w="12700">
             <a:solidFill>
@@ -4231,63 +4473,145 @@
       </p:sp>
       <p:sp>
         <p:nvSpPr>
-          <p:cNvPr id="7" name="Text 4"/>
-          <p:cNvSpPr/>
-          <p:nvPr/>
-        </p:nvSpPr>
-        <p:spPr>
-          <a:xfrm>
-            <a:off x="8732520" y="1737360"/>
-            <a:ext cx="2331720" cy="292608"/>
-          </a:xfrm>
-          <a:prstGeom prst="rect">
-            <a:avLst/>
-          </a:prstGeom>
-          <a:noFill/>
-          <a:ln/>
-        </p:spPr>
-        <p:txBody>
-          <a:bodyPr wrap="square" lIns="0" tIns="0" rIns="0" bIns="0" rtlCol="0" anchor="ctr"/>
-          <a:lstStyle/>
-          <a:p>
-            <a:pPr indent="0" marL="0">
-              <a:buNone/>
-            </a:pPr>
-            <a:r>
-              <a:rPr lang="en-US" sz="1700" b="1" dirty="0">
-                <a:solidFill>
-                  <a:srgbClr val="232B38"/>
-                </a:solidFill>
-                <a:latin typeface="Noto Sans SC" pitchFamily="34" charset="0"/>
-                <a:ea typeface="Noto Sans SC" pitchFamily="34" charset="-122"/>
-                <a:cs typeface="Noto Sans SC" pitchFamily="34" charset="-120"/>
-              </a:rPr>
-              <a:t>课堂讲解要点</a:t>
-            </a:r>
-            <a:endParaRPr lang="en-US" sz="1700" dirty="0"/>
-          </a:p>
-        </p:txBody>
-      </p:sp>
-      <p:sp>
-        <p:nvSpPr>
-          <p:cNvPr id="8" name="Shape 5"/>
-          <p:cNvSpPr/>
-          <p:nvPr/>
-        </p:nvSpPr>
-        <p:spPr>
-          <a:xfrm>
-            <a:off x="8732520" y="2313432"/>
-            <a:ext cx="118872" cy="118872"/>
-          </a:xfrm>
-          <a:prstGeom prst="ellipse">
+          <p:cNvPr id="6" name="Text 4"/>
+          <p:cNvSpPr/>
+          <p:nvPr/>
+        </p:nvSpPr>
+        <p:spPr>
+          <a:xfrm>
+            <a:off x="859536" y="2121408"/>
+            <a:ext cx="402336" cy="402336"/>
+          </a:xfrm>
+          <a:prstGeom prst="rect">
             <a:avLst/>
           </a:prstGeom>
           <a:solidFill>
             <a:srgbClr val="0F766E"/>
           </a:solidFill>
+          <a:ln/>
+        </p:spPr>
+        <p:txBody>
+          <a:bodyPr wrap="square" lIns="0" tIns="0" rIns="0" bIns="0" rtlCol="0" anchor="ctr"/>
+          <a:lstStyle/>
+          <a:p>
+            <a:pPr algn="ctr" indent="0" marL="0">
+              <a:buNone/>
+            </a:pPr>
+            <a:r>
+              <a:rPr lang="en-US" sz="1700" b="1" dirty="0">
+                <a:solidFill>
+                  <a:srgbClr val="FFFFFF"/>
+                </a:solidFill>
+                <a:latin typeface="Noto Sans SC" pitchFamily="34" charset="0"/>
+                <a:ea typeface="Noto Sans SC" pitchFamily="34" charset="-122"/>
+                <a:cs typeface="Noto Sans SC" pitchFamily="34" charset="-120"/>
+              </a:rPr>
+              <a:t>1</a:t>
+            </a:r>
+            <a:endParaRPr lang="en-US" sz="1700" dirty="0"/>
+          </a:p>
+        </p:txBody>
+      </p:sp>
+      <p:sp>
+        <p:nvSpPr>
+          <p:cNvPr id="7" name="Text 5"/>
+          <p:cNvSpPr/>
+          <p:nvPr/>
+        </p:nvSpPr>
+        <p:spPr>
+          <a:xfrm>
+            <a:off x="914400" y="2743200"/>
+            <a:ext cx="1920240" cy="301752"/>
+          </a:xfrm>
+          <a:prstGeom prst="rect">
+            <a:avLst/>
+          </a:prstGeom>
+          <a:noFill/>
+          <a:ln/>
+        </p:spPr>
+        <p:txBody>
+          <a:bodyPr wrap="square" lIns="0" tIns="0" rIns="0" bIns="0" rtlCol="0" anchor="ctr"/>
+          <a:lstStyle/>
+          <a:p>
+            <a:pPr indent="0" marL="0">
+              <a:buNone/>
+            </a:pPr>
+            <a:r>
+              <a:rPr lang="en-US" sz="1800" b="1" dirty="0">
+                <a:solidFill>
+                  <a:srgbClr val="232B38"/>
+                </a:solidFill>
+                <a:latin typeface="Noto Sans SC" pitchFamily="34" charset="0"/>
+                <a:ea typeface="Noto Sans SC" pitchFamily="34" charset="-122"/>
+                <a:cs typeface="Noto Sans SC" pitchFamily="34" charset="-120"/>
+              </a:rPr>
+              <a:t>字段统一</a:t>
+            </a:r>
+            <a:endParaRPr lang="en-US" sz="1800" dirty="0"/>
+          </a:p>
+        </p:txBody>
+      </p:sp>
+      <p:sp>
+        <p:nvSpPr>
+          <p:cNvPr id="8" name="Text 6"/>
+          <p:cNvSpPr/>
+          <p:nvPr/>
+        </p:nvSpPr>
+        <p:spPr>
+          <a:xfrm>
+            <a:off x="914400" y="3246120"/>
+            <a:ext cx="1938528" cy="749808"/>
+          </a:xfrm>
+          <a:prstGeom prst="rect">
+            <a:avLst/>
+          </a:prstGeom>
+          <a:noFill/>
+          <a:ln/>
+        </p:spPr>
+        <p:txBody>
+          <a:bodyPr wrap="square" lIns="0" tIns="0" rIns="0" bIns="0" rtlCol="0" anchor="ctr">
+            <a:normAutofit/>
+          </a:bodyPr>
+          <a:lstStyle/>
+          <a:p>
+            <a:pPr indent="0" marL="0">
+              <a:buNone/>
+            </a:pPr>
+            <a:r>
+              <a:rPr lang="en-US" sz="1320" dirty="0">
+                <a:solidFill>
+                  <a:srgbClr val="64748B"/>
+                </a:solidFill>
+                <a:latin typeface="Noto Sans SC" pitchFamily="34" charset="0"/>
+                <a:ea typeface="Noto Sans SC" pitchFamily="34" charset="-122"/>
+                <a:cs typeface="Noto Sans SC" pitchFamily="34" charset="-120"/>
+              </a:rPr>
+              <a:t>统一日期、系列、架构、训练范式和模型规模，保证横向比较口径一致。</a:t>
+            </a:r>
+            <a:endParaRPr lang="en-US" sz="1320" dirty="0"/>
+          </a:p>
+        </p:txBody>
+      </p:sp>
+      <p:sp>
+        <p:nvSpPr>
+          <p:cNvPr id="9" name="Shape 7"/>
+          <p:cNvSpPr/>
+          <p:nvPr/>
+        </p:nvSpPr>
+        <p:spPr>
+          <a:xfrm>
+            <a:off x="3182112" y="3063240"/>
+            <a:ext cx="347472" cy="347472"/>
+          </a:xfrm>
+          <a:prstGeom prst="chevron">
+            <a:avLst/>
+          </a:prstGeom>
+          <a:solidFill>
+            <a:srgbClr val="EA580C"/>
+          </a:solidFill>
           <a:ln w="12700">
             <a:solidFill>
-              <a:srgbClr val="0F766E"/>
+              <a:srgbClr val="EA580C"/>
             </a:solidFill>
             <a:prstDash val="solid"/>
           </a:ln>
@@ -4295,14 +4619,119 @@
       </p:sp>
       <p:sp>
         <p:nvSpPr>
-          <p:cNvPr id="9" name="Text 6"/>
-          <p:cNvSpPr/>
-          <p:nvPr/>
-        </p:nvSpPr>
-        <p:spPr>
-          <a:xfrm>
-            <a:off x="8951976" y="2240280"/>
-            <a:ext cx="2286000" cy="310896"/>
+          <p:cNvPr id="10" name="Shape 8"/>
+          <p:cNvSpPr/>
+          <p:nvPr/>
+        </p:nvSpPr>
+        <p:spPr>
+          <a:xfrm>
+            <a:off x="3511296" y="1874520"/>
+            <a:ext cx="2450592" cy="2651760"/>
+          </a:xfrm>
+          <a:prstGeom prst="rect">
+            <a:avLst/>
+          </a:prstGeom>
+          <a:solidFill>
+            <a:srgbClr val="F1F5F9"/>
+          </a:solidFill>
+          <a:ln w="12700">
+            <a:solidFill>
+              <a:srgbClr val="D8E0EA"/>
+            </a:solidFill>
+            <a:prstDash val="solid"/>
+          </a:ln>
+        </p:spPr>
+      </p:sp>
+      <p:sp>
+        <p:nvSpPr>
+          <p:cNvPr id="11" name="Text 9"/>
+          <p:cNvSpPr/>
+          <p:nvPr/>
+        </p:nvSpPr>
+        <p:spPr>
+          <a:xfrm>
+            <a:off x="3712464" y="2121408"/>
+            <a:ext cx="402336" cy="402336"/>
+          </a:xfrm>
+          <a:prstGeom prst="rect">
+            <a:avLst/>
+          </a:prstGeom>
+          <a:solidFill>
+            <a:srgbClr val="2563EB"/>
+          </a:solidFill>
+          <a:ln/>
+        </p:spPr>
+        <p:txBody>
+          <a:bodyPr wrap="square" lIns="0" tIns="0" rIns="0" bIns="0" rtlCol="0" anchor="ctr"/>
+          <a:lstStyle/>
+          <a:p>
+            <a:pPr algn="ctr" indent="0" marL="0">
+              <a:buNone/>
+            </a:pPr>
+            <a:r>
+              <a:rPr lang="en-US" sz="1700" b="1" dirty="0">
+                <a:solidFill>
+                  <a:srgbClr val="FFFFFF"/>
+                </a:solidFill>
+                <a:latin typeface="Noto Sans SC" pitchFamily="34" charset="0"/>
+                <a:ea typeface="Noto Sans SC" pitchFamily="34" charset="-122"/>
+                <a:cs typeface="Noto Sans SC" pitchFamily="34" charset="-120"/>
+              </a:rPr>
+              <a:t>2</a:t>
+            </a:r>
+            <a:endParaRPr lang="en-US" sz="1700" dirty="0"/>
+          </a:p>
+        </p:txBody>
+      </p:sp>
+      <p:sp>
+        <p:nvSpPr>
+          <p:cNvPr id="12" name="Text 10"/>
+          <p:cNvSpPr/>
+          <p:nvPr/>
+        </p:nvSpPr>
+        <p:spPr>
+          <a:xfrm>
+            <a:off x="3767328" y="2743200"/>
+            <a:ext cx="1920240" cy="301752"/>
+          </a:xfrm>
+          <a:prstGeom prst="rect">
+            <a:avLst/>
+          </a:prstGeom>
+          <a:noFill/>
+          <a:ln/>
+        </p:spPr>
+        <p:txBody>
+          <a:bodyPr wrap="square" lIns="0" tIns="0" rIns="0" bIns="0" rtlCol="0" anchor="ctr"/>
+          <a:lstStyle/>
+          <a:p>
+            <a:pPr indent="0" marL="0">
+              <a:buNone/>
+            </a:pPr>
+            <a:r>
+              <a:rPr lang="en-US" sz="1800" b="1" dirty="0">
+                <a:solidFill>
+                  <a:srgbClr val="232B38"/>
+                </a:solidFill>
+                <a:latin typeface="Noto Sans SC" pitchFamily="34" charset="0"/>
+                <a:ea typeface="Noto Sans SC" pitchFamily="34" charset="-122"/>
+                <a:cs typeface="Noto Sans SC" pitchFamily="34" charset="-120"/>
+              </a:rPr>
+              <a:t>缺失处理</a:t>
+            </a:r>
+            <a:endParaRPr lang="en-US" sz="1800" dirty="0"/>
+          </a:p>
+        </p:txBody>
+      </p:sp>
+      <p:sp>
+        <p:nvSpPr>
+          <p:cNvPr id="13" name="Text 11"/>
+          <p:cNvSpPr/>
+          <p:nvPr/>
+        </p:nvSpPr>
+        <p:spPr>
+          <a:xfrm>
+            <a:off x="3767328" y="3246120"/>
+            <a:ext cx="1938528" cy="749808"/>
           </a:xfrm>
           <a:prstGeom prst="rect">
             <a:avLst/>
@@ -4320,40 +4749,211 @@
               <a:buNone/>
             </a:pPr>
             <a:r>
-              <a:rPr lang="en-US" sz="1500" dirty="0">
-                <a:solidFill>
-                  <a:srgbClr val="232B38"/>
-                </a:solidFill>
-                <a:latin typeface="Noto Sans SC" pitchFamily="34" charset="0"/>
-                <a:ea typeface="Noto Sans SC" pitchFamily="34" charset="-122"/>
-                <a:cs typeface="Noto Sans SC" pitchFamily="34" charset="-120"/>
-              </a:rPr>
-              <a:t>Elo 与客观测试存在评估鸿沟</a:t>
-            </a:r>
-            <a:endParaRPr lang="en-US" sz="1500" dirty="0"/>
-          </a:p>
-        </p:txBody>
-      </p:sp>
-      <p:sp>
-        <p:nvSpPr>
-          <p:cNvPr id="10" name="Shape 7"/>
-          <p:cNvSpPr/>
-          <p:nvPr/>
-        </p:nvSpPr>
-        <p:spPr>
-          <a:xfrm>
-            <a:off x="8732520" y="2843784"/>
-            <a:ext cx="118872" cy="118872"/>
-          </a:xfrm>
-          <a:prstGeom prst="ellipse">
+              <a:rPr lang="en-US" sz="1320" dirty="0">
+                <a:solidFill>
+                  <a:srgbClr val="64748B"/>
+                </a:solidFill>
+                <a:latin typeface="Noto Sans SC" pitchFamily="34" charset="0"/>
+                <a:ea typeface="Noto Sans SC" pitchFamily="34" charset="-122"/>
+                <a:cs typeface="Noto Sans SC" pitchFamily="34" charset="-120"/>
+              </a:rPr>
+              <a:t>保留观测标记；对 Elo、速度、延迟等缺失值用同系列均值和 KNN 插补。</a:t>
+            </a:r>
+            <a:endParaRPr lang="en-US" sz="1320" dirty="0"/>
+          </a:p>
+        </p:txBody>
+      </p:sp>
+      <p:sp>
+        <p:nvSpPr>
+          <p:cNvPr id="14" name="Shape 12"/>
+          <p:cNvSpPr/>
+          <p:nvPr/>
+        </p:nvSpPr>
+        <p:spPr>
+          <a:xfrm>
+            <a:off x="6035040" y="3063240"/>
+            <a:ext cx="347472" cy="347472"/>
+          </a:xfrm>
+          <a:prstGeom prst="chevron">
+            <a:avLst/>
+          </a:prstGeom>
+          <a:solidFill>
+            <a:srgbClr val="EA580C"/>
+          </a:solidFill>
+          <a:ln w="12700">
+            <a:solidFill>
+              <a:srgbClr val="EA580C"/>
+            </a:solidFill>
+            <a:prstDash val="solid"/>
+          </a:ln>
+        </p:spPr>
+      </p:sp>
+      <p:sp>
+        <p:nvSpPr>
+          <p:cNvPr id="15" name="Shape 13"/>
+          <p:cNvSpPr/>
+          <p:nvPr/>
+        </p:nvSpPr>
+        <p:spPr>
+          <a:xfrm>
+            <a:off x="6364224" y="1874520"/>
+            <a:ext cx="2450592" cy="2651760"/>
+          </a:xfrm>
+          <a:prstGeom prst="rect">
+            <a:avLst/>
+          </a:prstGeom>
+          <a:solidFill>
+            <a:srgbClr val="ECFDF5"/>
+          </a:solidFill>
+          <a:ln w="12700">
+            <a:solidFill>
+              <a:srgbClr val="D8E0EA"/>
+            </a:solidFill>
+            <a:prstDash val="solid"/>
+          </a:ln>
+        </p:spPr>
+      </p:sp>
+      <p:sp>
+        <p:nvSpPr>
+          <p:cNvPr id="16" name="Text 14"/>
+          <p:cNvSpPr/>
+          <p:nvPr/>
+        </p:nvSpPr>
+        <p:spPr>
+          <a:xfrm>
+            <a:off x="6565392" y="2121408"/>
+            <a:ext cx="402336" cy="402336"/>
+          </a:xfrm>
+          <a:prstGeom prst="rect">
             <a:avLst/>
           </a:prstGeom>
           <a:solidFill>
             <a:srgbClr val="0F766E"/>
           </a:solidFill>
+          <a:ln/>
+        </p:spPr>
+        <p:txBody>
+          <a:bodyPr wrap="square" lIns="0" tIns="0" rIns="0" bIns="0" rtlCol="0" anchor="ctr"/>
+          <a:lstStyle/>
+          <a:p>
+            <a:pPr algn="ctr" indent="0" marL="0">
+              <a:buNone/>
+            </a:pPr>
+            <a:r>
+              <a:rPr lang="en-US" sz="1700" b="1" dirty="0">
+                <a:solidFill>
+                  <a:srgbClr val="FFFFFF"/>
+                </a:solidFill>
+                <a:latin typeface="Noto Sans SC" pitchFamily="34" charset="0"/>
+                <a:ea typeface="Noto Sans SC" pitchFamily="34" charset="-122"/>
+                <a:cs typeface="Noto Sans SC" pitchFamily="34" charset="-120"/>
+              </a:rPr>
+              <a:t>3</a:t>
+            </a:r>
+            <a:endParaRPr lang="en-US" sz="1700" dirty="0"/>
+          </a:p>
+        </p:txBody>
+      </p:sp>
+      <p:sp>
+        <p:nvSpPr>
+          <p:cNvPr id="17" name="Text 15"/>
+          <p:cNvSpPr/>
+          <p:nvPr/>
+        </p:nvSpPr>
+        <p:spPr>
+          <a:xfrm>
+            <a:off x="6620256" y="2743200"/>
+            <a:ext cx="1920240" cy="301752"/>
+          </a:xfrm>
+          <a:prstGeom prst="rect">
+            <a:avLst/>
+          </a:prstGeom>
+          <a:noFill/>
+          <a:ln/>
+        </p:spPr>
+        <p:txBody>
+          <a:bodyPr wrap="square" lIns="0" tIns="0" rIns="0" bIns="0" rtlCol="0" anchor="ctr"/>
+          <a:lstStyle/>
+          <a:p>
+            <a:pPr indent="0" marL="0">
+              <a:buNone/>
+            </a:pPr>
+            <a:r>
+              <a:rPr lang="en-US" sz="1800" b="1" dirty="0">
+                <a:solidFill>
+                  <a:srgbClr val="232B38"/>
+                </a:solidFill>
+                <a:latin typeface="Noto Sans SC" pitchFamily="34" charset="0"/>
+                <a:ea typeface="Noto Sans SC" pitchFamily="34" charset="-122"/>
+                <a:cs typeface="Noto Sans SC" pitchFamily="34" charset="-120"/>
+              </a:rPr>
+              <a:t>归一化</a:t>
+            </a:r>
+            <a:endParaRPr lang="en-US" sz="1800" dirty="0"/>
+          </a:p>
+        </p:txBody>
+      </p:sp>
+      <p:sp>
+        <p:nvSpPr>
+          <p:cNvPr id="18" name="Text 16"/>
+          <p:cNvSpPr/>
+          <p:nvPr/>
+        </p:nvSpPr>
+        <p:spPr>
+          <a:xfrm>
+            <a:off x="6620256" y="3246120"/>
+            <a:ext cx="1938528" cy="749808"/>
+          </a:xfrm>
+          <a:prstGeom prst="rect">
+            <a:avLst/>
+          </a:prstGeom>
+          <a:noFill/>
+          <a:ln/>
+        </p:spPr>
+        <p:txBody>
+          <a:bodyPr wrap="square" lIns="0" tIns="0" rIns="0" bIns="0" rtlCol="0" anchor="ctr">
+            <a:normAutofit/>
+          </a:bodyPr>
+          <a:lstStyle/>
+          <a:p>
+            <a:pPr indent="0" marL="0">
+              <a:buNone/>
+            </a:pPr>
+            <a:r>
+              <a:rPr lang="en-US" sz="1320" dirty="0">
+                <a:solidFill>
+                  <a:srgbClr val="64748B"/>
+                </a:solidFill>
+                <a:latin typeface="Noto Sans SC" pitchFamily="34" charset="0"/>
+                <a:ea typeface="Noto Sans SC" pitchFamily="34" charset="-122"/>
+                <a:cs typeface="Noto Sans SC" pitchFamily="34" charset="-120"/>
+              </a:rPr>
+              <a:t>将 MMLU、GPQA、IFEval 等不同量纲投射到统一尺度，避免视觉权重失真。</a:t>
+            </a:r>
+            <a:endParaRPr lang="en-US" sz="1320" dirty="0"/>
+          </a:p>
+        </p:txBody>
+      </p:sp>
+      <p:sp>
+        <p:nvSpPr>
+          <p:cNvPr id="19" name="Shape 17"/>
+          <p:cNvSpPr/>
+          <p:nvPr/>
+        </p:nvSpPr>
+        <p:spPr>
+          <a:xfrm>
+            <a:off x="8887968" y="3063240"/>
+            <a:ext cx="347472" cy="347472"/>
+          </a:xfrm>
+          <a:prstGeom prst="chevron">
+            <a:avLst/>
+          </a:prstGeom>
+          <a:solidFill>
+            <a:srgbClr val="EA580C"/>
+          </a:solidFill>
           <a:ln w="12700">
             <a:solidFill>
-              <a:srgbClr val="0F766E"/>
+              <a:srgbClr val="EA580C"/>
             </a:solidFill>
             <a:prstDash val="solid"/>
           </a:ln>
@@ -4361,14 +4961,119 @@
       </p:sp>
       <p:sp>
         <p:nvSpPr>
-          <p:cNvPr id="11" name="Text 8"/>
-          <p:cNvSpPr/>
-          <p:nvPr/>
-        </p:nvSpPr>
-        <p:spPr>
-          <a:xfrm>
-            <a:off x="8951976" y="2770632"/>
-            <a:ext cx="2286000" cy="310896"/>
+          <p:cNvPr id="20" name="Shape 18"/>
+          <p:cNvSpPr/>
+          <p:nvPr/>
+        </p:nvSpPr>
+        <p:spPr>
+          <a:xfrm>
+            <a:off x="9217152" y="1874520"/>
+            <a:ext cx="2450592" cy="2651760"/>
+          </a:xfrm>
+          <a:prstGeom prst="rect">
+            <a:avLst/>
+          </a:prstGeom>
+          <a:solidFill>
+            <a:srgbClr val="F1F5F9"/>
+          </a:solidFill>
+          <a:ln w="12700">
+            <a:solidFill>
+              <a:srgbClr val="D8E0EA"/>
+            </a:solidFill>
+            <a:prstDash val="solid"/>
+          </a:ln>
+        </p:spPr>
+      </p:sp>
+      <p:sp>
+        <p:nvSpPr>
+          <p:cNvPr id="21" name="Text 19"/>
+          <p:cNvSpPr/>
+          <p:nvPr/>
+        </p:nvSpPr>
+        <p:spPr>
+          <a:xfrm>
+            <a:off x="9418320" y="2121408"/>
+            <a:ext cx="402336" cy="402336"/>
+          </a:xfrm>
+          <a:prstGeom prst="rect">
+            <a:avLst/>
+          </a:prstGeom>
+          <a:solidFill>
+            <a:srgbClr val="2563EB"/>
+          </a:solidFill>
+          <a:ln/>
+        </p:spPr>
+        <p:txBody>
+          <a:bodyPr wrap="square" lIns="0" tIns="0" rIns="0" bIns="0" rtlCol="0" anchor="ctr"/>
+          <a:lstStyle/>
+          <a:p>
+            <a:pPr algn="ctr" indent="0" marL="0">
+              <a:buNone/>
+            </a:pPr>
+            <a:r>
+              <a:rPr lang="en-US" sz="1700" b="1" dirty="0">
+                <a:solidFill>
+                  <a:srgbClr val="FFFFFF"/>
+                </a:solidFill>
+                <a:latin typeface="Noto Sans SC" pitchFamily="34" charset="0"/>
+                <a:ea typeface="Noto Sans SC" pitchFamily="34" charset="-122"/>
+                <a:cs typeface="Noto Sans SC" pitchFamily="34" charset="-120"/>
+              </a:rPr>
+              <a:t>4</a:t>
+            </a:r>
+            <a:endParaRPr lang="en-US" sz="1700" dirty="0"/>
+          </a:p>
+        </p:txBody>
+      </p:sp>
+      <p:sp>
+        <p:nvSpPr>
+          <p:cNvPr id="22" name="Text 20"/>
+          <p:cNvSpPr/>
+          <p:nvPr/>
+        </p:nvSpPr>
+        <p:spPr>
+          <a:xfrm>
+            <a:off x="9473184" y="2743200"/>
+            <a:ext cx="1920240" cy="301752"/>
+          </a:xfrm>
+          <a:prstGeom prst="rect">
+            <a:avLst/>
+          </a:prstGeom>
+          <a:noFill/>
+          <a:ln/>
+        </p:spPr>
+        <p:txBody>
+          <a:bodyPr wrap="square" lIns="0" tIns="0" rIns="0" bIns="0" rtlCol="0" anchor="ctr"/>
+          <a:lstStyle/>
+          <a:p>
+            <a:pPr indent="0" marL="0">
+              <a:buNone/>
+            </a:pPr>
+            <a:r>
+              <a:rPr lang="en-US" sz="1800" b="1" dirty="0">
+                <a:solidFill>
+                  <a:srgbClr val="232B38"/>
+                </a:solidFill>
+                <a:latin typeface="Noto Sans SC" pitchFamily="34" charset="0"/>
+                <a:ea typeface="Noto Sans SC" pitchFamily="34" charset="-122"/>
+                <a:cs typeface="Noto Sans SC" pitchFamily="34" charset="-120"/>
+              </a:rPr>
+              <a:t>复合指标</a:t>
+            </a:r>
+            <a:endParaRPr lang="en-US" sz="1800" dirty="0"/>
+          </a:p>
+        </p:txBody>
+      </p:sp>
+      <p:sp>
+        <p:nvSpPr>
+          <p:cNvPr id="23" name="Text 21"/>
+          <p:cNvSpPr/>
+          <p:nvPr/>
+        </p:nvSpPr>
+        <p:spPr>
+          <a:xfrm>
+            <a:off x="9473184" y="3246120"/>
+            <a:ext cx="1938528" cy="749808"/>
           </a:xfrm>
           <a:prstGeom prst="rect">
             <a:avLst/>
@@ -4386,96 +5091,30 @@
               <a:buNone/>
             </a:pPr>
             <a:r>
-              <a:rPr lang="en-US" sz="1500" dirty="0">
-                <a:solidFill>
-                  <a:srgbClr val="232B38"/>
-                </a:solidFill>
-                <a:latin typeface="Noto Sans SC" pitchFamily="34" charset="0"/>
-                <a:ea typeface="Noto Sans SC" pitchFamily="34" charset="-122"/>
-                <a:cs typeface="Noto Sans SC" pitchFamily="34" charset="-120"/>
-              </a:rPr>
-              <a:t>指令遵循更贴近日常体验</a:t>
-            </a:r>
-            <a:endParaRPr lang="en-US" sz="1500" dirty="0"/>
-          </a:p>
-        </p:txBody>
-      </p:sp>
-      <p:sp>
-        <p:nvSpPr>
-          <p:cNvPr id="12" name="Shape 9"/>
-          <p:cNvSpPr/>
-          <p:nvPr/>
-        </p:nvSpPr>
-        <p:spPr>
-          <a:xfrm>
-            <a:off x="8732520" y="3374136"/>
-            <a:ext cx="118872" cy="118872"/>
-          </a:xfrm>
-          <a:prstGeom prst="ellipse">
-            <a:avLst/>
-          </a:prstGeom>
-          <a:solidFill>
-            <a:srgbClr val="0F766E"/>
-          </a:solidFill>
-          <a:ln w="12700">
-            <a:solidFill>
-              <a:srgbClr val="0F766E"/>
-            </a:solidFill>
-            <a:prstDash val="solid"/>
-          </a:ln>
-        </p:spPr>
-      </p:sp>
-      <p:sp>
-        <p:nvSpPr>
-          <p:cNvPr id="13" name="Text 10"/>
-          <p:cNvSpPr/>
-          <p:nvPr/>
-        </p:nvSpPr>
-        <p:spPr>
-          <a:xfrm>
-            <a:off x="8951976" y="3300984"/>
-            <a:ext cx="2286000" cy="310896"/>
-          </a:xfrm>
-          <a:prstGeom prst="rect">
-            <a:avLst/>
-          </a:prstGeom>
-          <a:noFill/>
-          <a:ln/>
-        </p:spPr>
-        <p:txBody>
-          <a:bodyPr wrap="square" lIns="0" tIns="0" rIns="0" bIns="0" rtlCol="0" anchor="ctr">
-            <a:normAutofit/>
-          </a:bodyPr>
-          <a:lstStyle/>
-          <a:p>
-            <a:pPr indent="0" marL="0">
-              <a:buNone/>
-            </a:pPr>
-            <a:r>
-              <a:rPr lang="en-US" sz="1500" dirty="0">
-                <a:solidFill>
-                  <a:srgbClr val="232B38"/>
-                </a:solidFill>
-                <a:latin typeface="Noto Sans SC" pitchFamily="34" charset="0"/>
-                <a:ea typeface="Noto Sans SC" pitchFamily="34" charset="-122"/>
-                <a:cs typeface="Noto Sans SC" pitchFamily="34" charset="-120"/>
-              </a:rPr>
-              <a:t>延迟指标解释部署体验损耗</a:t>
-            </a:r>
-            <a:endParaRPr lang="en-US" sz="1500" dirty="0"/>
-          </a:p>
-        </p:txBody>
-      </p:sp>
-      <p:sp>
-        <p:nvSpPr>
-          <p:cNvPr id="14" name="Text 11"/>
-          <p:cNvSpPr/>
-          <p:nvPr/>
-        </p:nvSpPr>
-        <p:spPr>
-          <a:xfrm>
-            <a:off x="502920" y="6528816"/>
-            <a:ext cx="10972800" cy="164592"/>
+              <a:rPr lang="en-US" sz="1320" dirty="0">
+                <a:solidFill>
+                  <a:srgbClr val="64748B"/>
+                </a:solidFill>
+                <a:latin typeface="Noto Sans SC" pitchFamily="34" charset="0"/>
+                <a:ea typeface="Noto Sans SC" pitchFamily="34" charset="-122"/>
+                <a:cs typeface="Noto Sans SC" pitchFamily="34" charset="-120"/>
+              </a:rPr>
+              <a:t>构造 Average_Score、Composite_Score、Hardware_Pareto_Index，服务图表排序与筛选。</a:t>
+            </a:r>
+            <a:endParaRPr lang="en-US" sz="1320" dirty="0"/>
+          </a:p>
+        </p:txBody>
+      </p:sp>
+      <p:sp>
+        <p:nvSpPr>
+          <p:cNvPr id="24" name="Text 22"/>
+          <p:cNvSpPr/>
+          <p:nvPr/>
+        </p:nvSpPr>
+        <p:spPr>
+          <a:xfrm>
+            <a:off x="1005840" y="5413248"/>
+            <a:ext cx="10149840" cy="347472"/>
           </a:xfrm>
           <a:prstGeom prst="rect">
             <a:avLst/>
@@ -4487,6 +5126,45 @@
           <a:bodyPr wrap="square" lIns="0" tIns="0" rIns="0" bIns="0" rtlCol="0" anchor="ctr"/>
           <a:lstStyle/>
           <a:p>
+            <a:pPr algn="ctr" indent="0" marL="0">
+              <a:buNone/>
+            </a:pPr>
+            <a:r>
+              <a:rPr lang="en-US" sz="1600" b="1" dirty="0">
+                <a:solidFill>
+                  <a:srgbClr val="0F766E"/>
+                </a:solidFill>
+                <a:latin typeface="Noto Sans SC" pitchFamily="34" charset="0"/>
+                <a:ea typeface="Noto Sans SC" pitchFamily="34" charset="-122"/>
+                <a:cs typeface="Noto Sans SC" pitchFamily="34" charset="-120"/>
+              </a:rPr>
+              <a:t>课程重点：所有图表都不是装饰，而是建立在清洗、变换和指标构造之后的分析表达。</a:t>
+            </a:r>
+            <a:endParaRPr lang="en-US" sz="1600" dirty="0"/>
+          </a:p>
+        </p:txBody>
+      </p:sp>
+      <p:sp>
+        <p:nvSpPr>
+          <p:cNvPr id="25" name="Text 23"/>
+          <p:cNvSpPr/>
+          <p:nvPr/>
+        </p:nvSpPr>
+        <p:spPr>
+          <a:xfrm>
+            <a:off x="502920" y="6519672"/>
+            <a:ext cx="10972800" cy="146304"/>
+          </a:xfrm>
+          <a:prstGeom prst="rect">
+            <a:avLst/>
+          </a:prstGeom>
+          <a:noFill/>
+          <a:ln/>
+        </p:spPr>
+        <p:txBody>
+          <a:bodyPr wrap="square" lIns="0" tIns="0" rIns="0" bIns="0" rtlCol="0" anchor="ctr"/>
+          <a:lstStyle/>
+          <a:p>
             <a:pPr indent="0" marL="0">
               <a:buNone/>
             </a:pPr>
@@ -4499,7 +5177,7 @@
                 <a:ea typeface="Noto Sans SC" pitchFamily="34" charset="-122"/>
                 <a:cs typeface="Noto Sans SC" pitchFamily="34" charset="-120"/>
               </a:rPr>
-              <a:t>开源大模型性能演进可视化分析 · 6</a:t>
+              <a:t>主流大模型数据可视化分析 · 4</a:t>
             </a:r>
             <a:endParaRPr lang="en-US" sz="850" dirty="0"/>
           </a:p>
@@ -4513,16 +5191,9 @@
 </p:sld>
 </file>
 
-<file path=ppt/slides/slide7.xml><?xml version="1.0" encoding="utf-8"?>
+<file path=ppt/slides/slide5.xml><?xml version="1.0" encoding="utf-8"?>
 <p:sld xmlns:a="http://schemas.openxmlformats.org/drawingml/2006/main" xmlns:r="http://schemas.openxmlformats.org/officeDocument/2006/relationships" xmlns:p="http://schemas.openxmlformats.org/presentationml/2006/main">
-  <p:cSld name="Slide 7">
-    <p:bg>
-      <p:bgPr>
-        <a:solidFill>
-          <a:srgbClr val="FFFFFF"/>
-        </a:solidFill>
-      </p:bgPr>
-    </p:bg>
+  <p:cSld name="Slide 5">
     <p:spTree>
       <p:nvGrpSpPr>
         <p:cNvPr id="1" name=""/>
@@ -4545,8 +5216,8 @@
         </p:nvSpPr>
         <p:spPr>
           <a:xfrm>
-            <a:off x="502920" y="292608"/>
-            <a:ext cx="10972800" cy="256032"/>
+            <a:off x="502920" y="256032"/>
+            <a:ext cx="10972800" cy="228600"/>
           </a:xfrm>
           <a:prstGeom prst="rect">
             <a:avLst/>
@@ -4562,7 +5233,7 @@
               <a:buNone/>
             </a:pPr>
             <a:r>
-              <a:rPr lang="en-US" sz="1100" b="1" dirty="0">
+              <a:rPr lang="en-US" sz="1050" b="1" dirty="0">
                 <a:solidFill>
                   <a:srgbClr val="0F766E"/>
                 </a:solidFill>
@@ -4572,7 +5243,7 @@
               </a:rPr>
               <a:t>数据处理与可视化课程项目</a:t>
             </a:r>
-            <a:endParaRPr lang="en-US" sz="1100" dirty="0"/>
+            <a:endParaRPr lang="en-US" sz="1050" dirty="0"/>
           </a:p>
         </p:txBody>
       </p:sp>
@@ -4584,8 +5255,8 @@
         </p:nvSpPr>
         <p:spPr>
           <a:xfrm>
-            <a:off x="502920" y="621792"/>
-            <a:ext cx="10972800" cy="512064"/>
+            <a:off x="502920" y="576072"/>
+            <a:ext cx="10972800" cy="502920"/>
           </a:xfrm>
           <a:prstGeom prst="rect">
             <a:avLst/>
@@ -4603,7 +5274,7 @@
               <a:buNone/>
             </a:pPr>
             <a:r>
-              <a:rPr lang="en-US" sz="2400" b="1" dirty="0">
+              <a:rPr lang="en-US" sz="2300" b="1" dirty="0">
                 <a:solidFill>
                   <a:srgbClr val="232B38"/>
                 </a:solidFill>
@@ -4611,9 +5282,9 @@
                 <a:ea typeface="Noto Sans SC" pitchFamily="34" charset="-122"/>
                 <a:cs typeface="Noto Sans SC" pitchFamily="34" charset="-120"/>
               </a:rPr>
-              <a:t>课堂结论：从刷榜到可部署能力</a:t>
-            </a:r>
-            <a:endParaRPr lang="en-US" sz="2400" dirty="0"/>
+              <a:t>横向比较：主流模型能力气泡图</a:t>
+            </a:r>
+            <a:endParaRPr lang="en-US" sz="2300" dirty="0"/>
           </a:p>
         </p:txBody>
       </p:sp>
@@ -4625,7 +5296,7 @@
         </p:nvSpPr>
         <p:spPr>
           <a:xfrm>
-            <a:off x="502920" y="1225296"/>
+            <a:off x="502920" y="1161288"/>
             <a:ext cx="11155680" cy="0"/>
           </a:xfrm>
           <a:prstGeom prst="line">
@@ -4640,121 +5311,40 @@
           </a:ln>
         </p:spPr>
       </p:sp>
-      <p:sp>
-        <p:nvSpPr>
-          <p:cNvPr id="5" name="Shape 3"/>
-          <p:cNvSpPr/>
-          <p:nvPr/>
-        </p:nvSpPr>
-        <p:spPr>
-          <a:xfrm>
-            <a:off x="822960" y="1508760"/>
-            <a:ext cx="10287000" cy="713232"/>
-          </a:xfrm>
-          <a:prstGeom prst="rect">
-            <a:avLst/>
-          </a:prstGeom>
-          <a:solidFill>
-            <a:srgbClr val="ECFDF5"/>
-          </a:solidFill>
-          <a:ln w="12700">
-            <a:solidFill>
-              <a:srgbClr val="D8E0EA"/>
-            </a:solidFill>
-            <a:prstDash val="solid"/>
-          </a:ln>
-        </p:spPr>
-      </p:sp>
-      <p:sp>
-        <p:nvSpPr>
-          <p:cNvPr id="6" name="Text 4"/>
-          <p:cNvSpPr/>
-          <p:nvPr/>
-        </p:nvSpPr>
-        <p:spPr>
-          <a:xfrm>
-            <a:off x="1078992" y="1673352"/>
-            <a:ext cx="1417320" cy="228600"/>
-          </a:xfrm>
-          <a:prstGeom prst="rect">
-            <a:avLst/>
-          </a:prstGeom>
-          <a:noFill/>
-          <a:ln/>
-        </p:spPr>
-        <p:txBody>
-          <a:bodyPr wrap="square" lIns="0" tIns="0" rIns="0" bIns="0" rtlCol="0" anchor="ctr"/>
-          <a:lstStyle/>
-          <a:p>
-            <a:pPr indent="0" marL="0">
-              <a:buNone/>
-            </a:pPr>
-            <a:r>
-              <a:rPr lang="en-US" sz="1600" b="1" dirty="0">
-                <a:solidFill>
-                  <a:srgbClr val="0F766E"/>
-                </a:solidFill>
-                <a:latin typeface="Noto Sans SC" pitchFamily="34" charset="0"/>
-                <a:ea typeface="Noto Sans SC" pitchFamily="34" charset="-122"/>
-                <a:cs typeface="Noto Sans SC" pitchFamily="34" charset="-120"/>
-              </a:rPr>
-              <a:t>能力密度</a:t>
-            </a:r>
-            <a:endParaRPr lang="en-US" sz="1600" dirty="0"/>
-          </a:p>
-        </p:txBody>
-      </p:sp>
-      <p:sp>
-        <p:nvSpPr>
-          <p:cNvPr id="7" name="Text 5"/>
-          <p:cNvSpPr/>
-          <p:nvPr/>
-        </p:nvSpPr>
-        <p:spPr>
-          <a:xfrm>
-            <a:off x="2514600" y="1673352"/>
-            <a:ext cx="8092440" cy="301752"/>
-          </a:xfrm>
-          <a:prstGeom prst="rect">
-            <a:avLst/>
-          </a:prstGeom>
-          <a:noFill/>
-          <a:ln/>
-        </p:spPr>
-        <p:txBody>
-          <a:bodyPr wrap="square" lIns="0" tIns="0" rIns="0" bIns="0" rtlCol="0" anchor="ctr">
-            <a:normAutofit/>
-          </a:bodyPr>
-          <a:lstStyle/>
-          <a:p>
-            <a:pPr indent="0" marL="0">
-              <a:buNone/>
-            </a:pPr>
-            <a:r>
-              <a:rPr lang="en-US" sz="1550" dirty="0">
-                <a:solidFill>
-                  <a:srgbClr val="232B38"/>
-                </a:solidFill>
-                <a:latin typeface="Noto Sans SC" pitchFamily="34" charset="0"/>
-                <a:ea typeface="Noto Sans SC" pitchFamily="34" charset="-122"/>
-                <a:cs typeface="Noto Sans SC" pitchFamily="34" charset="-120"/>
-              </a:rPr>
-              <a:t>高质量数据微调让 7B-9B 模型逼近更大模型的可用体验。</a:t>
-            </a:r>
-            <a:endParaRPr lang="en-US" sz="1550" dirty="0"/>
-          </a:p>
-        </p:txBody>
-      </p:sp>
-      <p:sp>
-        <p:nvSpPr>
-          <p:cNvPr id="8" name="Shape 6"/>
-          <p:cNvSpPr/>
-          <p:nvPr/>
-        </p:nvSpPr>
-        <p:spPr>
-          <a:xfrm>
-            <a:off x="822960" y="2560320"/>
-            <a:ext cx="10287000" cy="713232"/>
+      <p:pic>
+        <p:nvPicPr>
+          <p:cNvPr id="5" name="Image 0" descr="C:\Users\HBZuo\Desktop\wrokmean\数据可视化\dashboard\assets\figures\01_landscape_bubble.png">    </p:cNvPr>
+          <p:cNvPicPr>
+            <a:picLocks noChangeAspect="1"/>
+          </p:cNvPicPr>
+          <p:nvPr/>
+        </p:nvPicPr>
+        <p:blipFill>
+          <a:blip r:embed="rId1"/>
+          <a:stretch>
+            <a:fillRect/>
+          </a:stretch>
+        </p:blipFill>
+        <p:spPr>
+          <a:xfrm>
+            <a:off x="502920" y="1417320"/>
+            <a:ext cx="7040880" cy="4407408"/>
+          </a:xfrm>
+          <a:prstGeom prst="rect">
+            <a:avLst/>
+          </a:prstGeom>
+        </p:spPr>
+      </p:pic>
+      <p:sp>
+        <p:nvSpPr>
+          <p:cNvPr id="6" name="Shape 3"/>
+          <p:cNvSpPr/>
+          <p:nvPr/>
+        </p:nvSpPr>
+        <p:spPr>
+          <a:xfrm>
+            <a:off x="7882128" y="1417320"/>
+            <a:ext cx="3291840" cy="1243584"/>
           </a:xfrm>
           <a:prstGeom prst="rect">
             <a:avLst/>
@@ -4772,14 +5362,14 @@
       </p:sp>
       <p:sp>
         <p:nvSpPr>
-          <p:cNvPr id="9" name="Text 7"/>
-          <p:cNvSpPr/>
-          <p:nvPr/>
-        </p:nvSpPr>
-        <p:spPr>
-          <a:xfrm>
-            <a:off x="1078992" y="2724912"/>
-            <a:ext cx="1417320" cy="228600"/>
+          <p:cNvPr id="7" name="Text 4"/>
+          <p:cNvSpPr/>
+          <p:nvPr/>
+        </p:nvSpPr>
+        <p:spPr>
+          <a:xfrm>
+            <a:off x="8083296" y="1600200"/>
+            <a:ext cx="2889504" cy="237744"/>
           </a:xfrm>
           <a:prstGeom prst="rect">
             <a:avLst/>
@@ -4795,7 +5385,7 @@
               <a:buNone/>
             </a:pPr>
             <a:r>
-              <a:rPr lang="en-US" sz="1600" b="1" dirty="0">
+              <a:rPr lang="en-US" sz="1300" b="1" dirty="0">
                 <a:solidFill>
                   <a:srgbClr val="2563EB"/>
                 </a:solidFill>
@@ -4803,22 +5393,22 @@
                 <a:ea typeface="Noto Sans SC" pitchFamily="34" charset="-122"/>
                 <a:cs typeface="Noto Sans SC" pitchFamily="34" charset="-120"/>
               </a:rPr>
-              <a:t>架构收敛</a:t>
-            </a:r>
-            <a:endParaRPr lang="en-US" sz="1600" dirty="0"/>
-          </a:p>
-        </p:txBody>
-      </p:sp>
-      <p:sp>
-        <p:nvSpPr>
-          <p:cNvPr id="10" name="Text 8"/>
-          <p:cNvSpPr/>
-          <p:nvPr/>
-        </p:nvSpPr>
-        <p:spPr>
-          <a:xfrm>
-            <a:off x="2514600" y="2724912"/>
-            <a:ext cx="8092440" cy="301752"/>
+              <a:t>图中看到了什么</a:t>
+            </a:r>
+            <a:endParaRPr lang="en-US" sz="1300" dirty="0"/>
+          </a:p>
+        </p:txBody>
+      </p:sp>
+      <p:sp>
+        <p:nvSpPr>
+          <p:cNvPr id="8" name="Text 5"/>
+          <p:cNvSpPr/>
+          <p:nvPr/>
+        </p:nvSpPr>
+        <p:spPr>
+          <a:xfrm>
+            <a:off x="8083296" y="1929384"/>
+            <a:ext cx="2889504" cy="585216"/>
           </a:xfrm>
           <a:prstGeom prst="rect">
             <a:avLst/>
@@ -4836,7 +5426,7 @@
               <a:buNone/>
             </a:pPr>
             <a:r>
-              <a:rPr lang="en-US" sz="1550" dirty="0">
+              <a:rPr lang="en-US" sz="1350" dirty="0">
                 <a:solidFill>
                   <a:srgbClr val="232B38"/>
                 </a:solidFill>
@@ -4844,127 +5434,22 @@
                 <a:ea typeface="Noto Sans SC" pitchFamily="34" charset="-122"/>
                 <a:cs typeface="Noto Sans SC" pitchFamily="34" charset="-120"/>
               </a:rPr>
-              <a:t>开源生态在 Llama/Qwen 等底座上进行二次开发，创新转向微调、蒸馏与融合。</a:t>
-            </a:r>
-            <a:endParaRPr lang="en-US" sz="1550" dirty="0"/>
-          </a:p>
-        </p:txBody>
-      </p:sp>
-      <p:sp>
-        <p:nvSpPr>
-          <p:cNvPr id="11" name="Shape 9"/>
-          <p:cNvSpPr/>
-          <p:nvPr/>
-        </p:nvSpPr>
-        <p:spPr>
-          <a:xfrm>
-            <a:off x="822960" y="3611880"/>
-            <a:ext cx="10287000" cy="713232"/>
-          </a:xfrm>
-          <a:prstGeom prst="rect">
-            <a:avLst/>
-          </a:prstGeom>
-          <a:solidFill>
-            <a:srgbClr val="ECFDF5"/>
-          </a:solidFill>
-          <a:ln w="12700">
-            <a:solidFill>
-              <a:srgbClr val="D8E0EA"/>
-            </a:solidFill>
-            <a:prstDash val="solid"/>
-          </a:ln>
-        </p:spPr>
-      </p:sp>
-      <p:sp>
-        <p:nvSpPr>
-          <p:cNvPr id="12" name="Text 10"/>
-          <p:cNvSpPr/>
-          <p:nvPr/>
-        </p:nvSpPr>
-        <p:spPr>
-          <a:xfrm>
-            <a:off x="1078992" y="3776472"/>
-            <a:ext cx="1417320" cy="228600"/>
-          </a:xfrm>
-          <a:prstGeom prst="rect">
-            <a:avLst/>
-          </a:prstGeom>
-          <a:noFill/>
-          <a:ln/>
-        </p:spPr>
-        <p:txBody>
-          <a:bodyPr wrap="square" lIns="0" tIns="0" rIns="0" bIns="0" rtlCol="0" anchor="ctr"/>
-          <a:lstStyle/>
-          <a:p>
-            <a:pPr indent="0" marL="0">
-              <a:buNone/>
-            </a:pPr>
-            <a:r>
-              <a:rPr lang="en-US" sz="1600" b="1" dirty="0">
-                <a:solidFill>
-                  <a:srgbClr val="0F766E"/>
-                </a:solidFill>
-                <a:latin typeface="Noto Sans SC" pitchFamily="34" charset="0"/>
-                <a:ea typeface="Noto Sans SC" pitchFamily="34" charset="-122"/>
-                <a:cs typeface="Noto Sans SC" pitchFamily="34" charset="-120"/>
-              </a:rPr>
-              <a:t>评估鸿沟</a:t>
-            </a:r>
-            <a:endParaRPr lang="en-US" sz="1600" dirty="0"/>
-          </a:p>
-        </p:txBody>
-      </p:sp>
-      <p:sp>
-        <p:nvSpPr>
-          <p:cNvPr id="13" name="Text 11"/>
-          <p:cNvSpPr/>
-          <p:nvPr/>
-        </p:nvSpPr>
-        <p:spPr>
-          <a:xfrm>
-            <a:off x="2514600" y="3776472"/>
-            <a:ext cx="8092440" cy="301752"/>
-          </a:xfrm>
-          <a:prstGeom prst="rect">
-            <a:avLst/>
-          </a:prstGeom>
-          <a:noFill/>
-          <a:ln/>
-        </p:spPr>
-        <p:txBody>
-          <a:bodyPr wrap="square" lIns="0" tIns="0" rIns="0" bIns="0" rtlCol="0" anchor="ctr">
-            <a:normAutofit/>
-          </a:bodyPr>
-          <a:lstStyle/>
-          <a:p>
-            <a:pPr indent="0" marL="0">
-              <a:buNone/>
-            </a:pPr>
-            <a:r>
-              <a:rPr lang="en-US" sz="1550" dirty="0">
-                <a:solidFill>
-                  <a:srgbClr val="232B38"/>
-                </a:solidFill>
-                <a:latin typeface="Noto Sans SC" pitchFamily="34" charset="0"/>
-                <a:ea typeface="Noto Sans SC" pitchFamily="34" charset="-122"/>
-                <a:cs typeface="Noto Sans SC" pitchFamily="34" charset="-120"/>
-              </a:rPr>
-              <a:t>客观基准与人类 Elo 并非完全一致，指令遵循与响应延迟更贴近日常使用。</a:t>
-            </a:r>
-            <a:endParaRPr lang="en-US" sz="1550" dirty="0"/>
-          </a:p>
-        </p:txBody>
-      </p:sp>
-      <p:sp>
-        <p:nvSpPr>
-          <p:cNvPr id="14" name="Shape 12"/>
-          <p:cNvSpPr/>
-          <p:nvPr/>
-        </p:nvSpPr>
-        <p:spPr>
-          <a:xfrm>
-            <a:off x="822960" y="4663440"/>
-            <a:ext cx="10287000" cy="713232"/>
+              <a:t>每个点是一个模型，位置展示参数量和综合能力，颜色区分开放权重与闭源 API。</a:t>
+            </a:r>
+            <a:endParaRPr lang="en-US" sz="1350" dirty="0"/>
+          </a:p>
+        </p:txBody>
+      </p:sp>
+      <p:sp>
+        <p:nvSpPr>
+          <p:cNvPr id="9" name="Shape 6"/>
+          <p:cNvSpPr/>
+          <p:nvPr/>
+        </p:nvSpPr>
+        <p:spPr>
+          <a:xfrm>
+            <a:off x="7882128" y="2834640"/>
+            <a:ext cx="3291840" cy="1417320"/>
           </a:xfrm>
           <a:prstGeom prst="rect">
             <a:avLst/>
@@ -4982,14 +5467,14 @@
       </p:sp>
       <p:sp>
         <p:nvSpPr>
-          <p:cNvPr id="15" name="Text 13"/>
-          <p:cNvSpPr/>
-          <p:nvPr/>
-        </p:nvSpPr>
-        <p:spPr>
-          <a:xfrm>
-            <a:off x="1078992" y="4828032"/>
-            <a:ext cx="1417320" cy="228600"/>
+          <p:cNvPr id="10" name="Text 7"/>
+          <p:cNvSpPr/>
+          <p:nvPr/>
+        </p:nvSpPr>
+        <p:spPr>
+          <a:xfrm>
+            <a:off x="8083296" y="3017520"/>
+            <a:ext cx="2889504" cy="237744"/>
           </a:xfrm>
           <a:prstGeom prst="rect">
             <a:avLst/>
@@ -5005,30 +5490,30 @@
               <a:buNone/>
             </a:pPr>
             <a:r>
-              <a:rPr lang="en-US" sz="1600" b="1" dirty="0">
-                <a:solidFill>
-                  <a:srgbClr val="2563EB"/>
-                </a:solidFill>
-                <a:latin typeface="Noto Sans SC" pitchFamily="34" charset="0"/>
-                <a:ea typeface="Noto Sans SC" pitchFamily="34" charset="-122"/>
-                <a:cs typeface="Noto Sans SC" pitchFamily="34" charset="-120"/>
-              </a:rPr>
-              <a:t>本地部署</a:t>
-            </a:r>
-            <a:endParaRPr lang="en-US" sz="1600" dirty="0"/>
-          </a:p>
-        </p:txBody>
-      </p:sp>
-      <p:sp>
-        <p:nvSpPr>
-          <p:cNvPr id="16" name="Text 14"/>
-          <p:cNvSpPr/>
-          <p:nvPr/>
-        </p:nvSpPr>
-        <p:spPr>
-          <a:xfrm>
-            <a:off x="2514600" y="4828032"/>
-            <a:ext cx="8092440" cy="301752"/>
+              <a:rPr lang="en-US" sz="1300" b="1" dirty="0">
+                <a:solidFill>
+                  <a:srgbClr val="0F766E"/>
+                </a:solidFill>
+                <a:latin typeface="Noto Sans SC" pitchFamily="34" charset="0"/>
+                <a:ea typeface="Noto Sans SC" pitchFamily="34" charset="-122"/>
+                <a:cs typeface="Noto Sans SC" pitchFamily="34" charset="-120"/>
+              </a:rPr>
+              <a:t>专业上说明什么</a:t>
+            </a:r>
+            <a:endParaRPr lang="en-US" sz="1300" dirty="0"/>
+          </a:p>
+        </p:txBody>
+      </p:sp>
+      <p:sp>
+        <p:nvSpPr>
+          <p:cNvPr id="11" name="Text 8"/>
+          <p:cNvSpPr/>
+          <p:nvPr/>
+        </p:nvSpPr>
+        <p:spPr>
+          <a:xfrm>
+            <a:off x="8083296" y="3346704"/>
+            <a:ext cx="2889504" cy="758952"/>
           </a:xfrm>
           <a:prstGeom prst="rect">
             <a:avLst/>
@@ -5046,7 +5531,7 @@
               <a:buNone/>
             </a:pPr>
             <a:r>
-              <a:rPr lang="en-US" sz="1550" dirty="0">
+              <a:rPr lang="en-US" sz="1350" dirty="0">
                 <a:solidFill>
                   <a:srgbClr val="232B38"/>
                 </a:solidFill>
@@ -5054,22 +5539,47 @@
                 <a:ea typeface="Noto Sans SC" pitchFamily="34" charset="-122"/>
                 <a:cs typeface="Noto Sans SC" pitchFamily="34" charset="-120"/>
               </a:rPr>
-              <a:t>高吞吐、低延迟的小模型降低端侧应用门槛，推动算力平民化。</a:t>
-            </a:r>
-            <a:endParaRPr lang="en-US" sz="1550" dirty="0"/>
-          </a:p>
-        </p:txBody>
-      </p:sp>
-      <p:sp>
-        <p:nvSpPr>
-          <p:cNvPr id="17" name="Text 15"/>
-          <p:cNvSpPr/>
-          <p:nvPr/>
-        </p:nvSpPr>
-        <p:spPr>
-          <a:xfrm>
-            <a:off x="502920" y="6528816"/>
-            <a:ext cx="10972800" cy="164592"/>
+              <a:t>这是多变量散点图：X/Y/颜色/大小共同表达模型规模、能力、人类偏好和开放性。</a:t>
+            </a:r>
+            <a:endParaRPr lang="en-US" sz="1350" dirty="0"/>
+          </a:p>
+        </p:txBody>
+      </p:sp>
+      <p:sp>
+        <p:nvSpPr>
+          <p:cNvPr id="12" name="Shape 9"/>
+          <p:cNvSpPr/>
+          <p:nvPr/>
+        </p:nvSpPr>
+        <p:spPr>
+          <a:xfrm>
+            <a:off x="7882128" y="4434840"/>
+            <a:ext cx="3291840" cy="1234440"/>
+          </a:xfrm>
+          <a:prstGeom prst="rect">
+            <a:avLst/>
+          </a:prstGeom>
+          <a:solidFill>
+            <a:srgbClr val="F8FAFC"/>
+          </a:solidFill>
+          <a:ln w="12700">
+            <a:solidFill>
+              <a:srgbClr val="D8E0EA"/>
+            </a:solidFill>
+            <a:prstDash val="solid"/>
+          </a:ln>
+        </p:spPr>
+      </p:sp>
+      <p:sp>
+        <p:nvSpPr>
+          <p:cNvPr id="13" name="Text 10"/>
+          <p:cNvSpPr/>
+          <p:nvPr/>
+        </p:nvSpPr>
+        <p:spPr>
+          <a:xfrm>
+            <a:off x="8083296" y="4617720"/>
+            <a:ext cx="2889504" cy="237744"/>
           </a:xfrm>
           <a:prstGeom prst="rect">
             <a:avLst/>
@@ -5085,6 +5595,86 @@
               <a:buNone/>
             </a:pPr>
             <a:r>
+              <a:rPr lang="en-US" sz="1300" b="1" dirty="0">
+                <a:solidFill>
+                  <a:srgbClr val="EA580C"/>
+                </a:solidFill>
+                <a:latin typeface="Noto Sans SC" pitchFamily="34" charset="0"/>
+                <a:ea typeface="Noto Sans SC" pitchFamily="34" charset="-122"/>
+                <a:cs typeface="Noto Sans SC" pitchFamily="34" charset="-120"/>
+              </a:rPr>
+              <a:t>生活中意味着什么</a:t>
+            </a:r>
+            <a:endParaRPr lang="en-US" sz="1300" dirty="0"/>
+          </a:p>
+        </p:txBody>
+      </p:sp>
+      <p:sp>
+        <p:nvSpPr>
+          <p:cNvPr id="14" name="Text 11"/>
+          <p:cNvSpPr/>
+          <p:nvPr/>
+        </p:nvSpPr>
+        <p:spPr>
+          <a:xfrm>
+            <a:off x="8083296" y="4946904"/>
+            <a:ext cx="2889504" cy="576072"/>
+          </a:xfrm>
+          <a:prstGeom prst="rect">
+            <a:avLst/>
+          </a:prstGeom>
+          <a:noFill/>
+          <a:ln/>
+        </p:spPr>
+        <p:txBody>
+          <a:bodyPr wrap="square" lIns="0" tIns="0" rIns="0" bIns="0" rtlCol="0" anchor="ctr">
+            <a:normAutofit/>
+          </a:bodyPr>
+          <a:lstStyle/>
+          <a:p>
+            <a:pPr indent="0" marL="0">
+              <a:buNone/>
+            </a:pPr>
+            <a:r>
+              <a:rPr lang="en-US" sz="1350" dirty="0">
+                <a:solidFill>
+                  <a:srgbClr val="232B38"/>
+                </a:solidFill>
+                <a:latin typeface="Noto Sans SC" pitchFamily="34" charset="0"/>
+                <a:ea typeface="Noto Sans SC" pitchFamily="34" charset="-122"/>
+                <a:cs typeface="Noto Sans SC" pitchFamily="34" charset="-120"/>
+              </a:rPr>
+              <a:t>不是所有大模型都必须很大才好用，一些中小模型也能在日常任务中表现顺手。</a:t>
+            </a:r>
+            <a:endParaRPr lang="en-US" sz="1350" dirty="0"/>
+          </a:p>
+        </p:txBody>
+      </p:sp>
+      <p:sp>
+        <p:nvSpPr>
+          <p:cNvPr id="15" name="Text 12"/>
+          <p:cNvSpPr/>
+          <p:nvPr/>
+        </p:nvSpPr>
+        <p:spPr>
+          <a:xfrm>
+            <a:off x="502920" y="6519672"/>
+            <a:ext cx="10972800" cy="146304"/>
+          </a:xfrm>
+          <a:prstGeom prst="rect">
+            <a:avLst/>
+          </a:prstGeom>
+          <a:noFill/>
+          <a:ln/>
+        </p:spPr>
+        <p:txBody>
+          <a:bodyPr wrap="square" lIns="0" tIns="0" rIns="0" bIns="0" rtlCol="0" anchor="ctr"/>
+          <a:lstStyle/>
+          <a:p>
+            <a:pPr indent="0" marL="0">
+              <a:buNone/>
+            </a:pPr>
+            <a:r>
               <a:rPr lang="en-US" sz="850" dirty="0">
                 <a:solidFill>
                   <a:srgbClr val="8A97A8"/>
@@ -5093,7 +5683,2031 @@
                 <a:ea typeface="Noto Sans SC" pitchFamily="34" charset="-122"/>
                 <a:cs typeface="Noto Sans SC" pitchFamily="34" charset="-120"/>
               </a:rPr>
-              <a:t>开源大模型性能演进可视化分析 · 7</a:t>
+              <a:t>主流大模型数据可视化分析 · 5</a:t>
+            </a:r>
+            <a:endParaRPr lang="en-US" sz="850" dirty="0"/>
+          </a:p>
+        </p:txBody>
+      </p:sp>
+    </p:spTree>
+  </p:cSld>
+  <p:clrMapOvr>
+    <a:masterClrMapping/>
+  </p:clrMapOvr>
+</p:sld>
+</file>
+
+<file path=ppt/slides/slide6.xml><?xml version="1.0" encoding="utf-8"?>
+<p:sld xmlns:a="http://schemas.openxmlformats.org/drawingml/2006/main" xmlns:r="http://schemas.openxmlformats.org/officeDocument/2006/relationships" xmlns:p="http://schemas.openxmlformats.org/presentationml/2006/main">
+  <p:cSld name="Slide 6">
+    <p:spTree>
+      <p:nvGrpSpPr>
+        <p:cNvPr id="1" name=""/>
+        <p:cNvGrpSpPr/>
+        <p:nvPr/>
+      </p:nvGrpSpPr>
+      <p:grpSpPr>
+        <a:xfrm>
+          <a:off x="0" y="0"/>
+          <a:ext cx="0" cy="0"/>
+          <a:chOff x="0" y="0"/>
+          <a:chExt cx="0" cy="0"/>
+        </a:xfrm>
+      </p:grpSpPr>
+      <p:sp>
+        <p:nvSpPr>
+          <p:cNvPr id="2" name="Text 0"/>
+          <p:cNvSpPr/>
+          <p:nvPr/>
+        </p:nvSpPr>
+        <p:spPr>
+          <a:xfrm>
+            <a:off x="502920" y="256032"/>
+            <a:ext cx="10972800" cy="228600"/>
+          </a:xfrm>
+          <a:prstGeom prst="rect">
+            <a:avLst/>
+          </a:prstGeom>
+          <a:noFill/>
+          <a:ln/>
+        </p:spPr>
+        <p:txBody>
+          <a:bodyPr wrap="square" lIns="0" tIns="0" rIns="0" bIns="0" rtlCol="0" anchor="ctr"/>
+          <a:lstStyle/>
+          <a:p>
+            <a:pPr indent="0" marL="0">
+              <a:buNone/>
+            </a:pPr>
+            <a:r>
+              <a:rPr lang="en-US" sz="1050" b="1" dirty="0">
+                <a:solidFill>
+                  <a:srgbClr val="0F766E"/>
+                </a:solidFill>
+                <a:latin typeface="Noto Sans SC" pitchFamily="34" charset="0"/>
+                <a:ea typeface="Noto Sans SC" pitchFamily="34" charset="-122"/>
+                <a:cs typeface="Noto Sans SC" pitchFamily="34" charset="-120"/>
+              </a:rPr>
+              <a:t>数据处理与可视化课程项目</a:t>
+            </a:r>
+            <a:endParaRPr lang="en-US" sz="1050" dirty="0"/>
+          </a:p>
+        </p:txBody>
+      </p:sp>
+      <p:sp>
+        <p:nvSpPr>
+          <p:cNvPr id="3" name="Text 1"/>
+          <p:cNvSpPr/>
+          <p:nvPr/>
+        </p:nvSpPr>
+        <p:spPr>
+          <a:xfrm>
+            <a:off x="502920" y="576072"/>
+            <a:ext cx="10972800" cy="502920"/>
+          </a:xfrm>
+          <a:prstGeom prst="rect">
+            <a:avLst/>
+          </a:prstGeom>
+          <a:noFill/>
+          <a:ln/>
+        </p:spPr>
+        <p:txBody>
+          <a:bodyPr wrap="square" lIns="0" tIns="0" rIns="0" bIns="0" rtlCol="0" anchor="ctr">
+            <a:normAutofit/>
+          </a:bodyPr>
+          <a:lstStyle/>
+          <a:p>
+            <a:pPr indent="0" marL="0">
+              <a:buNone/>
+            </a:pPr>
+            <a:r>
+              <a:rPr lang="en-US" sz="2300" b="1" dirty="0">
+                <a:solidFill>
+                  <a:srgbClr val="232B38"/>
+                </a:solidFill>
+                <a:latin typeface="Noto Sans SC" pitchFamily="34" charset="0"/>
+                <a:ea typeface="Noto Sans SC" pitchFamily="34" charset="-122"/>
+                <a:cs typeface="Noto Sans SC" pitchFamily="34" charset="-120"/>
+              </a:rPr>
+              <a:t>横向比较：头部系列代表模型排名</a:t>
+            </a:r>
+            <a:endParaRPr lang="en-US" sz="2300" dirty="0"/>
+          </a:p>
+        </p:txBody>
+      </p:sp>
+      <p:sp>
+        <p:nvSpPr>
+          <p:cNvPr id="4" name="Shape 2"/>
+          <p:cNvSpPr/>
+          <p:nvPr/>
+        </p:nvSpPr>
+        <p:spPr>
+          <a:xfrm>
+            <a:off x="502920" y="1161288"/>
+            <a:ext cx="11155680" cy="0"/>
+          </a:xfrm>
+          <a:prstGeom prst="line">
+            <a:avLst/>
+          </a:prstGeom>
+          <a:noFill/>
+          <a:ln w="12700">
+            <a:solidFill>
+              <a:srgbClr val="D8E0EA"/>
+            </a:solidFill>
+            <a:prstDash val="solid"/>
+          </a:ln>
+        </p:spPr>
+      </p:sp>
+      <p:pic>
+        <p:nvPicPr>
+          <p:cNvPr id="5" name="Image 0" descr="C:\Users\HBZuo\Desktop\wrokmean\数据可视化\dashboard\assets\figures\02_provider_ranking.png">    </p:cNvPr>
+          <p:cNvPicPr>
+            <a:picLocks noChangeAspect="1"/>
+          </p:cNvPicPr>
+          <p:nvPr/>
+        </p:nvPicPr>
+        <p:blipFill>
+          <a:blip r:embed="rId1"/>
+          <a:stretch>
+            <a:fillRect/>
+          </a:stretch>
+        </p:blipFill>
+        <p:spPr>
+          <a:xfrm>
+            <a:off x="502920" y="1417320"/>
+            <a:ext cx="7040880" cy="4407408"/>
+          </a:xfrm>
+          <a:prstGeom prst="rect">
+            <a:avLst/>
+          </a:prstGeom>
+        </p:spPr>
+      </p:pic>
+      <p:sp>
+        <p:nvSpPr>
+          <p:cNvPr id="6" name="Shape 3"/>
+          <p:cNvSpPr/>
+          <p:nvPr/>
+        </p:nvSpPr>
+        <p:spPr>
+          <a:xfrm>
+            <a:off x="7882128" y="1417320"/>
+            <a:ext cx="3291840" cy="1243584"/>
+          </a:xfrm>
+          <a:prstGeom prst="rect">
+            <a:avLst/>
+          </a:prstGeom>
+          <a:solidFill>
+            <a:srgbClr val="F8FAFC"/>
+          </a:solidFill>
+          <a:ln w="12700">
+            <a:solidFill>
+              <a:srgbClr val="D8E0EA"/>
+            </a:solidFill>
+            <a:prstDash val="solid"/>
+          </a:ln>
+        </p:spPr>
+      </p:sp>
+      <p:sp>
+        <p:nvSpPr>
+          <p:cNvPr id="7" name="Text 4"/>
+          <p:cNvSpPr/>
+          <p:nvPr/>
+        </p:nvSpPr>
+        <p:spPr>
+          <a:xfrm>
+            <a:off x="8083296" y="1600200"/>
+            <a:ext cx="2889504" cy="237744"/>
+          </a:xfrm>
+          <a:prstGeom prst="rect">
+            <a:avLst/>
+          </a:prstGeom>
+          <a:noFill/>
+          <a:ln/>
+        </p:spPr>
+        <p:txBody>
+          <a:bodyPr wrap="square" lIns="0" tIns="0" rIns="0" bIns="0" rtlCol="0" anchor="ctr"/>
+          <a:lstStyle/>
+          <a:p>
+            <a:pPr indent="0" marL="0">
+              <a:buNone/>
+            </a:pPr>
+            <a:r>
+              <a:rPr lang="en-US" sz="1300" b="1" dirty="0">
+                <a:solidFill>
+                  <a:srgbClr val="2563EB"/>
+                </a:solidFill>
+                <a:latin typeface="Noto Sans SC" pitchFamily="34" charset="0"/>
+                <a:ea typeface="Noto Sans SC" pitchFamily="34" charset="-122"/>
+                <a:cs typeface="Noto Sans SC" pitchFamily="34" charset="-120"/>
+              </a:rPr>
+              <a:t>图中看到了什么</a:t>
+            </a:r>
+            <a:endParaRPr lang="en-US" sz="1300" dirty="0"/>
+          </a:p>
+        </p:txBody>
+      </p:sp>
+      <p:sp>
+        <p:nvSpPr>
+          <p:cNvPr id="8" name="Text 5"/>
+          <p:cNvSpPr/>
+          <p:nvPr/>
+        </p:nvSpPr>
+        <p:spPr>
+          <a:xfrm>
+            <a:off x="8083296" y="1929384"/>
+            <a:ext cx="2889504" cy="585216"/>
+          </a:xfrm>
+          <a:prstGeom prst="rect">
+            <a:avLst/>
+          </a:prstGeom>
+          <a:noFill/>
+          <a:ln/>
+        </p:spPr>
+        <p:txBody>
+          <a:bodyPr wrap="square" lIns="0" tIns="0" rIns="0" bIns="0" rtlCol="0" anchor="ctr">
+            <a:normAutofit/>
+          </a:bodyPr>
+          <a:lstStyle/>
+          <a:p>
+            <a:pPr indent="0" marL="0">
+              <a:buNone/>
+            </a:pPr>
+            <a:r>
+              <a:rPr lang="en-US" sz="1350" dirty="0">
+                <a:solidFill>
+                  <a:srgbClr val="232B38"/>
+                </a:solidFill>
+                <a:latin typeface="Noto Sans SC" pitchFamily="34" charset="0"/>
+                <a:ea typeface="Noto Sans SC" pitchFamily="34" charset="-122"/>
+                <a:cs typeface="Noto Sans SC" pitchFamily="34" charset="-120"/>
+              </a:rPr>
+              <a:t>每个模型系列取综合分最高的代表模型，用横条比较不同系列的位置。</a:t>
+            </a:r>
+            <a:endParaRPr lang="en-US" sz="1350" dirty="0"/>
+          </a:p>
+        </p:txBody>
+      </p:sp>
+      <p:sp>
+        <p:nvSpPr>
+          <p:cNvPr id="9" name="Shape 6"/>
+          <p:cNvSpPr/>
+          <p:nvPr/>
+        </p:nvSpPr>
+        <p:spPr>
+          <a:xfrm>
+            <a:off x="7882128" y="2834640"/>
+            <a:ext cx="3291840" cy="1417320"/>
+          </a:xfrm>
+          <a:prstGeom prst="rect">
+            <a:avLst/>
+          </a:prstGeom>
+          <a:solidFill>
+            <a:srgbClr val="F8FAFC"/>
+          </a:solidFill>
+          <a:ln w="12700">
+            <a:solidFill>
+              <a:srgbClr val="D8E0EA"/>
+            </a:solidFill>
+            <a:prstDash val="solid"/>
+          </a:ln>
+        </p:spPr>
+      </p:sp>
+      <p:sp>
+        <p:nvSpPr>
+          <p:cNvPr id="10" name="Text 7"/>
+          <p:cNvSpPr/>
+          <p:nvPr/>
+        </p:nvSpPr>
+        <p:spPr>
+          <a:xfrm>
+            <a:off x="8083296" y="3017520"/>
+            <a:ext cx="2889504" cy="237744"/>
+          </a:xfrm>
+          <a:prstGeom prst="rect">
+            <a:avLst/>
+          </a:prstGeom>
+          <a:noFill/>
+          <a:ln/>
+        </p:spPr>
+        <p:txBody>
+          <a:bodyPr wrap="square" lIns="0" tIns="0" rIns="0" bIns="0" rtlCol="0" anchor="ctr"/>
+          <a:lstStyle/>
+          <a:p>
+            <a:pPr indent="0" marL="0">
+              <a:buNone/>
+            </a:pPr>
+            <a:r>
+              <a:rPr lang="en-US" sz="1300" b="1" dirty="0">
+                <a:solidFill>
+                  <a:srgbClr val="0F766E"/>
+                </a:solidFill>
+                <a:latin typeface="Noto Sans SC" pitchFamily="34" charset="0"/>
+                <a:ea typeface="Noto Sans SC" pitchFamily="34" charset="-122"/>
+                <a:cs typeface="Noto Sans SC" pitchFamily="34" charset="-120"/>
+              </a:rPr>
+              <a:t>专业上说明什么</a:t>
+            </a:r>
+            <a:endParaRPr lang="en-US" sz="1300" dirty="0"/>
+          </a:p>
+        </p:txBody>
+      </p:sp>
+      <p:sp>
+        <p:nvSpPr>
+          <p:cNvPr id="11" name="Text 8"/>
+          <p:cNvSpPr/>
+          <p:nvPr/>
+        </p:nvSpPr>
+        <p:spPr>
+          <a:xfrm>
+            <a:off x="8083296" y="3346704"/>
+            <a:ext cx="2889504" cy="758952"/>
+          </a:xfrm>
+          <a:prstGeom prst="rect">
+            <a:avLst/>
+          </a:prstGeom>
+          <a:noFill/>
+          <a:ln/>
+        </p:spPr>
+        <p:txBody>
+          <a:bodyPr wrap="square" lIns="0" tIns="0" rIns="0" bIns="0" rtlCol="0" anchor="ctr">
+            <a:normAutofit/>
+          </a:bodyPr>
+          <a:lstStyle/>
+          <a:p>
+            <a:pPr indent="0" marL="0">
+              <a:buNone/>
+            </a:pPr>
+            <a:r>
+              <a:rPr lang="en-US" sz="1350" dirty="0">
+                <a:solidFill>
+                  <a:srgbClr val="232B38"/>
+                </a:solidFill>
+                <a:latin typeface="Noto Sans SC" pitchFamily="34" charset="0"/>
+                <a:ea typeface="Noto Sans SC" pitchFamily="34" charset="-122"/>
+                <a:cs typeface="Noto Sans SC" pitchFamily="34" charset="-120"/>
+              </a:rPr>
+              <a:t>这是排序条形图，适合表达类别之间的整体差异，比散点图更利于快速读排名。</a:t>
+            </a:r>
+            <a:endParaRPr lang="en-US" sz="1350" dirty="0"/>
+          </a:p>
+        </p:txBody>
+      </p:sp>
+      <p:sp>
+        <p:nvSpPr>
+          <p:cNvPr id="12" name="Shape 9"/>
+          <p:cNvSpPr/>
+          <p:nvPr/>
+        </p:nvSpPr>
+        <p:spPr>
+          <a:xfrm>
+            <a:off x="7882128" y="4434840"/>
+            <a:ext cx="3291840" cy="1234440"/>
+          </a:xfrm>
+          <a:prstGeom prst="rect">
+            <a:avLst/>
+          </a:prstGeom>
+          <a:solidFill>
+            <a:srgbClr val="F8FAFC"/>
+          </a:solidFill>
+          <a:ln w="12700">
+            <a:solidFill>
+              <a:srgbClr val="D8E0EA"/>
+            </a:solidFill>
+            <a:prstDash val="solid"/>
+          </a:ln>
+        </p:spPr>
+      </p:sp>
+      <p:sp>
+        <p:nvSpPr>
+          <p:cNvPr id="13" name="Text 10"/>
+          <p:cNvSpPr/>
+          <p:nvPr/>
+        </p:nvSpPr>
+        <p:spPr>
+          <a:xfrm>
+            <a:off x="8083296" y="4617720"/>
+            <a:ext cx="2889504" cy="237744"/>
+          </a:xfrm>
+          <a:prstGeom prst="rect">
+            <a:avLst/>
+          </a:prstGeom>
+          <a:noFill/>
+          <a:ln/>
+        </p:spPr>
+        <p:txBody>
+          <a:bodyPr wrap="square" lIns="0" tIns="0" rIns="0" bIns="0" rtlCol="0" anchor="ctr"/>
+          <a:lstStyle/>
+          <a:p>
+            <a:pPr indent="0" marL="0">
+              <a:buNone/>
+            </a:pPr>
+            <a:r>
+              <a:rPr lang="en-US" sz="1300" b="1" dirty="0">
+                <a:solidFill>
+                  <a:srgbClr val="EA580C"/>
+                </a:solidFill>
+                <a:latin typeface="Noto Sans SC" pitchFamily="34" charset="0"/>
+                <a:ea typeface="Noto Sans SC" pitchFamily="34" charset="-122"/>
+                <a:cs typeface="Noto Sans SC" pitchFamily="34" charset="-120"/>
+              </a:rPr>
+              <a:t>生活中意味着什么</a:t>
+            </a:r>
+            <a:endParaRPr lang="en-US" sz="1300" dirty="0"/>
+          </a:p>
+        </p:txBody>
+      </p:sp>
+      <p:sp>
+        <p:nvSpPr>
+          <p:cNvPr id="14" name="Text 11"/>
+          <p:cNvSpPr/>
+          <p:nvPr/>
+        </p:nvSpPr>
+        <p:spPr>
+          <a:xfrm>
+            <a:off x="8083296" y="4946904"/>
+            <a:ext cx="2889504" cy="576072"/>
+          </a:xfrm>
+          <a:prstGeom prst="rect">
+            <a:avLst/>
+          </a:prstGeom>
+          <a:noFill/>
+          <a:ln/>
+        </p:spPr>
+        <p:txBody>
+          <a:bodyPr wrap="square" lIns="0" tIns="0" rIns="0" bIns="0" rtlCol="0" anchor="ctr">
+            <a:normAutofit/>
+          </a:bodyPr>
+          <a:lstStyle/>
+          <a:p>
+            <a:pPr indent="0" marL="0">
+              <a:buNone/>
+            </a:pPr>
+            <a:r>
+              <a:rPr lang="en-US" sz="1350" dirty="0">
+                <a:solidFill>
+                  <a:srgbClr val="232B38"/>
+                </a:solidFill>
+                <a:latin typeface="Noto Sans SC" pitchFamily="34" charset="0"/>
+                <a:ea typeface="Noto Sans SC" pitchFamily="34" charset="-122"/>
+                <a:cs typeface="Noto Sans SC" pitchFamily="34" charset="-120"/>
+              </a:rPr>
+              <a:t>使用者可以快速判断不同模型家族的大致水平，而不是陷入一长串表格。</a:t>
+            </a:r>
+            <a:endParaRPr lang="en-US" sz="1350" dirty="0"/>
+          </a:p>
+        </p:txBody>
+      </p:sp>
+      <p:sp>
+        <p:nvSpPr>
+          <p:cNvPr id="15" name="Text 12"/>
+          <p:cNvSpPr/>
+          <p:nvPr/>
+        </p:nvSpPr>
+        <p:spPr>
+          <a:xfrm>
+            <a:off x="502920" y="6519672"/>
+            <a:ext cx="10972800" cy="146304"/>
+          </a:xfrm>
+          <a:prstGeom prst="rect">
+            <a:avLst/>
+          </a:prstGeom>
+          <a:noFill/>
+          <a:ln/>
+        </p:spPr>
+        <p:txBody>
+          <a:bodyPr wrap="square" lIns="0" tIns="0" rIns="0" bIns="0" rtlCol="0" anchor="ctr"/>
+          <a:lstStyle/>
+          <a:p>
+            <a:pPr indent="0" marL="0">
+              <a:buNone/>
+            </a:pPr>
+            <a:r>
+              <a:rPr lang="en-US" sz="850" dirty="0">
+                <a:solidFill>
+                  <a:srgbClr val="8A97A8"/>
+                </a:solidFill>
+                <a:latin typeface="Noto Sans SC" pitchFamily="34" charset="0"/>
+                <a:ea typeface="Noto Sans SC" pitchFamily="34" charset="-122"/>
+                <a:cs typeface="Noto Sans SC" pitchFamily="34" charset="-120"/>
+              </a:rPr>
+              <a:t>主流大模型数据可视化分析 · 6</a:t>
+            </a:r>
+            <a:endParaRPr lang="en-US" sz="850" dirty="0"/>
+          </a:p>
+        </p:txBody>
+      </p:sp>
+    </p:spTree>
+  </p:cSld>
+  <p:clrMapOvr>
+    <a:masterClrMapping/>
+  </p:clrMapOvr>
+</p:sld>
+</file>
+
+<file path=ppt/slides/slide7.xml><?xml version="1.0" encoding="utf-8"?>
+<p:sld xmlns:a="http://schemas.openxmlformats.org/drawingml/2006/main" xmlns:r="http://schemas.openxmlformats.org/officeDocument/2006/relationships" xmlns:p="http://schemas.openxmlformats.org/presentationml/2006/main">
+  <p:cSld name="Slide 7">
+    <p:spTree>
+      <p:nvGrpSpPr>
+        <p:cNvPr id="1" name=""/>
+        <p:cNvGrpSpPr/>
+        <p:nvPr/>
+      </p:nvGrpSpPr>
+      <p:grpSpPr>
+        <a:xfrm>
+          <a:off x="0" y="0"/>
+          <a:ext cx="0" cy="0"/>
+          <a:chOff x="0" y="0"/>
+          <a:chExt cx="0" cy="0"/>
+        </a:xfrm>
+      </p:grpSpPr>
+      <p:sp>
+        <p:nvSpPr>
+          <p:cNvPr id="2" name="Text 0"/>
+          <p:cNvSpPr/>
+          <p:nvPr/>
+        </p:nvSpPr>
+        <p:spPr>
+          <a:xfrm>
+            <a:off x="502920" y="256032"/>
+            <a:ext cx="10972800" cy="228600"/>
+          </a:xfrm>
+          <a:prstGeom prst="rect">
+            <a:avLst/>
+          </a:prstGeom>
+          <a:noFill/>
+          <a:ln/>
+        </p:spPr>
+        <p:txBody>
+          <a:bodyPr wrap="square" lIns="0" tIns="0" rIns="0" bIns="0" rtlCol="0" anchor="ctr"/>
+          <a:lstStyle/>
+          <a:p>
+            <a:pPr indent="0" marL="0">
+              <a:buNone/>
+            </a:pPr>
+            <a:r>
+              <a:rPr lang="en-US" sz="1050" b="1" dirty="0">
+                <a:solidFill>
+                  <a:srgbClr val="0F766E"/>
+                </a:solidFill>
+                <a:latin typeface="Noto Sans SC" pitchFamily="34" charset="0"/>
+                <a:ea typeface="Noto Sans SC" pitchFamily="34" charset="-122"/>
+                <a:cs typeface="Noto Sans SC" pitchFamily="34" charset="-120"/>
+              </a:rPr>
+              <a:t>数据处理与可视化课程项目</a:t>
+            </a:r>
+            <a:endParaRPr lang="en-US" sz="1050" dirty="0"/>
+          </a:p>
+        </p:txBody>
+      </p:sp>
+      <p:sp>
+        <p:nvSpPr>
+          <p:cNvPr id="3" name="Text 1"/>
+          <p:cNvSpPr/>
+          <p:nvPr/>
+        </p:nvSpPr>
+        <p:spPr>
+          <a:xfrm>
+            <a:off x="502920" y="576072"/>
+            <a:ext cx="10972800" cy="502920"/>
+          </a:xfrm>
+          <a:prstGeom prst="rect">
+            <a:avLst/>
+          </a:prstGeom>
+          <a:noFill/>
+          <a:ln/>
+        </p:spPr>
+        <p:txBody>
+          <a:bodyPr wrap="square" lIns="0" tIns="0" rIns="0" bIns="0" rtlCol="0" anchor="ctr">
+            <a:normAutofit/>
+          </a:bodyPr>
+          <a:lstStyle/>
+          <a:p>
+            <a:pPr indent="0" marL="0">
+              <a:buNone/>
+            </a:pPr>
+            <a:r>
+              <a:rPr lang="en-US" sz="2300" b="1" dirty="0">
+                <a:solidFill>
+                  <a:srgbClr val="232B38"/>
+                </a:solidFill>
+                <a:latin typeface="Noto Sans SC" pitchFamily="34" charset="0"/>
+                <a:ea typeface="Noto Sans SC" pitchFamily="34" charset="-122"/>
+                <a:cs typeface="Noto Sans SC" pitchFamily="34" charset="-120"/>
+              </a:rPr>
+              <a:t>纵向比较：同一系列模型的进步轨迹</a:t>
+            </a:r>
+            <a:endParaRPr lang="en-US" sz="2300" dirty="0"/>
+          </a:p>
+        </p:txBody>
+      </p:sp>
+      <p:sp>
+        <p:nvSpPr>
+          <p:cNvPr id="4" name="Shape 2"/>
+          <p:cNvSpPr/>
+          <p:nvPr/>
+        </p:nvSpPr>
+        <p:spPr>
+          <a:xfrm>
+            <a:off x="502920" y="1161288"/>
+            <a:ext cx="11155680" cy="0"/>
+          </a:xfrm>
+          <a:prstGeom prst="line">
+            <a:avLst/>
+          </a:prstGeom>
+          <a:noFill/>
+          <a:ln w="12700">
+            <a:solidFill>
+              <a:srgbClr val="D8E0EA"/>
+            </a:solidFill>
+            <a:prstDash val="solid"/>
+          </a:ln>
+        </p:spPr>
+      </p:sp>
+      <p:pic>
+        <p:nvPicPr>
+          <p:cNvPr id="5" name="Image 0" descr="C:\Users\HBZuo\Desktop\wrokmean\数据可视化\dashboard\assets\figures\03_series_progression.png">    </p:cNvPr>
+          <p:cNvPicPr>
+            <a:picLocks noChangeAspect="1"/>
+          </p:cNvPicPr>
+          <p:nvPr/>
+        </p:nvPicPr>
+        <p:blipFill>
+          <a:blip r:embed="rId1"/>
+          <a:stretch>
+            <a:fillRect/>
+          </a:stretch>
+        </p:blipFill>
+        <p:spPr>
+          <a:xfrm>
+            <a:off x="502920" y="1417320"/>
+            <a:ext cx="7040880" cy="4407408"/>
+          </a:xfrm>
+          <a:prstGeom prst="rect">
+            <a:avLst/>
+          </a:prstGeom>
+        </p:spPr>
+      </p:pic>
+      <p:sp>
+        <p:nvSpPr>
+          <p:cNvPr id="6" name="Shape 3"/>
+          <p:cNvSpPr/>
+          <p:nvPr/>
+        </p:nvSpPr>
+        <p:spPr>
+          <a:xfrm>
+            <a:off x="7882128" y="1417320"/>
+            <a:ext cx="3291840" cy="1243584"/>
+          </a:xfrm>
+          <a:prstGeom prst="rect">
+            <a:avLst/>
+          </a:prstGeom>
+          <a:solidFill>
+            <a:srgbClr val="F8FAFC"/>
+          </a:solidFill>
+          <a:ln w="12700">
+            <a:solidFill>
+              <a:srgbClr val="D8E0EA"/>
+            </a:solidFill>
+            <a:prstDash val="solid"/>
+          </a:ln>
+        </p:spPr>
+      </p:sp>
+      <p:sp>
+        <p:nvSpPr>
+          <p:cNvPr id="7" name="Text 4"/>
+          <p:cNvSpPr/>
+          <p:nvPr/>
+        </p:nvSpPr>
+        <p:spPr>
+          <a:xfrm>
+            <a:off x="8083296" y="1600200"/>
+            <a:ext cx="2889504" cy="237744"/>
+          </a:xfrm>
+          <a:prstGeom prst="rect">
+            <a:avLst/>
+          </a:prstGeom>
+          <a:noFill/>
+          <a:ln/>
+        </p:spPr>
+        <p:txBody>
+          <a:bodyPr wrap="square" lIns="0" tIns="0" rIns="0" bIns="0" rtlCol="0" anchor="ctr"/>
+          <a:lstStyle/>
+          <a:p>
+            <a:pPr indent="0" marL="0">
+              <a:buNone/>
+            </a:pPr>
+            <a:r>
+              <a:rPr lang="en-US" sz="1300" b="1" dirty="0">
+                <a:solidFill>
+                  <a:srgbClr val="2563EB"/>
+                </a:solidFill>
+                <a:latin typeface="Noto Sans SC" pitchFamily="34" charset="0"/>
+                <a:ea typeface="Noto Sans SC" pitchFamily="34" charset="-122"/>
+                <a:cs typeface="Noto Sans SC" pitchFamily="34" charset="-120"/>
+              </a:rPr>
+              <a:t>图中看到了什么</a:t>
+            </a:r>
+            <a:endParaRPr lang="en-US" sz="1300" dirty="0"/>
+          </a:p>
+        </p:txBody>
+      </p:sp>
+      <p:sp>
+        <p:nvSpPr>
+          <p:cNvPr id="8" name="Text 5"/>
+          <p:cNvSpPr/>
+          <p:nvPr/>
+        </p:nvSpPr>
+        <p:spPr>
+          <a:xfrm>
+            <a:off x="8083296" y="1929384"/>
+            <a:ext cx="2889504" cy="585216"/>
+          </a:xfrm>
+          <a:prstGeom prst="rect">
+            <a:avLst/>
+          </a:prstGeom>
+          <a:noFill/>
+          <a:ln/>
+        </p:spPr>
+        <p:txBody>
+          <a:bodyPr wrap="square" lIns="0" tIns="0" rIns="0" bIns="0" rtlCol="0" anchor="ctr">
+            <a:normAutofit/>
+          </a:bodyPr>
+          <a:lstStyle/>
+          <a:p>
+            <a:pPr indent="0" marL="0">
+              <a:buNone/>
+            </a:pPr>
+            <a:r>
+              <a:rPr lang="en-US" sz="1350" dirty="0">
+                <a:solidFill>
+                  <a:srgbClr val="232B38"/>
+                </a:solidFill>
+                <a:latin typeface="Noto Sans SC" pitchFamily="34" charset="0"/>
+                <a:ea typeface="Noto Sans SC" pitchFamily="34" charset="-122"/>
+                <a:cs typeface="Noto Sans SC" pitchFamily="34" charset="-120"/>
+              </a:rPr>
+              <a:t>折线展示 GPT、Claude、Gemini、Llama、Qwen、DeepSeek 等系列随时间的能力变化。</a:t>
+            </a:r>
+            <a:endParaRPr lang="en-US" sz="1350" dirty="0"/>
+          </a:p>
+        </p:txBody>
+      </p:sp>
+      <p:sp>
+        <p:nvSpPr>
+          <p:cNvPr id="9" name="Shape 6"/>
+          <p:cNvSpPr/>
+          <p:nvPr/>
+        </p:nvSpPr>
+        <p:spPr>
+          <a:xfrm>
+            <a:off x="7882128" y="2834640"/>
+            <a:ext cx="3291840" cy="1417320"/>
+          </a:xfrm>
+          <a:prstGeom prst="rect">
+            <a:avLst/>
+          </a:prstGeom>
+          <a:solidFill>
+            <a:srgbClr val="F8FAFC"/>
+          </a:solidFill>
+          <a:ln w="12700">
+            <a:solidFill>
+              <a:srgbClr val="D8E0EA"/>
+            </a:solidFill>
+            <a:prstDash val="solid"/>
+          </a:ln>
+        </p:spPr>
+      </p:sp>
+      <p:sp>
+        <p:nvSpPr>
+          <p:cNvPr id="10" name="Text 7"/>
+          <p:cNvSpPr/>
+          <p:nvPr/>
+        </p:nvSpPr>
+        <p:spPr>
+          <a:xfrm>
+            <a:off x="8083296" y="3017520"/>
+            <a:ext cx="2889504" cy="237744"/>
+          </a:xfrm>
+          <a:prstGeom prst="rect">
+            <a:avLst/>
+          </a:prstGeom>
+          <a:noFill/>
+          <a:ln/>
+        </p:spPr>
+        <p:txBody>
+          <a:bodyPr wrap="square" lIns="0" tIns="0" rIns="0" bIns="0" rtlCol="0" anchor="ctr"/>
+          <a:lstStyle/>
+          <a:p>
+            <a:pPr indent="0" marL="0">
+              <a:buNone/>
+            </a:pPr>
+            <a:r>
+              <a:rPr lang="en-US" sz="1300" b="1" dirty="0">
+                <a:solidFill>
+                  <a:srgbClr val="0F766E"/>
+                </a:solidFill>
+                <a:latin typeface="Noto Sans SC" pitchFamily="34" charset="0"/>
+                <a:ea typeface="Noto Sans SC" pitchFamily="34" charset="-122"/>
+                <a:cs typeface="Noto Sans SC" pitchFamily="34" charset="-120"/>
+              </a:rPr>
+              <a:t>专业上说明什么</a:t>
+            </a:r>
+            <a:endParaRPr lang="en-US" sz="1300" dirty="0"/>
+          </a:p>
+        </p:txBody>
+      </p:sp>
+      <p:sp>
+        <p:nvSpPr>
+          <p:cNvPr id="11" name="Text 8"/>
+          <p:cNvSpPr/>
+          <p:nvPr/>
+        </p:nvSpPr>
+        <p:spPr>
+          <a:xfrm>
+            <a:off x="8083296" y="3346704"/>
+            <a:ext cx="2889504" cy="758952"/>
+          </a:xfrm>
+          <a:prstGeom prst="rect">
+            <a:avLst/>
+          </a:prstGeom>
+          <a:noFill/>
+          <a:ln/>
+        </p:spPr>
+        <p:txBody>
+          <a:bodyPr wrap="square" lIns="0" tIns="0" rIns="0" bIns="0" rtlCol="0" anchor="ctr">
+            <a:normAutofit/>
+          </a:bodyPr>
+          <a:lstStyle/>
+          <a:p>
+            <a:pPr indent="0" marL="0">
+              <a:buNone/>
+            </a:pPr>
+            <a:r>
+              <a:rPr lang="en-US" sz="1350" dirty="0">
+                <a:solidFill>
+                  <a:srgbClr val="232B38"/>
+                </a:solidFill>
+                <a:latin typeface="Noto Sans SC" pitchFamily="34" charset="0"/>
+                <a:ea typeface="Noto Sans SC" pitchFamily="34" charset="-122"/>
+                <a:cs typeface="Noto Sans SC" pitchFamily="34" charset="-120"/>
+              </a:rPr>
+              <a:t>这是时间序列可视化，回答同一系列模型是否持续进步、进步速度是否一致。</a:t>
+            </a:r>
+            <a:endParaRPr lang="en-US" sz="1350" dirty="0"/>
+          </a:p>
+        </p:txBody>
+      </p:sp>
+      <p:sp>
+        <p:nvSpPr>
+          <p:cNvPr id="12" name="Shape 9"/>
+          <p:cNvSpPr/>
+          <p:nvPr/>
+        </p:nvSpPr>
+        <p:spPr>
+          <a:xfrm>
+            <a:off x="7882128" y="4434840"/>
+            <a:ext cx="3291840" cy="1234440"/>
+          </a:xfrm>
+          <a:prstGeom prst="rect">
+            <a:avLst/>
+          </a:prstGeom>
+          <a:solidFill>
+            <a:srgbClr val="F8FAFC"/>
+          </a:solidFill>
+          <a:ln w="12700">
+            <a:solidFill>
+              <a:srgbClr val="D8E0EA"/>
+            </a:solidFill>
+            <a:prstDash val="solid"/>
+          </a:ln>
+        </p:spPr>
+      </p:sp>
+      <p:sp>
+        <p:nvSpPr>
+          <p:cNvPr id="13" name="Text 10"/>
+          <p:cNvSpPr/>
+          <p:nvPr/>
+        </p:nvSpPr>
+        <p:spPr>
+          <a:xfrm>
+            <a:off x="8083296" y="4617720"/>
+            <a:ext cx="2889504" cy="237744"/>
+          </a:xfrm>
+          <a:prstGeom prst="rect">
+            <a:avLst/>
+          </a:prstGeom>
+          <a:noFill/>
+          <a:ln/>
+        </p:spPr>
+        <p:txBody>
+          <a:bodyPr wrap="square" lIns="0" tIns="0" rIns="0" bIns="0" rtlCol="0" anchor="ctr"/>
+          <a:lstStyle/>
+          <a:p>
+            <a:pPr indent="0" marL="0">
+              <a:buNone/>
+            </a:pPr>
+            <a:r>
+              <a:rPr lang="en-US" sz="1300" b="1" dirty="0">
+                <a:solidFill>
+                  <a:srgbClr val="EA580C"/>
+                </a:solidFill>
+                <a:latin typeface="Noto Sans SC" pitchFamily="34" charset="0"/>
+                <a:ea typeface="Noto Sans SC" pitchFamily="34" charset="-122"/>
+                <a:cs typeface="Noto Sans SC" pitchFamily="34" charset="-120"/>
+              </a:rPr>
+              <a:t>生活中意味着什么</a:t>
+            </a:r>
+            <a:endParaRPr lang="en-US" sz="1300" dirty="0"/>
+          </a:p>
+        </p:txBody>
+      </p:sp>
+      <p:sp>
+        <p:nvSpPr>
+          <p:cNvPr id="14" name="Text 11"/>
+          <p:cNvSpPr/>
+          <p:nvPr/>
+        </p:nvSpPr>
+        <p:spPr>
+          <a:xfrm>
+            <a:off x="8083296" y="4946904"/>
+            <a:ext cx="2889504" cy="576072"/>
+          </a:xfrm>
+          <a:prstGeom prst="rect">
+            <a:avLst/>
+          </a:prstGeom>
+          <a:noFill/>
+          <a:ln/>
+        </p:spPr>
+        <p:txBody>
+          <a:bodyPr wrap="square" lIns="0" tIns="0" rIns="0" bIns="0" rtlCol="0" anchor="ctr">
+            <a:normAutofit/>
+          </a:bodyPr>
+          <a:lstStyle/>
+          <a:p>
+            <a:pPr indent="0" marL="0">
+              <a:buNone/>
+            </a:pPr>
+            <a:r>
+              <a:rPr lang="en-US" sz="1350" dirty="0">
+                <a:solidFill>
+                  <a:srgbClr val="232B38"/>
+                </a:solidFill>
+                <a:latin typeface="Noto Sans SC" pitchFamily="34" charset="0"/>
+                <a:ea typeface="Noto Sans SC" pitchFamily="34" charset="-122"/>
+                <a:cs typeface="Noto Sans SC" pitchFamily="34" charset="-120"/>
+              </a:rPr>
+              <a:t>新版本常带来更少追问、更少返工，聊天、写作和编程体验会更连贯。</a:t>
+            </a:r>
+            <a:endParaRPr lang="en-US" sz="1350" dirty="0"/>
+          </a:p>
+        </p:txBody>
+      </p:sp>
+      <p:sp>
+        <p:nvSpPr>
+          <p:cNvPr id="15" name="Text 12"/>
+          <p:cNvSpPr/>
+          <p:nvPr/>
+        </p:nvSpPr>
+        <p:spPr>
+          <a:xfrm>
+            <a:off x="502920" y="6519672"/>
+            <a:ext cx="10972800" cy="146304"/>
+          </a:xfrm>
+          <a:prstGeom prst="rect">
+            <a:avLst/>
+          </a:prstGeom>
+          <a:noFill/>
+          <a:ln/>
+        </p:spPr>
+        <p:txBody>
+          <a:bodyPr wrap="square" lIns="0" tIns="0" rIns="0" bIns="0" rtlCol="0" anchor="ctr"/>
+          <a:lstStyle/>
+          <a:p>
+            <a:pPr indent="0" marL="0">
+              <a:buNone/>
+            </a:pPr>
+            <a:r>
+              <a:rPr lang="en-US" sz="850" dirty="0">
+                <a:solidFill>
+                  <a:srgbClr val="8A97A8"/>
+                </a:solidFill>
+                <a:latin typeface="Noto Sans SC" pitchFamily="34" charset="0"/>
+                <a:ea typeface="Noto Sans SC" pitchFamily="34" charset="-122"/>
+                <a:cs typeface="Noto Sans SC" pitchFamily="34" charset="-120"/>
+              </a:rPr>
+              <a:t>主流大模型数据可视化分析 · 7</a:t>
+            </a:r>
+            <a:endParaRPr lang="en-US" sz="850" dirty="0"/>
+          </a:p>
+        </p:txBody>
+      </p:sp>
+    </p:spTree>
+  </p:cSld>
+  <p:clrMapOvr>
+    <a:masterClrMapping/>
+  </p:clrMapOvr>
+</p:sld>
+</file>
+
+<file path=ppt/slides/slide8.xml><?xml version="1.0" encoding="utf-8"?>
+<p:sld xmlns:a="http://schemas.openxmlformats.org/drawingml/2006/main" xmlns:r="http://schemas.openxmlformats.org/officeDocument/2006/relationships" xmlns:p="http://schemas.openxmlformats.org/presentationml/2006/main">
+  <p:cSld name="Slide 8">
+    <p:spTree>
+      <p:nvGrpSpPr>
+        <p:cNvPr id="1" name=""/>
+        <p:cNvGrpSpPr/>
+        <p:nvPr/>
+      </p:nvGrpSpPr>
+      <p:grpSpPr>
+        <a:xfrm>
+          <a:off x="0" y="0"/>
+          <a:ext cx="0" cy="0"/>
+          <a:chOff x="0" y="0"/>
+          <a:chExt cx="0" cy="0"/>
+        </a:xfrm>
+      </p:grpSpPr>
+      <p:sp>
+        <p:nvSpPr>
+          <p:cNvPr id="2" name="Text 0"/>
+          <p:cNvSpPr/>
+          <p:nvPr/>
+        </p:nvSpPr>
+        <p:spPr>
+          <a:xfrm>
+            <a:off x="502920" y="256032"/>
+            <a:ext cx="10972800" cy="228600"/>
+          </a:xfrm>
+          <a:prstGeom prst="rect">
+            <a:avLst/>
+          </a:prstGeom>
+          <a:noFill/>
+          <a:ln/>
+        </p:spPr>
+        <p:txBody>
+          <a:bodyPr wrap="square" lIns="0" tIns="0" rIns="0" bIns="0" rtlCol="0" anchor="ctr"/>
+          <a:lstStyle/>
+          <a:p>
+            <a:pPr indent="0" marL="0">
+              <a:buNone/>
+            </a:pPr>
+            <a:r>
+              <a:rPr lang="en-US" sz="1050" b="1" dirty="0">
+                <a:solidFill>
+                  <a:srgbClr val="0F766E"/>
+                </a:solidFill>
+                <a:latin typeface="Noto Sans SC" pitchFamily="34" charset="0"/>
+                <a:ea typeface="Noto Sans SC" pitchFamily="34" charset="-122"/>
+                <a:cs typeface="Noto Sans SC" pitchFamily="34" charset="-120"/>
+              </a:rPr>
+              <a:t>数据处理与可视化课程项目</a:t>
+            </a:r>
+            <a:endParaRPr lang="en-US" sz="1050" dirty="0"/>
+          </a:p>
+        </p:txBody>
+      </p:sp>
+      <p:sp>
+        <p:nvSpPr>
+          <p:cNvPr id="3" name="Text 1"/>
+          <p:cNvSpPr/>
+          <p:nvPr/>
+        </p:nvSpPr>
+        <p:spPr>
+          <a:xfrm>
+            <a:off x="502920" y="576072"/>
+            <a:ext cx="10972800" cy="502920"/>
+          </a:xfrm>
+          <a:prstGeom prst="rect">
+            <a:avLst/>
+          </a:prstGeom>
+          <a:noFill/>
+          <a:ln/>
+        </p:spPr>
+        <p:txBody>
+          <a:bodyPr wrap="square" lIns="0" tIns="0" rIns="0" bIns="0" rtlCol="0" anchor="ctr">
+            <a:normAutofit/>
+          </a:bodyPr>
+          <a:lstStyle/>
+          <a:p>
+            <a:pPr indent="0" marL="0">
+              <a:buNone/>
+            </a:pPr>
+            <a:r>
+              <a:rPr lang="en-US" sz="2300" b="1" dirty="0">
+                <a:solidFill>
+                  <a:srgbClr val="232B38"/>
+                </a:solidFill>
+                <a:latin typeface="Noto Sans SC" pitchFamily="34" charset="0"/>
+                <a:ea typeface="Noto Sans SC" pitchFamily="34" charset="-122"/>
+                <a:cs typeface="Noto Sans SC" pitchFamily="34" charset="-120"/>
+              </a:rPr>
+              <a:t>结构比较：架构生态与训练范式热力图</a:t>
+            </a:r>
+            <a:endParaRPr lang="en-US" sz="2300" dirty="0"/>
+          </a:p>
+        </p:txBody>
+      </p:sp>
+      <p:sp>
+        <p:nvSpPr>
+          <p:cNvPr id="4" name="Shape 2"/>
+          <p:cNvSpPr/>
+          <p:nvPr/>
+        </p:nvSpPr>
+        <p:spPr>
+          <a:xfrm>
+            <a:off x="502920" y="1161288"/>
+            <a:ext cx="11155680" cy="0"/>
+          </a:xfrm>
+          <a:prstGeom prst="line">
+            <a:avLst/>
+          </a:prstGeom>
+          <a:noFill/>
+          <a:ln w="12700">
+            <a:solidFill>
+              <a:srgbClr val="D8E0EA"/>
+            </a:solidFill>
+            <a:prstDash val="solid"/>
+          </a:ln>
+        </p:spPr>
+      </p:sp>
+      <p:pic>
+        <p:nvPicPr>
+          <p:cNvPr id="5" name="Image 0" descr="C:\Users\HBZuo\Desktop\wrokmean\数据可视化\dashboard\assets\figures\04_architecture_heatmap.png">    </p:cNvPr>
+          <p:cNvPicPr>
+            <a:picLocks noChangeAspect="1"/>
+          </p:cNvPicPr>
+          <p:nvPr/>
+        </p:nvPicPr>
+        <p:blipFill>
+          <a:blip r:embed="rId1"/>
+          <a:stretch>
+            <a:fillRect/>
+          </a:stretch>
+        </p:blipFill>
+        <p:spPr>
+          <a:xfrm>
+            <a:off x="502920" y="1417320"/>
+            <a:ext cx="7040880" cy="4407408"/>
+          </a:xfrm>
+          <a:prstGeom prst="rect">
+            <a:avLst/>
+          </a:prstGeom>
+        </p:spPr>
+      </p:pic>
+      <p:sp>
+        <p:nvSpPr>
+          <p:cNvPr id="6" name="Shape 3"/>
+          <p:cNvSpPr/>
+          <p:nvPr/>
+        </p:nvSpPr>
+        <p:spPr>
+          <a:xfrm>
+            <a:off x="7882128" y="1417320"/>
+            <a:ext cx="3291840" cy="1243584"/>
+          </a:xfrm>
+          <a:prstGeom prst="rect">
+            <a:avLst/>
+          </a:prstGeom>
+          <a:solidFill>
+            <a:srgbClr val="F8FAFC"/>
+          </a:solidFill>
+          <a:ln w="12700">
+            <a:solidFill>
+              <a:srgbClr val="D8E0EA"/>
+            </a:solidFill>
+            <a:prstDash val="solid"/>
+          </a:ln>
+        </p:spPr>
+      </p:sp>
+      <p:sp>
+        <p:nvSpPr>
+          <p:cNvPr id="7" name="Text 4"/>
+          <p:cNvSpPr/>
+          <p:nvPr/>
+        </p:nvSpPr>
+        <p:spPr>
+          <a:xfrm>
+            <a:off x="8083296" y="1600200"/>
+            <a:ext cx="2889504" cy="237744"/>
+          </a:xfrm>
+          <a:prstGeom prst="rect">
+            <a:avLst/>
+          </a:prstGeom>
+          <a:noFill/>
+          <a:ln/>
+        </p:spPr>
+        <p:txBody>
+          <a:bodyPr wrap="square" lIns="0" tIns="0" rIns="0" bIns="0" rtlCol="0" anchor="ctr"/>
+          <a:lstStyle/>
+          <a:p>
+            <a:pPr indent="0" marL="0">
+              <a:buNone/>
+            </a:pPr>
+            <a:r>
+              <a:rPr lang="en-US" sz="1300" b="1" dirty="0">
+                <a:solidFill>
+                  <a:srgbClr val="2563EB"/>
+                </a:solidFill>
+                <a:latin typeface="Noto Sans SC" pitchFamily="34" charset="0"/>
+                <a:ea typeface="Noto Sans SC" pitchFamily="34" charset="-122"/>
+                <a:cs typeface="Noto Sans SC" pitchFamily="34" charset="-120"/>
+              </a:rPr>
+              <a:t>图中看到了什么</a:t>
+            </a:r>
+            <a:endParaRPr lang="en-US" sz="1300" dirty="0"/>
+          </a:p>
+        </p:txBody>
+      </p:sp>
+      <p:sp>
+        <p:nvSpPr>
+          <p:cNvPr id="8" name="Text 5"/>
+          <p:cNvSpPr/>
+          <p:nvPr/>
+        </p:nvSpPr>
+        <p:spPr>
+          <a:xfrm>
+            <a:off x="8083296" y="1929384"/>
+            <a:ext cx="2889504" cy="585216"/>
+          </a:xfrm>
+          <a:prstGeom prst="rect">
+            <a:avLst/>
+          </a:prstGeom>
+          <a:noFill/>
+          <a:ln/>
+        </p:spPr>
+        <p:txBody>
+          <a:bodyPr wrap="square" lIns="0" tIns="0" rIns="0" bIns="0" rtlCol="0" anchor="ctr">
+            <a:normAutofit/>
+          </a:bodyPr>
+          <a:lstStyle/>
+          <a:p>
+            <a:pPr indent="0" marL="0">
+              <a:buNone/>
+            </a:pPr>
+            <a:r>
+              <a:rPr lang="en-US" sz="1350" dirty="0">
+                <a:solidFill>
+                  <a:srgbClr val="232B38"/>
+                </a:solidFill>
+                <a:latin typeface="Noto Sans SC" pitchFamily="34" charset="0"/>
+                <a:ea typeface="Noto Sans SC" pitchFamily="34" charset="-122"/>
+                <a:cs typeface="Noto Sans SC" pitchFamily="34" charset="-120"/>
+              </a:rPr>
+              <a:t>矩阵展示不同架构和训练方式组合下的平均综合能力。</a:t>
+            </a:r>
+            <a:endParaRPr lang="en-US" sz="1350" dirty="0"/>
+          </a:p>
+        </p:txBody>
+      </p:sp>
+      <p:sp>
+        <p:nvSpPr>
+          <p:cNvPr id="9" name="Shape 6"/>
+          <p:cNvSpPr/>
+          <p:nvPr/>
+        </p:nvSpPr>
+        <p:spPr>
+          <a:xfrm>
+            <a:off x="7882128" y="2834640"/>
+            <a:ext cx="3291840" cy="1417320"/>
+          </a:xfrm>
+          <a:prstGeom prst="rect">
+            <a:avLst/>
+          </a:prstGeom>
+          <a:solidFill>
+            <a:srgbClr val="F8FAFC"/>
+          </a:solidFill>
+          <a:ln w="12700">
+            <a:solidFill>
+              <a:srgbClr val="D8E0EA"/>
+            </a:solidFill>
+            <a:prstDash val="solid"/>
+          </a:ln>
+        </p:spPr>
+      </p:sp>
+      <p:sp>
+        <p:nvSpPr>
+          <p:cNvPr id="10" name="Text 7"/>
+          <p:cNvSpPr/>
+          <p:nvPr/>
+        </p:nvSpPr>
+        <p:spPr>
+          <a:xfrm>
+            <a:off x="8083296" y="3017520"/>
+            <a:ext cx="2889504" cy="237744"/>
+          </a:xfrm>
+          <a:prstGeom prst="rect">
+            <a:avLst/>
+          </a:prstGeom>
+          <a:noFill/>
+          <a:ln/>
+        </p:spPr>
+        <p:txBody>
+          <a:bodyPr wrap="square" lIns="0" tIns="0" rIns="0" bIns="0" rtlCol="0" anchor="ctr"/>
+          <a:lstStyle/>
+          <a:p>
+            <a:pPr indent="0" marL="0">
+              <a:buNone/>
+            </a:pPr>
+            <a:r>
+              <a:rPr lang="en-US" sz="1300" b="1" dirty="0">
+                <a:solidFill>
+                  <a:srgbClr val="0F766E"/>
+                </a:solidFill>
+                <a:latin typeface="Noto Sans SC" pitchFamily="34" charset="0"/>
+                <a:ea typeface="Noto Sans SC" pitchFamily="34" charset="-122"/>
+                <a:cs typeface="Noto Sans SC" pitchFamily="34" charset="-120"/>
+              </a:rPr>
+              <a:t>专业上说明什么</a:t>
+            </a:r>
+            <a:endParaRPr lang="en-US" sz="1300" dirty="0"/>
+          </a:p>
+        </p:txBody>
+      </p:sp>
+      <p:sp>
+        <p:nvSpPr>
+          <p:cNvPr id="11" name="Text 8"/>
+          <p:cNvSpPr/>
+          <p:nvPr/>
+        </p:nvSpPr>
+        <p:spPr>
+          <a:xfrm>
+            <a:off x="8083296" y="3346704"/>
+            <a:ext cx="2889504" cy="758952"/>
+          </a:xfrm>
+          <a:prstGeom prst="rect">
+            <a:avLst/>
+          </a:prstGeom>
+          <a:noFill/>
+          <a:ln/>
+        </p:spPr>
+        <p:txBody>
+          <a:bodyPr wrap="square" lIns="0" tIns="0" rIns="0" bIns="0" rtlCol="0" anchor="ctr">
+            <a:normAutofit/>
+          </a:bodyPr>
+          <a:lstStyle/>
+          <a:p>
+            <a:pPr indent="0" marL="0">
+              <a:buNone/>
+            </a:pPr>
+            <a:r>
+              <a:rPr lang="en-US" sz="1350" dirty="0">
+                <a:solidFill>
+                  <a:srgbClr val="232B38"/>
+                </a:solidFill>
+                <a:latin typeface="Noto Sans SC" pitchFamily="34" charset="0"/>
+                <a:ea typeface="Noto Sans SC" pitchFamily="34" charset="-122"/>
+                <a:cs typeface="Noto Sans SC" pitchFamily="34" charset="-120"/>
+              </a:rPr>
+              <a:t>这是分类变量与连续变量的联合编码，可以同时看结构分布和性能强弱。</a:t>
+            </a:r>
+            <a:endParaRPr lang="en-US" sz="1350" dirty="0"/>
+          </a:p>
+        </p:txBody>
+      </p:sp>
+      <p:sp>
+        <p:nvSpPr>
+          <p:cNvPr id="12" name="Shape 9"/>
+          <p:cNvSpPr/>
+          <p:nvPr/>
+        </p:nvSpPr>
+        <p:spPr>
+          <a:xfrm>
+            <a:off x="7882128" y="4434840"/>
+            <a:ext cx="3291840" cy="1234440"/>
+          </a:xfrm>
+          <a:prstGeom prst="rect">
+            <a:avLst/>
+          </a:prstGeom>
+          <a:solidFill>
+            <a:srgbClr val="F8FAFC"/>
+          </a:solidFill>
+          <a:ln w="12700">
+            <a:solidFill>
+              <a:srgbClr val="D8E0EA"/>
+            </a:solidFill>
+            <a:prstDash val="solid"/>
+          </a:ln>
+        </p:spPr>
+      </p:sp>
+      <p:sp>
+        <p:nvSpPr>
+          <p:cNvPr id="13" name="Text 10"/>
+          <p:cNvSpPr/>
+          <p:nvPr/>
+        </p:nvSpPr>
+        <p:spPr>
+          <a:xfrm>
+            <a:off x="8083296" y="4617720"/>
+            <a:ext cx="2889504" cy="237744"/>
+          </a:xfrm>
+          <a:prstGeom prst="rect">
+            <a:avLst/>
+          </a:prstGeom>
+          <a:noFill/>
+          <a:ln/>
+        </p:spPr>
+        <p:txBody>
+          <a:bodyPr wrap="square" lIns="0" tIns="0" rIns="0" bIns="0" rtlCol="0" anchor="ctr"/>
+          <a:lstStyle/>
+          <a:p>
+            <a:pPr indent="0" marL="0">
+              <a:buNone/>
+            </a:pPr>
+            <a:r>
+              <a:rPr lang="en-US" sz="1300" b="1" dirty="0">
+                <a:solidFill>
+                  <a:srgbClr val="EA580C"/>
+                </a:solidFill>
+                <a:latin typeface="Noto Sans SC" pitchFamily="34" charset="0"/>
+                <a:ea typeface="Noto Sans SC" pitchFamily="34" charset="-122"/>
+                <a:cs typeface="Noto Sans SC" pitchFamily="34" charset="-120"/>
+              </a:rPr>
+              <a:t>生活中意味着什么</a:t>
+            </a:r>
+            <a:endParaRPr lang="en-US" sz="1300" dirty="0"/>
+          </a:p>
+        </p:txBody>
+      </p:sp>
+      <p:sp>
+        <p:nvSpPr>
+          <p:cNvPr id="14" name="Text 11"/>
+          <p:cNvSpPr/>
+          <p:nvPr/>
+        </p:nvSpPr>
+        <p:spPr>
+          <a:xfrm>
+            <a:off x="8083296" y="4946904"/>
+            <a:ext cx="2889504" cy="576072"/>
+          </a:xfrm>
+          <a:prstGeom prst="rect">
+            <a:avLst/>
+          </a:prstGeom>
+          <a:noFill/>
+          <a:ln/>
+        </p:spPr>
+        <p:txBody>
+          <a:bodyPr wrap="square" lIns="0" tIns="0" rIns="0" bIns="0" rtlCol="0" anchor="ctr">
+            <a:normAutofit/>
+          </a:bodyPr>
+          <a:lstStyle/>
+          <a:p>
+            <a:pPr indent="0" marL="0">
+              <a:buNone/>
+            </a:pPr>
+            <a:r>
+              <a:rPr lang="en-US" sz="1350" dirty="0">
+                <a:solidFill>
+                  <a:srgbClr val="232B38"/>
+                </a:solidFill>
+                <a:latin typeface="Noto Sans SC" pitchFamily="34" charset="0"/>
+                <a:ea typeface="Noto Sans SC" pitchFamily="34" charset="-122"/>
+                <a:cs typeface="Noto Sans SC" pitchFamily="34" charset="-120"/>
+              </a:rPr>
+              <a:t>模型进步不只是参数变大，也可能来自微调、蒸馏、MoE 和推理训练。</a:t>
+            </a:r>
+            <a:endParaRPr lang="en-US" sz="1350" dirty="0"/>
+          </a:p>
+        </p:txBody>
+      </p:sp>
+      <p:sp>
+        <p:nvSpPr>
+          <p:cNvPr id="15" name="Text 12"/>
+          <p:cNvSpPr/>
+          <p:nvPr/>
+        </p:nvSpPr>
+        <p:spPr>
+          <a:xfrm>
+            <a:off x="502920" y="6519672"/>
+            <a:ext cx="10972800" cy="146304"/>
+          </a:xfrm>
+          <a:prstGeom prst="rect">
+            <a:avLst/>
+          </a:prstGeom>
+          <a:noFill/>
+          <a:ln/>
+        </p:spPr>
+        <p:txBody>
+          <a:bodyPr wrap="square" lIns="0" tIns="0" rIns="0" bIns="0" rtlCol="0" anchor="ctr"/>
+          <a:lstStyle/>
+          <a:p>
+            <a:pPr indent="0" marL="0">
+              <a:buNone/>
+            </a:pPr>
+            <a:r>
+              <a:rPr lang="en-US" sz="850" dirty="0">
+                <a:solidFill>
+                  <a:srgbClr val="8A97A8"/>
+                </a:solidFill>
+                <a:latin typeface="Noto Sans SC" pitchFamily="34" charset="0"/>
+                <a:ea typeface="Noto Sans SC" pitchFamily="34" charset="-122"/>
+                <a:cs typeface="Noto Sans SC" pitchFamily="34" charset="-120"/>
+              </a:rPr>
+              <a:t>主流大模型数据可视化分析 · 8</a:t>
+            </a:r>
+            <a:endParaRPr lang="en-US" sz="850" dirty="0"/>
+          </a:p>
+        </p:txBody>
+      </p:sp>
+    </p:spTree>
+  </p:cSld>
+  <p:clrMapOvr>
+    <a:masterClrMapping/>
+  </p:clrMapOvr>
+</p:sld>
+</file>
+
+<file path=ppt/slides/slide9.xml><?xml version="1.0" encoding="utf-8"?>
+<p:sld xmlns:a="http://schemas.openxmlformats.org/drawingml/2006/main" xmlns:r="http://schemas.openxmlformats.org/officeDocument/2006/relationships" xmlns:p="http://schemas.openxmlformats.org/presentationml/2006/main">
+  <p:cSld name="Slide 9">
+    <p:spTree>
+      <p:nvGrpSpPr>
+        <p:cNvPr id="1" name=""/>
+        <p:cNvGrpSpPr/>
+        <p:nvPr/>
+      </p:nvGrpSpPr>
+      <p:grpSpPr>
+        <a:xfrm>
+          <a:off x="0" y="0"/>
+          <a:ext cx="0" cy="0"/>
+          <a:chOff x="0" y="0"/>
+          <a:chExt cx="0" cy="0"/>
+        </a:xfrm>
+      </p:grpSpPr>
+      <p:sp>
+        <p:nvSpPr>
+          <p:cNvPr id="2" name="Text 0"/>
+          <p:cNvSpPr/>
+          <p:nvPr/>
+        </p:nvSpPr>
+        <p:spPr>
+          <a:xfrm>
+            <a:off x="502920" y="256032"/>
+            <a:ext cx="10972800" cy="228600"/>
+          </a:xfrm>
+          <a:prstGeom prst="rect">
+            <a:avLst/>
+          </a:prstGeom>
+          <a:noFill/>
+          <a:ln/>
+        </p:spPr>
+        <p:txBody>
+          <a:bodyPr wrap="square" lIns="0" tIns="0" rIns="0" bIns="0" rtlCol="0" anchor="ctr"/>
+          <a:lstStyle/>
+          <a:p>
+            <a:pPr indent="0" marL="0">
+              <a:buNone/>
+            </a:pPr>
+            <a:r>
+              <a:rPr lang="en-US" sz="1050" b="1" dirty="0">
+                <a:solidFill>
+                  <a:srgbClr val="0F766E"/>
+                </a:solidFill>
+                <a:latin typeface="Noto Sans SC" pitchFamily="34" charset="0"/>
+                <a:ea typeface="Noto Sans SC" pitchFamily="34" charset="-122"/>
+                <a:cs typeface="Noto Sans SC" pitchFamily="34" charset="-120"/>
+              </a:rPr>
+              <a:t>数据处理与可视化课程项目</a:t>
+            </a:r>
+            <a:endParaRPr lang="en-US" sz="1050" dirty="0"/>
+          </a:p>
+        </p:txBody>
+      </p:sp>
+      <p:sp>
+        <p:nvSpPr>
+          <p:cNvPr id="3" name="Text 1"/>
+          <p:cNvSpPr/>
+          <p:nvPr/>
+        </p:nvSpPr>
+        <p:spPr>
+          <a:xfrm>
+            <a:off x="502920" y="576072"/>
+            <a:ext cx="10972800" cy="502920"/>
+          </a:xfrm>
+          <a:prstGeom prst="rect">
+            <a:avLst/>
+          </a:prstGeom>
+          <a:noFill/>
+          <a:ln/>
+        </p:spPr>
+        <p:txBody>
+          <a:bodyPr wrap="square" lIns="0" tIns="0" rIns="0" bIns="0" rtlCol="0" anchor="ctr">
+            <a:normAutofit/>
+          </a:bodyPr>
+          <a:lstStyle/>
+          <a:p>
+            <a:pPr indent="0" marL="0">
+              <a:buNone/>
+            </a:pPr>
+            <a:r>
+              <a:rPr lang="en-US" sz="2300" b="1" dirty="0">
+                <a:solidFill>
+                  <a:srgbClr val="232B38"/>
+                </a:solidFill>
+                <a:latin typeface="Noto Sans SC" pitchFamily="34" charset="0"/>
+                <a:ea typeface="Noto Sans SC" pitchFamily="34" charset="-122"/>
+                <a:cs typeface="Noto Sans SC" pitchFamily="34" charset="-120"/>
+              </a:rPr>
+              <a:t>关系分析：客观基准与人类偏好相关矩阵</a:t>
+            </a:r>
+            <a:endParaRPr lang="en-US" sz="2300" dirty="0"/>
+          </a:p>
+        </p:txBody>
+      </p:sp>
+      <p:sp>
+        <p:nvSpPr>
+          <p:cNvPr id="4" name="Shape 2"/>
+          <p:cNvSpPr/>
+          <p:nvPr/>
+        </p:nvSpPr>
+        <p:spPr>
+          <a:xfrm>
+            <a:off x="502920" y="1161288"/>
+            <a:ext cx="11155680" cy="0"/>
+          </a:xfrm>
+          <a:prstGeom prst="line">
+            <a:avLst/>
+          </a:prstGeom>
+          <a:noFill/>
+          <a:ln w="12700">
+            <a:solidFill>
+              <a:srgbClr val="D8E0EA"/>
+            </a:solidFill>
+            <a:prstDash val="solid"/>
+          </a:ln>
+        </p:spPr>
+      </p:sp>
+      <p:pic>
+        <p:nvPicPr>
+          <p:cNvPr id="5" name="Image 0" descr="C:\Users\HBZuo\Desktop\wrokmean\数据可视化\dashboard\assets\figures\05_correlation_matrix.png">    </p:cNvPr>
+          <p:cNvPicPr>
+            <a:picLocks noChangeAspect="1"/>
+          </p:cNvPicPr>
+          <p:nvPr/>
+        </p:nvPicPr>
+        <p:blipFill>
+          <a:blip r:embed="rId1"/>
+          <a:stretch>
+            <a:fillRect/>
+          </a:stretch>
+        </p:blipFill>
+        <p:spPr>
+          <a:xfrm>
+            <a:off x="502920" y="1417320"/>
+            <a:ext cx="7040880" cy="4407408"/>
+          </a:xfrm>
+          <a:prstGeom prst="rect">
+            <a:avLst/>
+          </a:prstGeom>
+        </p:spPr>
+      </p:pic>
+      <p:sp>
+        <p:nvSpPr>
+          <p:cNvPr id="6" name="Shape 3"/>
+          <p:cNvSpPr/>
+          <p:nvPr/>
+        </p:nvSpPr>
+        <p:spPr>
+          <a:xfrm>
+            <a:off x="7882128" y="1417320"/>
+            <a:ext cx="3291840" cy="1243584"/>
+          </a:xfrm>
+          <a:prstGeom prst="rect">
+            <a:avLst/>
+          </a:prstGeom>
+          <a:solidFill>
+            <a:srgbClr val="F8FAFC"/>
+          </a:solidFill>
+          <a:ln w="12700">
+            <a:solidFill>
+              <a:srgbClr val="D8E0EA"/>
+            </a:solidFill>
+            <a:prstDash val="solid"/>
+          </a:ln>
+        </p:spPr>
+      </p:sp>
+      <p:sp>
+        <p:nvSpPr>
+          <p:cNvPr id="7" name="Text 4"/>
+          <p:cNvSpPr/>
+          <p:nvPr/>
+        </p:nvSpPr>
+        <p:spPr>
+          <a:xfrm>
+            <a:off x="8083296" y="1600200"/>
+            <a:ext cx="2889504" cy="237744"/>
+          </a:xfrm>
+          <a:prstGeom prst="rect">
+            <a:avLst/>
+          </a:prstGeom>
+          <a:noFill/>
+          <a:ln/>
+        </p:spPr>
+        <p:txBody>
+          <a:bodyPr wrap="square" lIns="0" tIns="0" rIns="0" bIns="0" rtlCol="0" anchor="ctr"/>
+          <a:lstStyle/>
+          <a:p>
+            <a:pPr indent="0" marL="0">
+              <a:buNone/>
+            </a:pPr>
+            <a:r>
+              <a:rPr lang="en-US" sz="1300" b="1" dirty="0">
+                <a:solidFill>
+                  <a:srgbClr val="2563EB"/>
+                </a:solidFill>
+                <a:latin typeface="Noto Sans SC" pitchFamily="34" charset="0"/>
+                <a:ea typeface="Noto Sans SC" pitchFamily="34" charset="-122"/>
+                <a:cs typeface="Noto Sans SC" pitchFamily="34" charset="-120"/>
+              </a:rPr>
+              <a:t>图中看到了什么</a:t>
+            </a:r>
+            <a:endParaRPr lang="en-US" sz="1300" dirty="0"/>
+          </a:p>
+        </p:txBody>
+      </p:sp>
+      <p:sp>
+        <p:nvSpPr>
+          <p:cNvPr id="8" name="Text 5"/>
+          <p:cNvSpPr/>
+          <p:nvPr/>
+        </p:nvSpPr>
+        <p:spPr>
+          <a:xfrm>
+            <a:off x="8083296" y="1929384"/>
+            <a:ext cx="2889504" cy="585216"/>
+          </a:xfrm>
+          <a:prstGeom prst="rect">
+            <a:avLst/>
+          </a:prstGeom>
+          <a:noFill/>
+          <a:ln/>
+        </p:spPr>
+        <p:txBody>
+          <a:bodyPr wrap="square" lIns="0" tIns="0" rIns="0" bIns="0" rtlCol="0" anchor="ctr">
+            <a:normAutofit/>
+          </a:bodyPr>
+          <a:lstStyle/>
+          <a:p>
+            <a:pPr indent="0" marL="0">
+              <a:buNone/>
+            </a:pPr>
+            <a:r>
+              <a:rPr lang="en-US" sz="1350" dirty="0">
+                <a:solidFill>
+                  <a:srgbClr val="232B38"/>
+                </a:solidFill>
+                <a:latin typeface="Noto Sans SC" pitchFamily="34" charset="0"/>
+                <a:ea typeface="Noto Sans SC" pitchFamily="34" charset="-122"/>
+                <a:cs typeface="Noto Sans SC" pitchFamily="34" charset="-120"/>
+              </a:rPr>
+              <a:t>矩阵展示多个基准指标、Elo、速度和延迟之间的相关关系。</a:t>
+            </a:r>
+            <a:endParaRPr lang="en-US" sz="1350" dirty="0"/>
+          </a:p>
+        </p:txBody>
+      </p:sp>
+      <p:sp>
+        <p:nvSpPr>
+          <p:cNvPr id="9" name="Shape 6"/>
+          <p:cNvSpPr/>
+          <p:nvPr/>
+        </p:nvSpPr>
+        <p:spPr>
+          <a:xfrm>
+            <a:off x="7882128" y="2834640"/>
+            <a:ext cx="3291840" cy="1417320"/>
+          </a:xfrm>
+          <a:prstGeom prst="rect">
+            <a:avLst/>
+          </a:prstGeom>
+          <a:solidFill>
+            <a:srgbClr val="F8FAFC"/>
+          </a:solidFill>
+          <a:ln w="12700">
+            <a:solidFill>
+              <a:srgbClr val="D8E0EA"/>
+            </a:solidFill>
+            <a:prstDash val="solid"/>
+          </a:ln>
+        </p:spPr>
+      </p:sp>
+      <p:sp>
+        <p:nvSpPr>
+          <p:cNvPr id="10" name="Text 7"/>
+          <p:cNvSpPr/>
+          <p:nvPr/>
+        </p:nvSpPr>
+        <p:spPr>
+          <a:xfrm>
+            <a:off x="8083296" y="3017520"/>
+            <a:ext cx="2889504" cy="237744"/>
+          </a:xfrm>
+          <a:prstGeom prst="rect">
+            <a:avLst/>
+          </a:prstGeom>
+          <a:noFill/>
+          <a:ln/>
+        </p:spPr>
+        <p:txBody>
+          <a:bodyPr wrap="square" lIns="0" tIns="0" rIns="0" bIns="0" rtlCol="0" anchor="ctr"/>
+          <a:lstStyle/>
+          <a:p>
+            <a:pPr indent="0" marL="0">
+              <a:buNone/>
+            </a:pPr>
+            <a:r>
+              <a:rPr lang="en-US" sz="1300" b="1" dirty="0">
+                <a:solidFill>
+                  <a:srgbClr val="0F766E"/>
+                </a:solidFill>
+                <a:latin typeface="Noto Sans SC" pitchFamily="34" charset="0"/>
+                <a:ea typeface="Noto Sans SC" pitchFamily="34" charset="-122"/>
+                <a:cs typeface="Noto Sans SC" pitchFamily="34" charset="-120"/>
+              </a:rPr>
+              <a:t>专业上说明什么</a:t>
+            </a:r>
+            <a:endParaRPr lang="en-US" sz="1300" dirty="0"/>
+          </a:p>
+        </p:txBody>
+      </p:sp>
+      <p:sp>
+        <p:nvSpPr>
+          <p:cNvPr id="11" name="Text 8"/>
+          <p:cNvSpPr/>
+          <p:nvPr/>
+        </p:nvSpPr>
+        <p:spPr>
+          <a:xfrm>
+            <a:off x="8083296" y="3346704"/>
+            <a:ext cx="2889504" cy="758952"/>
+          </a:xfrm>
+          <a:prstGeom prst="rect">
+            <a:avLst/>
+          </a:prstGeom>
+          <a:noFill/>
+          <a:ln/>
+        </p:spPr>
+        <p:txBody>
+          <a:bodyPr wrap="square" lIns="0" tIns="0" rIns="0" bIns="0" rtlCol="0" anchor="ctr">
+            <a:normAutofit/>
+          </a:bodyPr>
+          <a:lstStyle/>
+          <a:p>
+            <a:pPr indent="0" marL="0">
+              <a:buNone/>
+            </a:pPr>
+            <a:r>
+              <a:rPr lang="en-US" sz="1350" dirty="0">
+                <a:solidFill>
+                  <a:srgbClr val="232B38"/>
+                </a:solidFill>
+                <a:latin typeface="Noto Sans SC" pitchFamily="34" charset="0"/>
+                <a:ea typeface="Noto Sans SC" pitchFamily="34" charset="-122"/>
+                <a:cs typeface="Noto Sans SC" pitchFamily="34" charset="-120"/>
+              </a:rPr>
+              <a:t>这是相关性热力图，用来判断哪些指标更接近真实偏好，哪些指标只是局部能力。</a:t>
+            </a:r>
+            <a:endParaRPr lang="en-US" sz="1350" dirty="0"/>
+          </a:p>
+        </p:txBody>
+      </p:sp>
+      <p:sp>
+        <p:nvSpPr>
+          <p:cNvPr id="12" name="Shape 9"/>
+          <p:cNvSpPr/>
+          <p:nvPr/>
+        </p:nvSpPr>
+        <p:spPr>
+          <a:xfrm>
+            <a:off x="7882128" y="4434840"/>
+            <a:ext cx="3291840" cy="1234440"/>
+          </a:xfrm>
+          <a:prstGeom prst="rect">
+            <a:avLst/>
+          </a:prstGeom>
+          <a:solidFill>
+            <a:srgbClr val="F8FAFC"/>
+          </a:solidFill>
+          <a:ln w="12700">
+            <a:solidFill>
+              <a:srgbClr val="D8E0EA"/>
+            </a:solidFill>
+            <a:prstDash val="solid"/>
+          </a:ln>
+        </p:spPr>
+      </p:sp>
+      <p:sp>
+        <p:nvSpPr>
+          <p:cNvPr id="13" name="Text 10"/>
+          <p:cNvSpPr/>
+          <p:nvPr/>
+        </p:nvSpPr>
+        <p:spPr>
+          <a:xfrm>
+            <a:off x="8083296" y="4617720"/>
+            <a:ext cx="2889504" cy="237744"/>
+          </a:xfrm>
+          <a:prstGeom prst="rect">
+            <a:avLst/>
+          </a:prstGeom>
+          <a:noFill/>
+          <a:ln/>
+        </p:spPr>
+        <p:txBody>
+          <a:bodyPr wrap="square" lIns="0" tIns="0" rIns="0" bIns="0" rtlCol="0" anchor="ctr"/>
+          <a:lstStyle/>
+          <a:p>
+            <a:pPr indent="0" marL="0">
+              <a:buNone/>
+            </a:pPr>
+            <a:r>
+              <a:rPr lang="en-US" sz="1300" b="1" dirty="0">
+                <a:solidFill>
+                  <a:srgbClr val="EA580C"/>
+                </a:solidFill>
+                <a:latin typeface="Noto Sans SC" pitchFamily="34" charset="0"/>
+                <a:ea typeface="Noto Sans SC" pitchFamily="34" charset="-122"/>
+                <a:cs typeface="Noto Sans SC" pitchFamily="34" charset="-120"/>
+              </a:rPr>
+              <a:t>生活中意味着什么</a:t>
+            </a:r>
+            <a:endParaRPr lang="en-US" sz="1300" dirty="0"/>
+          </a:p>
+        </p:txBody>
+      </p:sp>
+      <p:sp>
+        <p:nvSpPr>
+          <p:cNvPr id="14" name="Text 11"/>
+          <p:cNvSpPr/>
+          <p:nvPr/>
+        </p:nvSpPr>
+        <p:spPr>
+          <a:xfrm>
+            <a:off x="8083296" y="4946904"/>
+            <a:ext cx="2889504" cy="576072"/>
+          </a:xfrm>
+          <a:prstGeom prst="rect">
+            <a:avLst/>
+          </a:prstGeom>
+          <a:noFill/>
+          <a:ln/>
+        </p:spPr>
+        <p:txBody>
+          <a:bodyPr wrap="square" lIns="0" tIns="0" rIns="0" bIns="0" rtlCol="0" anchor="ctr">
+            <a:normAutofit/>
+          </a:bodyPr>
+          <a:lstStyle/>
+          <a:p>
+            <a:pPr indent="0" marL="0">
+              <a:buNone/>
+            </a:pPr>
+            <a:r>
+              <a:rPr lang="en-US" sz="1350" dirty="0">
+                <a:solidFill>
+                  <a:srgbClr val="232B38"/>
+                </a:solidFill>
+                <a:latin typeface="Noto Sans SC" pitchFamily="34" charset="0"/>
+                <a:ea typeface="Noto Sans SC" pitchFamily="34" charset="-122"/>
+                <a:cs typeface="Noto Sans SC" pitchFamily="34" charset="-120"/>
+              </a:rPr>
+              <a:t>考试分数高不一定代表用起来最好，是否听懂要求、回复是否快也很重要。</a:t>
+            </a:r>
+            <a:endParaRPr lang="en-US" sz="1350" dirty="0"/>
+          </a:p>
+        </p:txBody>
+      </p:sp>
+      <p:sp>
+        <p:nvSpPr>
+          <p:cNvPr id="15" name="Text 12"/>
+          <p:cNvSpPr/>
+          <p:nvPr/>
+        </p:nvSpPr>
+        <p:spPr>
+          <a:xfrm>
+            <a:off x="502920" y="6519672"/>
+            <a:ext cx="10972800" cy="146304"/>
+          </a:xfrm>
+          <a:prstGeom prst="rect">
+            <a:avLst/>
+          </a:prstGeom>
+          <a:noFill/>
+          <a:ln/>
+        </p:spPr>
+        <p:txBody>
+          <a:bodyPr wrap="square" lIns="0" tIns="0" rIns="0" bIns="0" rtlCol="0" anchor="ctr"/>
+          <a:lstStyle/>
+          <a:p>
+            <a:pPr indent="0" marL="0">
+              <a:buNone/>
+            </a:pPr>
+            <a:r>
+              <a:rPr lang="en-US" sz="850" dirty="0">
+                <a:solidFill>
+                  <a:srgbClr val="8A97A8"/>
+                </a:solidFill>
+                <a:latin typeface="Noto Sans SC" pitchFamily="34" charset="0"/>
+                <a:ea typeface="Noto Sans SC" pitchFamily="34" charset="-122"/>
+                <a:cs typeface="Noto Sans SC" pitchFamily="34" charset="-120"/>
+              </a:rPr>
+              <a:t>主流大模型数据可视化分析 · 9</a:t>
             </a:r>
             <a:endParaRPr lang="en-US" sz="850" dirty="0"/>
           </a:p>

--- a/presentation/LLM项目课堂展示.pptx
+++ b/presentation/LLM项目课堂展示.pptx
@@ -2086,7 +2086,7 @@
                 <a:ea typeface="Noto Sans SC" pitchFamily="34" charset="-122"/>
                 <a:cs typeface="Noto Sans SC" pitchFamily="34" charset="-120"/>
               </a:rPr>
-              <a:t>68 个代表模型 · 17 个系列 · 截止 2026-06-05</a:t>
+              <a:t>71 个代表模型 · 17 个系列 · 截止 2026-06-05</a:t>
             </a:r>
             <a:endParaRPr lang="en-US" sz="1350" dirty="0"/>
           </a:p>
